--- a/IOTA_Strategy_Hybrid_KR.pptx
+++ b/IOTA_Strategy_Hybrid_KR.pptx
@@ -77,6 +77,8 @@
     <p:sldId id="325" r:id="rId76"/>
     <p:sldId id="326" r:id="rId77"/>
     <p:sldId id="327" r:id="rId78"/>
+    <p:sldId id="328" r:id="rId79"/>
+    <p:sldId id="329" r:id="rId80"/>
   </p:sldIdLst>
   <p:sldSz cx="12191695" cy="6858000" type="screen4x3"/>
   <p:notesSz cx="6858000" cy="9144000"/>
@@ -3450,7 +3452,7 @@
             <a:r>
               <a:rPr sz="1800" b="1">
                 <a:solidFill>
-                  <a:srgbClr val="000000"/>
+                  <a:srgbClr val="10B981"/>
                 </a:solidFill>
                 <a:latin typeface="Pretendard Variable"/>
               </a:rPr>
@@ -3489,7 +3491,7 @@
             <a:r>
               <a:rPr sz="3900" b="1">
                 <a:solidFill>
-                  <a:srgbClr val="000000"/>
+                  <a:srgbClr val="1D1D1F"/>
                 </a:solidFill>
                 <a:latin typeface="Pretendard Variable"/>
               </a:rPr>
@@ -3528,7 +3530,7 @@
             <a:r>
               <a:rPr sz="975" b="1">
                 <a:solidFill>
-                  <a:srgbClr val="000000"/>
+                  <a:srgbClr val="FFFFFF"/>
                 </a:solidFill>
                 <a:latin typeface="Pretendard Variable"/>
               </a:rPr>
@@ -3567,7 +3569,7 @@
             <a:r>
               <a:rPr sz="1950" b="1">
                 <a:solidFill>
-                  <a:srgbClr val="000000"/>
+                  <a:srgbClr val="FFFFFF"/>
                 </a:solidFill>
                 <a:latin typeface="Pretendard Variable"/>
               </a:rPr>
@@ -3606,7 +3608,7 @@
             <a:r>
               <a:rPr sz="1050" b="1">
                 <a:solidFill>
-                  <a:srgbClr val="000000"/>
+                  <a:srgbClr val="1E3A8A"/>
                 </a:solidFill>
                 <a:latin typeface="Pretendard Variable"/>
               </a:rPr>
@@ -3645,7 +3647,7 @@
             <a:r>
               <a:rPr sz="1200" b="1">
                 <a:solidFill>
-                  <a:srgbClr val="000000"/>
+                  <a:srgbClr val="FFFFFF"/>
                 </a:solidFill>
                 <a:latin typeface="Pretendard Variable"/>
               </a:rPr>
@@ -3684,7 +3686,7 @@
             <a:r>
               <a:rPr sz="975">
                 <a:solidFill>
-                  <a:srgbClr val="000000"/>
+                  <a:srgbClr val="1E3A8A"/>
                 </a:solidFill>
                 <a:latin typeface="Pretendard Variable"/>
               </a:rPr>
@@ -3723,7 +3725,7 @@
             <a:r>
               <a:rPr sz="1200" b="1">
                 <a:solidFill>
-                  <a:srgbClr val="000000"/>
+                  <a:srgbClr val="FFFFFF"/>
                 </a:solidFill>
                 <a:latin typeface="Pretendard Variable"/>
               </a:rPr>
@@ -3762,7 +3764,7 @@
             <a:r>
               <a:rPr sz="975">
                 <a:solidFill>
-                  <a:srgbClr val="000000"/>
+                  <a:srgbClr val="1E3A8A"/>
                 </a:solidFill>
                 <a:latin typeface="Pretendard Variable"/>
               </a:rPr>
@@ -3801,7 +3803,7 @@
             <a:r>
               <a:rPr sz="975" b="1">
                 <a:solidFill>
-                  <a:srgbClr val="000000"/>
+                  <a:srgbClr val="1E3A8A"/>
                 </a:solidFill>
                 <a:latin typeface="Pretendard Variable"/>
               </a:rPr>
@@ -3840,7 +3842,7 @@
             <a:r>
               <a:rPr sz="975" b="1">
                 <a:solidFill>
-                  <a:srgbClr val="000000"/>
+                  <a:srgbClr val="FFFFFF"/>
                 </a:solidFill>
                 <a:latin typeface="Pretendard Variable"/>
               </a:rPr>
@@ -3879,7 +3881,7 @@
             <a:r>
               <a:rPr sz="1950" b="1">
                 <a:solidFill>
-                  <a:srgbClr val="000000"/>
+                  <a:srgbClr val="1E3A8A"/>
                 </a:solidFill>
                 <a:latin typeface="Pretendard Variable"/>
               </a:rPr>
@@ -3918,7 +3920,7 @@
             <a:r>
               <a:rPr sz="825" b="1">
                 <a:solidFill>
-                  <a:srgbClr val="000000"/>
+                  <a:srgbClr val="1E3A8A"/>
                 </a:solidFill>
                 <a:latin typeface="Pretendard Variable"/>
               </a:rPr>
@@ -3957,7 +3959,7 @@
             <a:r>
               <a:rPr sz="1125" b="1">
                 <a:solidFill>
-                  <a:srgbClr val="000000"/>
+                  <a:srgbClr val="1E3A8A"/>
                 </a:solidFill>
                 <a:latin typeface="Pretendard Variable"/>
               </a:rPr>
@@ -3996,7 +3998,7 @@
             <a:r>
               <a:rPr sz="825" b="1">
                 <a:solidFill>
-                  <a:srgbClr val="000000"/>
+                  <a:srgbClr val="1E3A8A"/>
                 </a:solidFill>
                 <a:latin typeface="Pretendard Variable"/>
               </a:rPr>
@@ -4035,7 +4037,7 @@
             <a:r>
               <a:rPr sz="1350" b="1">
                 <a:solidFill>
-                  <a:srgbClr val="000000"/>
+                  <a:srgbClr val="10B981"/>
                 </a:solidFill>
                 <a:latin typeface="Pretendard Variable"/>
               </a:rPr>
@@ -4074,7 +4076,7 @@
             <a:r>
               <a:rPr sz="975" b="1">
                 <a:solidFill>
-                  <a:srgbClr val="000000"/>
+                  <a:srgbClr val="1E3A8A"/>
                 </a:solidFill>
                 <a:latin typeface="Pretendard Variable"/>
               </a:rPr>
@@ -4113,7 +4115,7 @@
             <a:r>
               <a:rPr sz="1425">
                 <a:solidFill>
-                  <a:srgbClr val="000000"/>
+                  <a:srgbClr val="1E3A8A"/>
                 </a:solidFill>
                 <a:latin typeface="Pretendard Variable"/>
               </a:rPr>
@@ -4194,7 +4196,7 @@
             <a:r>
               <a:rPr sz="1800" b="1">
                 <a:solidFill>
-                  <a:srgbClr val="000000"/>
+                  <a:srgbClr val="1E3A8A"/>
                 </a:solidFill>
                 <a:latin typeface="Pretendard Variable"/>
               </a:rPr>
@@ -4233,7 +4235,7 @@
             <a:r>
               <a:rPr sz="3900" b="1">
                 <a:solidFill>
-                  <a:srgbClr val="000000"/>
+                  <a:srgbClr val="1D1D1F"/>
                 </a:solidFill>
                 <a:latin typeface="Pretendard Variable"/>
               </a:rPr>
@@ -4272,7 +4274,7 @@
             <a:r>
               <a:rPr sz="975" b="1">
                 <a:solidFill>
-                  <a:srgbClr val="000000"/>
+                  <a:srgbClr val="FFFFFF"/>
                 </a:solidFill>
                 <a:latin typeface="Pretendard Variable"/>
               </a:rPr>
@@ -4311,7 +4313,7 @@
             <a:r>
               <a:rPr sz="1950" b="1">
                 <a:solidFill>
-                  <a:srgbClr val="000000"/>
+                  <a:srgbClr val="1E3A8A"/>
                 </a:solidFill>
                 <a:latin typeface="Pretendard Variable"/>
               </a:rPr>
@@ -4350,7 +4352,7 @@
             <a:r>
               <a:rPr sz="1050" b="1">
                 <a:solidFill>
-                  <a:srgbClr val="000000"/>
+                  <a:srgbClr val="1E3A8A"/>
                 </a:solidFill>
                 <a:latin typeface="Pretendard Variable"/>
               </a:rPr>
@@ -4389,7 +4391,7 @@
             <a:r>
               <a:rPr sz="1200" b="1">
                 <a:solidFill>
-                  <a:srgbClr val="000000"/>
+                  <a:srgbClr val="1E3A8A"/>
                 </a:solidFill>
                 <a:latin typeface="Pretendard Variable"/>
               </a:rPr>
@@ -4428,7 +4430,7 @@
             <a:r>
               <a:rPr sz="1050" b="1">
                 <a:solidFill>
-                  <a:srgbClr val="000000"/>
+                  <a:srgbClr val="1E3A8A"/>
                 </a:solidFill>
                 <a:latin typeface="Pretendard Variable"/>
               </a:rPr>
@@ -4467,7 +4469,7 @@
             <a:r>
               <a:rPr sz="1200" b="1">
                 <a:solidFill>
-                  <a:srgbClr val="000000"/>
+                  <a:srgbClr val="1E3A8A"/>
                 </a:solidFill>
                 <a:latin typeface="Pretendard Variable"/>
               </a:rPr>
@@ -4506,7 +4508,7 @@
             <a:r>
               <a:rPr sz="1050" b="1">
                 <a:solidFill>
-                  <a:srgbClr val="000000"/>
+                  <a:srgbClr val="1E3A8A"/>
                 </a:solidFill>
                 <a:latin typeface="Pretendard Variable"/>
               </a:rPr>
@@ -4545,7 +4547,7 @@
             <a:r>
               <a:rPr sz="975" b="1">
                 <a:solidFill>
-                  <a:srgbClr val="000000"/>
+                  <a:srgbClr val="1E3A8A"/>
                 </a:solidFill>
                 <a:latin typeface="Pretendard Variable"/>
               </a:rPr>
@@ -4584,7 +4586,7 @@
             <a:r>
               <a:rPr sz="975" b="1">
                 <a:solidFill>
-                  <a:srgbClr val="000000"/>
+                  <a:srgbClr val="FFFFFF"/>
                 </a:solidFill>
                 <a:latin typeface="Pretendard Variable"/>
               </a:rPr>
@@ -4623,7 +4625,7 @@
             <a:r>
               <a:rPr sz="1950" b="1">
                 <a:solidFill>
-                  <a:srgbClr val="000000"/>
+                  <a:srgbClr val="FFFFFF"/>
                 </a:solidFill>
                 <a:latin typeface="Pretendard Variable"/>
               </a:rPr>
@@ -4662,7 +4664,7 @@
             <a:r>
               <a:rPr sz="900" b="1">
                 <a:solidFill>
-                  <a:srgbClr val="000000"/>
+                  <a:srgbClr val="1E3A8A"/>
                 </a:solidFill>
                 <a:latin typeface="Pretendard Variable"/>
               </a:rPr>
@@ -4701,7 +4703,7 @@
             <a:r>
               <a:rPr sz="2850" b="1">
                 <a:solidFill>
-                  <a:srgbClr val="000000"/>
+                  <a:srgbClr val="FFFFFF"/>
                 </a:solidFill>
                 <a:latin typeface="Pretendard Variable"/>
               </a:rPr>
@@ -4740,7 +4742,7 @@
             <a:r>
               <a:rPr sz="900" b="1">
                 <a:solidFill>
-                  <a:srgbClr val="000000"/>
+                  <a:srgbClr val="1E3A8A"/>
                 </a:solidFill>
                 <a:latin typeface="Pretendard Variable"/>
               </a:rPr>
@@ -4779,7 +4781,7 @@
             <a:r>
               <a:rPr sz="900" b="1">
                 <a:solidFill>
-                  <a:srgbClr val="000000"/>
+                  <a:srgbClr val="1E3A8A"/>
                 </a:solidFill>
                 <a:latin typeface="Pretendard Variable"/>
               </a:rPr>
@@ -4818,7 +4820,7 @@
             <a:r>
               <a:rPr sz="2850" b="1">
                 <a:solidFill>
-                  <a:srgbClr val="000000"/>
+                  <a:srgbClr val="FFFFFF"/>
                 </a:solidFill>
                 <a:latin typeface="Pretendard Variable"/>
               </a:rPr>
@@ -4857,7 +4859,7 @@
             <a:r>
               <a:rPr sz="900" b="1">
                 <a:solidFill>
-                  <a:srgbClr val="000000"/>
+                  <a:srgbClr val="1E3A8A"/>
                 </a:solidFill>
                 <a:latin typeface="Pretendard Variable"/>
               </a:rPr>
@@ -4896,7 +4898,7 @@
             <a:r>
               <a:rPr sz="975" b="1">
                 <a:solidFill>
-                  <a:srgbClr val="000000"/>
+                  <a:srgbClr val="1E3A8A"/>
                 </a:solidFill>
                 <a:latin typeface="Pretendard Variable"/>
               </a:rPr>
@@ -4935,7 +4937,7 @@
             <a:r>
               <a:rPr sz="1425">
                 <a:solidFill>
-                  <a:srgbClr val="000000"/>
+                  <a:srgbClr val="1E3A8A"/>
                 </a:solidFill>
                 <a:latin typeface="Pretendard Variable"/>
               </a:rPr>
@@ -5016,7 +5018,7 @@
             <a:r>
               <a:rPr sz="1950" b="1">
                 <a:solidFill>
-                  <a:srgbClr val="000000"/>
+                  <a:srgbClr val="0F172A"/>
                 </a:solidFill>
                 <a:latin typeface="Pretendard Variable"/>
               </a:rPr>
@@ -5055,7 +5057,7 @@
             <a:r>
               <a:rPr sz="4950" b="1">
                 <a:solidFill>
-                  <a:srgbClr val="000000"/>
+                  <a:srgbClr val="0F172A"/>
                 </a:solidFill>
                 <a:latin typeface="Pretendard Variable"/>
               </a:rPr>
@@ -5136,7 +5138,7 @@
             <a:r>
               <a:rPr sz="1800" b="1">
                 <a:solidFill>
-                  <a:srgbClr val="000000"/>
+                  <a:srgbClr val="1E3A8A"/>
                 </a:solidFill>
                 <a:latin typeface="Pretendard Variable"/>
               </a:rPr>
@@ -5175,7 +5177,7 @@
             <a:r>
               <a:rPr sz="3900" b="1">
                 <a:solidFill>
-                  <a:srgbClr val="000000"/>
+                  <a:srgbClr val="1D1D1F"/>
                 </a:solidFill>
                 <a:latin typeface="Pretendard Variable"/>
               </a:rPr>
@@ -5214,7 +5216,7 @@
             <a:r>
               <a:rPr sz="975" b="1">
                 <a:solidFill>
-                  <a:srgbClr val="000000"/>
+                  <a:srgbClr val="1E3A8A"/>
                 </a:solidFill>
                 <a:latin typeface="Pretendard Variable"/>
               </a:rPr>
@@ -5253,7 +5255,7 @@
             <a:r>
               <a:rPr sz="1800" b="1">
                 <a:solidFill>
-                  <a:srgbClr val="000000"/>
+                  <a:srgbClr val="1E3A8A"/>
                 </a:solidFill>
                 <a:latin typeface="Pretendard Variable"/>
               </a:rPr>
@@ -5292,7 +5294,7 @@
             <a:r>
               <a:rPr sz="1125" b="1">
                 <a:solidFill>
-                  <a:srgbClr val="000000"/>
+                  <a:srgbClr val="1E3A8A"/>
                 </a:solidFill>
                 <a:latin typeface="Pretendard Variable"/>
               </a:rPr>
@@ -5331,7 +5333,7 @@
             <a:r>
               <a:rPr sz="1125" b="1">
                 <a:solidFill>
-                  <a:srgbClr val="000000"/>
+                  <a:srgbClr val="1E3A8A"/>
                 </a:solidFill>
                 <a:latin typeface="Pretendard Variable"/>
               </a:rPr>
@@ -5370,7 +5372,7 @@
             <a:r>
               <a:rPr sz="1125" b="1">
                 <a:solidFill>
-                  <a:srgbClr val="000000"/>
+                  <a:srgbClr val="1E3A8A"/>
                 </a:solidFill>
                 <a:latin typeface="Pretendard Variable"/>
               </a:rPr>
@@ -5409,7 +5411,7 @@
             <a:r>
               <a:rPr sz="975" b="1">
                 <a:solidFill>
-                  <a:srgbClr val="000000"/>
+                  <a:srgbClr val="1E3A8A"/>
                 </a:solidFill>
                 <a:latin typeface="Pretendard Variable"/>
               </a:rPr>
@@ -5448,7 +5450,7 @@
             <a:r>
               <a:rPr sz="750" b="1">
                 <a:solidFill>
-                  <a:srgbClr val="000000"/>
+                  <a:srgbClr val="1E3A8A"/>
                 </a:solidFill>
                 <a:latin typeface="Pretendard Variable"/>
               </a:rPr>
@@ -5487,7 +5489,7 @@
             <a:r>
               <a:rPr sz="2100" b="1">
                 <a:solidFill>
-                  <a:srgbClr val="000000"/>
+                  <a:srgbClr val="FFFFFF"/>
                 </a:solidFill>
                 <a:latin typeface="Pretendard Variable"/>
               </a:rPr>
@@ -5526,7 +5528,7 @@
             <a:r>
               <a:rPr sz="825" b="1">
                 <a:solidFill>
-                  <a:srgbClr val="000000"/>
+                  <a:srgbClr val="FFFFFF"/>
                 </a:solidFill>
                 <a:latin typeface="Pretendard Variable"/>
               </a:rPr>
@@ -5565,7 +5567,7 @@
             <a:r>
               <a:rPr sz="975" b="1">
                 <a:solidFill>
-                  <a:srgbClr val="000000"/>
+                  <a:srgbClr val="FFFFFF"/>
                 </a:solidFill>
                 <a:latin typeface="Pretendard Variable"/>
               </a:rPr>
@@ -5604,7 +5606,7 @@
             <a:r>
               <a:rPr sz="1800" b="1">
                 <a:solidFill>
-                  <a:srgbClr val="000000"/>
+                  <a:srgbClr val="FFFFFF"/>
                 </a:solidFill>
                 <a:latin typeface="Pretendard Variable"/>
               </a:rPr>
@@ -5643,7 +5645,7 @@
             <a:r>
               <a:rPr sz="1125" b="1">
                 <a:solidFill>
-                  <a:srgbClr val="000000"/>
+                  <a:srgbClr val="1E3A8A"/>
                 </a:solidFill>
                 <a:latin typeface="Pretendard Variable"/>
               </a:rPr>
@@ -5682,7 +5684,7 @@
             <a:r>
               <a:rPr sz="1125" b="1">
                 <a:solidFill>
-                  <a:srgbClr val="000000"/>
+                  <a:srgbClr val="1E3A8A"/>
                 </a:solidFill>
                 <a:latin typeface="Pretendard Variable"/>
               </a:rPr>
@@ -5721,7 +5723,7 @@
             <a:r>
               <a:rPr sz="1125" b="1">
                 <a:solidFill>
-                  <a:srgbClr val="000000"/>
+                  <a:srgbClr val="1E3A8A"/>
                 </a:solidFill>
                 <a:latin typeface="Pretendard Variable"/>
               </a:rPr>
@@ -5760,7 +5762,7 @@
             <a:r>
               <a:rPr sz="975" b="1">
                 <a:solidFill>
-                  <a:srgbClr val="000000"/>
+                  <a:srgbClr val="1E3A8A"/>
                 </a:solidFill>
                 <a:latin typeface="Pretendard Variable"/>
               </a:rPr>
@@ -5799,7 +5801,7 @@
             <a:r>
               <a:rPr sz="1425">
                 <a:solidFill>
-                  <a:srgbClr val="000000"/>
+                  <a:srgbClr val="1E3A8A"/>
                 </a:solidFill>
                 <a:latin typeface="Pretendard Variable"/>
               </a:rPr>
@@ -5880,7 +5882,7 @@
             <a:r>
               <a:rPr sz="1800" b="1">
                 <a:solidFill>
-                  <a:srgbClr val="000000"/>
+                  <a:srgbClr val="1E3A8A"/>
                 </a:solidFill>
                 <a:latin typeface="Pretendard Variable"/>
               </a:rPr>
@@ -5919,7 +5921,7 @@
             <a:r>
               <a:rPr sz="3900" b="1">
                 <a:solidFill>
-                  <a:srgbClr val="000000"/>
+                  <a:srgbClr val="1D1D1F"/>
                 </a:solidFill>
                 <a:latin typeface="Pretendard Variable"/>
               </a:rPr>
@@ -5958,7 +5960,7 @@
             <a:r>
               <a:rPr sz="975" b="1">
                 <a:solidFill>
-                  <a:srgbClr val="000000"/>
+                  <a:srgbClr val="FFFFFF"/>
                 </a:solidFill>
                 <a:latin typeface="Pretendard Variable"/>
               </a:rPr>
@@ -5997,7 +5999,7 @@
             <a:r>
               <a:rPr sz="1950" b="1">
                 <a:solidFill>
-                  <a:srgbClr val="000000"/>
+                  <a:srgbClr val="1E3A8A"/>
                 </a:solidFill>
                 <a:latin typeface="Pretendard Variable"/>
               </a:rPr>
@@ -6036,7 +6038,7 @@
             <a:r>
               <a:rPr sz="1125" b="1">
                 <a:solidFill>
-                  <a:srgbClr val="000000"/>
+                  <a:srgbClr val="1E3A8A"/>
                 </a:solidFill>
                 <a:latin typeface="Pretendard Variable"/>
               </a:rPr>
@@ -6075,7 +6077,7 @@
             <a:r>
               <a:rPr sz="1125" b="1">
                 <a:solidFill>
-                  <a:srgbClr val="000000"/>
+                  <a:srgbClr val="1E3A8A"/>
                 </a:solidFill>
                 <a:latin typeface="Pretendard Variable"/>
               </a:rPr>
@@ -6114,7 +6116,7 @@
             <a:r>
               <a:rPr sz="1125" b="1">
                 <a:solidFill>
-                  <a:srgbClr val="000000"/>
+                  <a:srgbClr val="1E3A8A"/>
                 </a:solidFill>
                 <a:latin typeface="Pretendard Variable"/>
               </a:rPr>
@@ -6153,7 +6155,7 @@
             <a:r>
               <a:rPr sz="1125" b="1">
                 <a:solidFill>
-                  <a:srgbClr val="000000"/>
+                  <a:srgbClr val="1E3A8A"/>
                 </a:solidFill>
                 <a:latin typeface="Pretendard Variable"/>
               </a:rPr>
@@ -6192,7 +6194,7 @@
             <a:r>
               <a:rPr sz="975" b="1">
                 <a:solidFill>
-                  <a:srgbClr val="000000"/>
+                  <a:srgbClr val="1E3A8A"/>
                 </a:solidFill>
                 <a:latin typeface="Pretendard Variable"/>
               </a:rPr>
@@ -6231,7 +6233,7 @@
             <a:r>
               <a:rPr sz="975" b="1">
                 <a:solidFill>
-                  <a:srgbClr val="000000"/>
+                  <a:srgbClr val="FFFFFF"/>
                 </a:solidFill>
                 <a:latin typeface="Pretendard Variable"/>
               </a:rPr>
@@ -6270,7 +6272,7 @@
             <a:r>
               <a:rPr sz="1950" b="1">
                 <a:solidFill>
-                  <a:srgbClr val="000000"/>
+                  <a:srgbClr val="FFFFFF"/>
                 </a:solidFill>
                 <a:latin typeface="Pretendard Variable"/>
               </a:rPr>
@@ -6309,7 +6311,7 @@
             <a:r>
               <a:rPr sz="1200" b="1">
                 <a:solidFill>
-                  <a:srgbClr val="000000"/>
+                  <a:srgbClr val="FFFFFF"/>
                 </a:solidFill>
                 <a:latin typeface="Pretendard Variable"/>
               </a:rPr>
@@ -6348,7 +6350,7 @@
             <a:r>
               <a:rPr sz="975" b="1">
                 <a:solidFill>
-                  <a:srgbClr val="000000"/>
+                  <a:srgbClr val="1E3A8A"/>
                 </a:solidFill>
                 <a:latin typeface="Pretendard Variable"/>
               </a:rPr>
@@ -6387,7 +6389,7 @@
             <a:r>
               <a:rPr sz="1200" b="1">
                 <a:solidFill>
-                  <a:srgbClr val="000000"/>
+                  <a:srgbClr val="FFFFFF"/>
                 </a:solidFill>
                 <a:latin typeface="Pretendard Variable"/>
               </a:rPr>
@@ -6426,7 +6428,7 @@
             <a:r>
               <a:rPr sz="975" b="1">
                 <a:solidFill>
-                  <a:srgbClr val="000000"/>
+                  <a:srgbClr val="1E3A8A"/>
                 </a:solidFill>
                 <a:latin typeface="Pretendard Variable"/>
               </a:rPr>
@@ -6465,7 +6467,7 @@
             <a:r>
               <a:rPr sz="975" b="1">
                 <a:solidFill>
-                  <a:srgbClr val="000000"/>
+                  <a:srgbClr val="1E3A8A"/>
                 </a:solidFill>
                 <a:latin typeface="Pretendard Variable"/>
               </a:rPr>
@@ -6504,7 +6506,7 @@
             <a:r>
               <a:rPr sz="1425">
                 <a:solidFill>
-                  <a:srgbClr val="000000"/>
+                  <a:srgbClr val="1E3A8A"/>
                 </a:solidFill>
                 <a:latin typeface="Pretendard Variable"/>
               </a:rPr>
@@ -6585,7 +6587,7 @@
             <a:r>
               <a:rPr sz="1800" b="1">
                 <a:solidFill>
-                  <a:srgbClr val="000000"/>
+                  <a:srgbClr val="1E3A8A"/>
                 </a:solidFill>
                 <a:latin typeface="Pretendard Variable"/>
               </a:rPr>
@@ -6624,7 +6626,7 @@
             <a:r>
               <a:rPr sz="3900" b="1">
                 <a:solidFill>
-                  <a:srgbClr val="000000"/>
+                  <a:srgbClr val="1D1D1F"/>
                 </a:solidFill>
                 <a:latin typeface="Pretendard Variable"/>
               </a:rPr>
@@ -6663,7 +6665,7 @@
             <a:r>
               <a:rPr sz="900" b="1">
                 <a:solidFill>
-                  <a:srgbClr val="000000"/>
+                  <a:srgbClr val="1E3A8A"/>
                 </a:solidFill>
                 <a:latin typeface="Pretendard Variable"/>
               </a:rPr>
@@ -6702,7 +6704,7 @@
             <a:r>
               <a:rPr sz="1350" b="1">
                 <a:solidFill>
-                  <a:srgbClr val="000000"/>
+                  <a:srgbClr val="FFFFFF"/>
                 </a:solidFill>
                 <a:latin typeface="Pretendard Variable"/>
               </a:rPr>
@@ -6741,7 +6743,7 @@
             <a:r>
               <a:rPr sz="900" b="1">
                 <a:solidFill>
-                  <a:srgbClr val="000000"/>
+                  <a:srgbClr val="1E3A8A"/>
                 </a:solidFill>
                 <a:latin typeface="Pretendard Variable"/>
               </a:rPr>
@@ -6780,7 +6782,7 @@
             <a:r>
               <a:rPr sz="900" b="1">
                 <a:solidFill>
-                  <a:srgbClr val="000000"/>
+                  <a:srgbClr val="1E3A8A"/>
                 </a:solidFill>
                 <a:latin typeface="Pretendard Variable"/>
               </a:rPr>
@@ -6819,7 +6821,7 @@
             <a:r>
               <a:rPr sz="1350" b="1">
                 <a:solidFill>
-                  <a:srgbClr val="000000"/>
+                  <a:srgbClr val="1E3A8A"/>
                 </a:solidFill>
                 <a:latin typeface="Pretendard Variable"/>
               </a:rPr>
@@ -6858,7 +6860,7 @@
             <a:r>
               <a:rPr sz="900" b="1">
                 <a:solidFill>
-                  <a:srgbClr val="000000"/>
+                  <a:srgbClr val="1E3A8A"/>
                 </a:solidFill>
                 <a:latin typeface="Pretendard Variable"/>
               </a:rPr>
@@ -6897,7 +6899,7 @@
             <a:r>
               <a:rPr sz="900" b="1">
                 <a:solidFill>
-                  <a:srgbClr val="000000"/>
+                  <a:srgbClr val="1E3A8A"/>
                 </a:solidFill>
                 <a:latin typeface="Pretendard Variable"/>
               </a:rPr>
@@ -6936,7 +6938,7 @@
             <a:r>
               <a:rPr sz="1350" b="1">
                 <a:solidFill>
-                  <a:srgbClr val="000000"/>
+                  <a:srgbClr val="1E3A8A"/>
                 </a:solidFill>
                 <a:latin typeface="Pretendard Variable"/>
               </a:rPr>
@@ -6975,7 +6977,7 @@
             <a:r>
               <a:rPr sz="900" b="1">
                 <a:solidFill>
-                  <a:srgbClr val="000000"/>
+                  <a:srgbClr val="1E3A8A"/>
                 </a:solidFill>
                 <a:latin typeface="Pretendard Variable"/>
               </a:rPr>
@@ -7014,7 +7016,7 @@
             <a:r>
               <a:rPr sz="1425">
                 <a:solidFill>
-                  <a:srgbClr val="000000"/>
+                  <a:srgbClr val="1E3A8A"/>
                 </a:solidFill>
                 <a:latin typeface="Pretendard Variable"/>
               </a:rPr>
@@ -7095,7 +7097,7 @@
             <a:r>
               <a:rPr sz="1800" b="1">
                 <a:solidFill>
-                  <a:srgbClr val="000000"/>
+                  <a:srgbClr val="1E3A8A"/>
                 </a:solidFill>
                 <a:latin typeface="Pretendard Variable"/>
               </a:rPr>
@@ -7134,7 +7136,7 @@
             <a:r>
               <a:rPr sz="3900" b="1">
                 <a:solidFill>
-                  <a:srgbClr val="000000"/>
+                  <a:srgbClr val="1D1D1F"/>
                 </a:solidFill>
                 <a:latin typeface="Pretendard Variable"/>
               </a:rPr>
@@ -7173,7 +7175,7 @@
             <a:r>
               <a:rPr sz="975" b="1">
                 <a:solidFill>
-                  <a:srgbClr val="000000"/>
+                  <a:srgbClr val="FFFFFF"/>
                 </a:solidFill>
                 <a:latin typeface="Pretendard Variable"/>
               </a:rPr>
@@ -7212,7 +7214,7 @@
             <a:r>
               <a:rPr sz="1950" b="1">
                 <a:solidFill>
-                  <a:srgbClr val="000000"/>
+                  <a:srgbClr val="1E3A8A"/>
                 </a:solidFill>
                 <a:latin typeface="Pretendard Variable"/>
               </a:rPr>
@@ -7251,7 +7253,7 @@
             <a:r>
               <a:rPr sz="1125" b="1">
                 <a:solidFill>
-                  <a:srgbClr val="000000"/>
+                  <a:srgbClr val="1E3A8A"/>
                 </a:solidFill>
                 <a:latin typeface="Pretendard Variable"/>
               </a:rPr>
@@ -7290,7 +7292,7 @@
             <a:r>
               <a:rPr sz="1125" b="1">
                 <a:solidFill>
-                  <a:srgbClr val="000000"/>
+                  <a:srgbClr val="1E3A8A"/>
                 </a:solidFill>
                 <a:latin typeface="Pretendard Variable"/>
               </a:rPr>
@@ -7329,7 +7331,7 @@
             <a:r>
               <a:rPr sz="1125" b="1">
                 <a:solidFill>
-                  <a:srgbClr val="000000"/>
+                  <a:srgbClr val="1E3A8A"/>
                 </a:solidFill>
                 <a:latin typeface="Pretendard Variable"/>
               </a:rPr>
@@ -7368,7 +7370,7 @@
             <a:r>
               <a:rPr sz="1125" b="1">
                 <a:solidFill>
-                  <a:srgbClr val="000000"/>
+                  <a:srgbClr val="1E3A8A"/>
                 </a:solidFill>
                 <a:latin typeface="Pretendard Variable"/>
               </a:rPr>
@@ -7407,7 +7409,7 @@
             <a:r>
               <a:rPr sz="975" b="1">
                 <a:solidFill>
-                  <a:srgbClr val="000000"/>
+                  <a:srgbClr val="1E3A8A"/>
                 </a:solidFill>
                 <a:latin typeface="Pretendard Variable"/>
               </a:rPr>
@@ -7446,7 +7448,7 @@
             <a:r>
               <a:rPr sz="975" b="1">
                 <a:solidFill>
-                  <a:srgbClr val="000000"/>
+                  <a:srgbClr val="FFFFFF"/>
                 </a:solidFill>
                 <a:latin typeface="Pretendard Variable"/>
               </a:rPr>
@@ -7485,7 +7487,7 @@
             <a:r>
               <a:rPr sz="1950" b="1">
                 <a:solidFill>
-                  <a:srgbClr val="000000"/>
+                  <a:srgbClr val="FFFFFF"/>
                 </a:solidFill>
                 <a:latin typeface="Pretendard Variable"/>
               </a:rPr>
@@ -7524,7 +7526,7 @@
             <a:r>
               <a:rPr sz="1200" b="1">
                 <a:solidFill>
-                  <a:srgbClr val="000000"/>
+                  <a:srgbClr val="FFFFFF"/>
                 </a:solidFill>
                 <a:latin typeface="Pretendard Variable"/>
               </a:rPr>
@@ -7563,7 +7565,7 @@
             <a:r>
               <a:rPr sz="975" b="1">
                 <a:solidFill>
-                  <a:srgbClr val="000000"/>
+                  <a:srgbClr val="1E3A8A"/>
                 </a:solidFill>
                 <a:latin typeface="Pretendard Variable"/>
               </a:rPr>
@@ -7602,7 +7604,7 @@
             <a:r>
               <a:rPr sz="1200" b="1">
                 <a:solidFill>
-                  <a:srgbClr val="000000"/>
+                  <a:srgbClr val="FFFFFF"/>
                 </a:solidFill>
                 <a:latin typeface="Pretendard Variable"/>
               </a:rPr>
@@ -7641,7 +7643,7 @@
             <a:r>
               <a:rPr sz="975" b="1">
                 <a:solidFill>
-                  <a:srgbClr val="000000"/>
+                  <a:srgbClr val="1E3A8A"/>
                 </a:solidFill>
                 <a:latin typeface="Pretendard Variable"/>
               </a:rPr>
@@ -7680,7 +7682,7 @@
             <a:r>
               <a:rPr sz="975" b="1">
                 <a:solidFill>
-                  <a:srgbClr val="000000"/>
+                  <a:srgbClr val="1E3A8A"/>
                 </a:solidFill>
                 <a:latin typeface="Pretendard Variable"/>
               </a:rPr>
@@ -7719,7 +7721,7 @@
             <a:r>
               <a:rPr sz="1425">
                 <a:solidFill>
-                  <a:srgbClr val="000000"/>
+                  <a:srgbClr val="1E3A8A"/>
                 </a:solidFill>
                 <a:latin typeface="Pretendard Variable"/>
               </a:rPr>
@@ -7800,7 +7802,7 @@
             <a:r>
               <a:rPr sz="1800" b="1">
                 <a:solidFill>
-                  <a:srgbClr val="000000"/>
+                  <a:srgbClr val="1E3A8A"/>
                 </a:solidFill>
                 <a:latin typeface="Pretendard Variable"/>
               </a:rPr>
@@ -7839,7 +7841,7 @@
             <a:r>
               <a:rPr sz="3900" b="1">
                 <a:solidFill>
-                  <a:srgbClr val="000000"/>
+                  <a:srgbClr val="1D1D1F"/>
                 </a:solidFill>
                 <a:latin typeface="Pretendard Variable"/>
               </a:rPr>
@@ -7878,7 +7880,7 @@
             <a:r>
               <a:rPr sz="975" b="1">
                 <a:solidFill>
-                  <a:srgbClr val="000000"/>
+                  <a:srgbClr val="FFFFFF"/>
                 </a:solidFill>
                 <a:latin typeface="Pretendard Variable"/>
               </a:rPr>
@@ -7917,7 +7919,7 @@
             <a:r>
               <a:rPr sz="1950" b="1">
                 <a:solidFill>
-                  <a:srgbClr val="000000"/>
+                  <a:srgbClr val="FFFFFF"/>
                 </a:solidFill>
                 <a:latin typeface="Pretendard Variable"/>
               </a:rPr>
@@ -7956,7 +7958,7 @@
             <a:r>
               <a:rPr sz="1125" b="1">
                 <a:solidFill>
-                  <a:srgbClr val="000000"/>
+                  <a:srgbClr val="FFFFFF"/>
                 </a:solidFill>
                 <a:latin typeface="Pretendard Variable"/>
               </a:rPr>
@@ -7995,7 +7997,7 @@
             <a:r>
               <a:rPr sz="900" b="1">
                 <a:solidFill>
-                  <a:srgbClr val="000000"/>
+                  <a:srgbClr val="1E3A8A"/>
                 </a:solidFill>
                 <a:latin typeface="Pretendard Variable"/>
               </a:rPr>
@@ -8034,7 +8036,7 @@
             <a:r>
               <a:rPr sz="1125" b="1">
                 <a:solidFill>
-                  <a:srgbClr val="000000"/>
+                  <a:srgbClr val="FFFFFF"/>
                 </a:solidFill>
                 <a:latin typeface="Pretendard Variable"/>
               </a:rPr>
@@ -8073,7 +8075,7 @@
             <a:r>
               <a:rPr sz="900" b="1">
                 <a:solidFill>
-                  <a:srgbClr val="000000"/>
+                  <a:srgbClr val="1E3A8A"/>
                 </a:solidFill>
                 <a:latin typeface="Pretendard Variable"/>
               </a:rPr>
@@ -8112,7 +8114,7 @@
             <a:r>
               <a:rPr sz="1125" b="1">
                 <a:solidFill>
-                  <a:srgbClr val="000000"/>
+                  <a:srgbClr val="FFFFFF"/>
                 </a:solidFill>
                 <a:latin typeface="Pretendard Variable"/>
               </a:rPr>
@@ -8151,7 +8153,7 @@
             <a:r>
               <a:rPr sz="900" b="1">
                 <a:solidFill>
-                  <a:srgbClr val="000000"/>
+                  <a:srgbClr val="1E3A8A"/>
                 </a:solidFill>
                 <a:latin typeface="Pretendard Variable"/>
               </a:rPr>
@@ -8190,7 +8192,7 @@
             <a:r>
               <a:rPr sz="975" b="1">
                 <a:solidFill>
-                  <a:srgbClr val="000000"/>
+                  <a:srgbClr val="1E3A8A"/>
                 </a:solidFill>
                 <a:latin typeface="Pretendard Variable"/>
               </a:rPr>
@@ -8229,7 +8231,7 @@
             <a:r>
               <a:rPr sz="975" b="1">
                 <a:solidFill>
-                  <a:srgbClr val="000000"/>
+                  <a:srgbClr val="FFFFFF"/>
                 </a:solidFill>
                 <a:latin typeface="Pretendard Variable"/>
               </a:rPr>
@@ -8268,7 +8270,7 @@
             <a:r>
               <a:rPr sz="1950" b="1">
                 <a:solidFill>
-                  <a:srgbClr val="000000"/>
+                  <a:srgbClr val="1E3A8A"/>
                 </a:solidFill>
                 <a:latin typeface="Pretendard Variable"/>
               </a:rPr>
@@ -8307,7 +8309,7 @@
             <a:r>
               <a:rPr sz="900" b="1">
                 <a:solidFill>
-                  <a:srgbClr val="000000"/>
+                  <a:srgbClr val="1E3A8A"/>
                 </a:solidFill>
                 <a:latin typeface="Pretendard Variable"/>
               </a:rPr>
@@ -8346,7 +8348,7 @@
             <a:r>
               <a:rPr sz="2700" b="1">
                 <a:solidFill>
-                  <a:srgbClr val="000000"/>
+                  <a:srgbClr val="1E3A8A"/>
                 </a:solidFill>
                 <a:latin typeface="Pretendard Variable"/>
               </a:rPr>
@@ -8385,7 +8387,7 @@
             <a:r>
               <a:rPr sz="900" b="1">
                 <a:solidFill>
-                  <a:srgbClr val="000000"/>
+                  <a:srgbClr val="1E3A8A"/>
                 </a:solidFill>
                 <a:latin typeface="Pretendard Variable"/>
               </a:rPr>
@@ -8424,7 +8426,7 @@
             <a:r>
               <a:rPr sz="900" b="1">
                 <a:solidFill>
-                  <a:srgbClr val="000000"/>
+                  <a:srgbClr val="1E3A8A"/>
                 </a:solidFill>
                 <a:latin typeface="Pretendard Variable"/>
               </a:rPr>
@@ -8463,7 +8465,7 @@
             <a:r>
               <a:rPr sz="2700" b="1">
                 <a:solidFill>
-                  <a:srgbClr val="000000"/>
+                  <a:srgbClr val="1E3A8A"/>
                 </a:solidFill>
                 <a:latin typeface="Pretendard Variable"/>
               </a:rPr>
@@ -8502,7 +8504,7 @@
             <a:r>
               <a:rPr sz="900" b="1">
                 <a:solidFill>
-                  <a:srgbClr val="000000"/>
+                  <a:srgbClr val="1E3A8A"/>
                 </a:solidFill>
                 <a:latin typeface="Pretendard Variable"/>
               </a:rPr>
@@ -8541,7 +8543,7 @@
             <a:r>
               <a:rPr sz="975" b="1">
                 <a:solidFill>
-                  <a:srgbClr val="000000"/>
+                  <a:srgbClr val="1E3A8A"/>
                 </a:solidFill>
                 <a:latin typeface="Pretendard Variable"/>
               </a:rPr>
@@ -8580,7 +8582,7 @@
             <a:r>
               <a:rPr sz="1425">
                 <a:solidFill>
-                  <a:srgbClr val="000000"/>
+                  <a:srgbClr val="1E3A8A"/>
                 </a:solidFill>
                 <a:latin typeface="Pretendard Variable"/>
               </a:rPr>
@@ -8661,7 +8663,7 @@
             <a:r>
               <a:rPr sz="1800" b="1">
                 <a:solidFill>
-                  <a:srgbClr val="000000"/>
+                  <a:srgbClr val="1E3A8A"/>
                 </a:solidFill>
                 <a:latin typeface="Pretendard Variable"/>
               </a:rPr>
@@ -8700,7 +8702,7 @@
             <a:r>
               <a:rPr sz="3750" b="1">
                 <a:solidFill>
-                  <a:srgbClr val="000000"/>
+                  <a:srgbClr val="1D1D1F"/>
                 </a:solidFill>
                 <a:latin typeface="Pretendard Variable"/>
               </a:rPr>
@@ -8739,7 +8741,7 @@
             <a:r>
               <a:rPr sz="1200" b="1">
                 <a:solidFill>
-                  <a:srgbClr val="000000"/>
+                  <a:srgbClr val="1E3A8A"/>
                 </a:solidFill>
                 <a:latin typeface="Pretendard Variable"/>
               </a:rPr>
@@ -8778,7 +8780,7 @@
             <a:r>
               <a:rPr sz="1650" b="1">
                 <a:solidFill>
-                  <a:srgbClr val="000000"/>
+                  <a:srgbClr val="FFFFFF"/>
                 </a:solidFill>
                 <a:latin typeface="Pretendard Variable"/>
               </a:rPr>
@@ -8817,7 +8819,7 @@
             <a:r>
               <a:rPr sz="1200" b="1">
                 <a:solidFill>
-                  <a:srgbClr val="000000"/>
+                  <a:srgbClr val="1E3A8A"/>
                 </a:solidFill>
                 <a:latin typeface="Pretendard Variable"/>
               </a:rPr>
@@ -8856,7 +8858,7 @@
             <a:r>
               <a:rPr sz="1650" b="1">
                 <a:solidFill>
-                  <a:srgbClr val="000000"/>
+                  <a:srgbClr val="FFFFFF"/>
                 </a:solidFill>
                 <a:latin typeface="Pretendard Variable"/>
               </a:rPr>
@@ -8895,7 +8897,7 @@
             <a:r>
               <a:rPr sz="1200" b="1">
                 <a:solidFill>
-                  <a:srgbClr val="000000"/>
+                  <a:srgbClr val="1E3A8A"/>
                 </a:solidFill>
                 <a:latin typeface="Pretendard Variable"/>
               </a:rPr>
@@ -8934,7 +8936,7 @@
             <a:r>
               <a:rPr sz="1650" b="1">
                 <a:solidFill>
-                  <a:srgbClr val="000000"/>
+                  <a:srgbClr val="FFFFFF"/>
                 </a:solidFill>
                 <a:latin typeface="Pretendard Variable"/>
               </a:rPr>
@@ -8973,7 +8975,7 @@
             <a:r>
               <a:rPr sz="1425" b="1">
                 <a:solidFill>
-                  <a:srgbClr val="000000"/>
+                  <a:srgbClr val="1E3A8A"/>
                 </a:solidFill>
                 <a:latin typeface="Pretendard Variable"/>
               </a:rPr>
@@ -9054,7 +9056,7 @@
             <a:r>
               <a:rPr sz="1950">
                 <a:solidFill>
-                  <a:srgbClr val="000000"/>
+                  <a:srgbClr val="FFFFFF"/>
                 </a:solidFill>
                 <a:latin typeface="Pretendard Variable"/>
               </a:rPr>
@@ -9093,7 +9095,7 @@
             <a:r>
               <a:rPr sz="4950" b="1">
                 <a:solidFill>
-                  <a:srgbClr val="000000"/>
+                  <a:srgbClr val="FFFFFF"/>
                 </a:solidFill>
                 <a:latin typeface="Pretendard Variable"/>
               </a:rPr>
@@ -9132,7 +9134,7 @@
             <a:r>
               <a:rPr sz="1500">
                 <a:solidFill>
-                  <a:srgbClr val="000000"/>
+                  <a:srgbClr val="FFFFFF"/>
                 </a:solidFill>
                 <a:latin typeface="Pretendard Variable"/>
               </a:rPr>
@@ -9213,7 +9215,7 @@
             <a:r>
               <a:rPr sz="3300" b="1">
                 <a:solidFill>
-                  <a:srgbClr val="000000"/>
+                  <a:srgbClr val="0F172A"/>
                 </a:solidFill>
                 <a:latin typeface="Pretendard Variable"/>
               </a:rPr>
@@ -9252,7 +9254,7 @@
             <a:r>
               <a:rPr sz="1312">
                 <a:solidFill>
-                  <a:srgbClr val="000000"/>
+                  <a:srgbClr val="1E3A8A"/>
                 </a:solidFill>
                 <a:latin typeface="Pretendard Variable"/>
               </a:rPr>
@@ -9291,7 +9293,7 @@
             <a:r>
               <a:rPr sz="1275" b="1">
                 <a:solidFill>
-                  <a:srgbClr val="000000"/>
+                  <a:srgbClr val="1E3A8A"/>
                 </a:solidFill>
                 <a:latin typeface="Pretendard Variable"/>
               </a:rPr>
@@ -9330,7 +9332,7 @@
             <a:r>
               <a:rPr sz="1125" b="1">
                 <a:solidFill>
-                  <a:srgbClr val="000000"/>
+                  <a:srgbClr val="1E3A8A"/>
                 </a:solidFill>
                 <a:latin typeface="Pretendard Variable"/>
               </a:rPr>
@@ -9369,7 +9371,7 @@
             <a:r>
               <a:rPr sz="1275" b="1">
                 <a:solidFill>
-                  <a:srgbClr val="000000"/>
+                  <a:srgbClr val="1E3A8A"/>
                 </a:solidFill>
                 <a:latin typeface="Pretendard Variable"/>
               </a:rPr>
@@ -9408,7 +9410,7 @@
             <a:r>
               <a:rPr sz="1125" b="1">
                 <a:solidFill>
-                  <a:srgbClr val="000000"/>
+                  <a:srgbClr val="1E3A8A"/>
                 </a:solidFill>
                 <a:latin typeface="Pretendard Variable"/>
               </a:rPr>
@@ -9447,7 +9449,7 @@
             <a:r>
               <a:rPr sz="1275" b="1">
                 <a:solidFill>
-                  <a:srgbClr val="000000"/>
+                  <a:srgbClr val="1E3A8A"/>
                 </a:solidFill>
                 <a:latin typeface="Pretendard Variable"/>
               </a:rPr>
@@ -9486,7 +9488,7 @@
             <a:r>
               <a:rPr sz="1125" b="1">
                 <a:solidFill>
-                  <a:srgbClr val="000000"/>
+                  <a:srgbClr val="1E3A8A"/>
                 </a:solidFill>
                 <a:latin typeface="Pretendard Variable"/>
               </a:rPr>
@@ -9525,7 +9527,7 @@
             <a:r>
               <a:rPr sz="1275" b="1">
                 <a:solidFill>
-                  <a:srgbClr val="000000"/>
+                  <a:srgbClr val="1E3A8A"/>
                 </a:solidFill>
                 <a:latin typeface="Pretendard Variable"/>
               </a:rPr>
@@ -9564,7 +9566,7 @@
             <a:r>
               <a:rPr sz="1125" b="1">
                 <a:solidFill>
-                  <a:srgbClr val="000000"/>
+                  <a:srgbClr val="1E3A8A"/>
                 </a:solidFill>
                 <a:latin typeface="Pretendard Variable"/>
               </a:rPr>
@@ -9603,7 +9605,7 @@
             <a:r>
               <a:rPr sz="1275" b="1">
                 <a:solidFill>
-                  <a:srgbClr val="000000"/>
+                  <a:srgbClr val="1E3A8A"/>
                 </a:solidFill>
                 <a:latin typeface="Pretendard Variable"/>
               </a:rPr>
@@ -9642,7 +9644,7 @@
             <a:r>
               <a:rPr sz="1125" b="1">
                 <a:solidFill>
-                  <a:srgbClr val="000000"/>
+                  <a:srgbClr val="1E3A8A"/>
                 </a:solidFill>
                 <a:latin typeface="Pretendard Variable"/>
               </a:rPr>
@@ -9681,7 +9683,7 @@
             <a:r>
               <a:rPr sz="1350" b="1">
                 <a:solidFill>
-                  <a:srgbClr val="000000"/>
+                  <a:srgbClr val="1E3A8A"/>
                 </a:solidFill>
                 <a:latin typeface="Pretendard Variable"/>
               </a:rPr>
@@ -9720,7 +9722,7 @@
             <a:r>
               <a:rPr sz="1012" b="1">
                 <a:solidFill>
-                  <a:srgbClr val="000000"/>
+                  <a:srgbClr val="1E3A8A"/>
                 </a:solidFill>
                 <a:latin typeface="Pretendard Variable"/>
               </a:rPr>
@@ -9801,7 +9803,7 @@
             <a:r>
               <a:rPr sz="1950" b="1">
                 <a:solidFill>
-                  <a:srgbClr val="000000"/>
+                  <a:srgbClr val="0F172A"/>
                 </a:solidFill>
                 <a:latin typeface="Pretendard Variable"/>
               </a:rPr>
@@ -9840,7 +9842,7 @@
             <a:r>
               <a:rPr sz="4950" b="1">
                 <a:solidFill>
-                  <a:srgbClr val="000000"/>
+                  <a:srgbClr val="0F172A"/>
                 </a:solidFill>
                 <a:latin typeface="Pretendard Variable"/>
               </a:rPr>
@@ -9921,7 +9923,7 @@
             <a:r>
               <a:rPr sz="1800" b="1">
                 <a:solidFill>
-                  <a:srgbClr val="000000"/>
+                  <a:srgbClr val="1E3A8A"/>
                 </a:solidFill>
                 <a:latin typeface="Pretendard Variable"/>
               </a:rPr>
@@ -9960,7 +9962,7 @@
             <a:r>
               <a:rPr sz="3900" b="1">
                 <a:solidFill>
-                  <a:srgbClr val="000000"/>
+                  <a:srgbClr val="1D1D1F"/>
                 </a:solidFill>
                 <a:latin typeface="Pretendard Variable"/>
               </a:rPr>
@@ -9999,7 +10001,7 @@
             <a:r>
               <a:rPr sz="975" b="1">
                 <a:solidFill>
-                  <a:srgbClr val="000000"/>
+                  <a:srgbClr val="FFFFFF"/>
                 </a:solidFill>
                 <a:latin typeface="Pretendard Variable"/>
               </a:rPr>
@@ -10038,7 +10040,7 @@
             <a:r>
               <a:rPr sz="2100" b="1">
                 <a:solidFill>
-                  <a:srgbClr val="000000"/>
+                  <a:srgbClr val="FFFFFF"/>
                 </a:solidFill>
                 <a:latin typeface="Pretendard Variable"/>
               </a:rPr>
@@ -10077,7 +10079,7 @@
             <a:r>
               <a:rPr sz="1125" b="1">
                 <a:solidFill>
-                  <a:srgbClr val="000000"/>
+                  <a:srgbClr val="1E3A8A"/>
                 </a:solidFill>
                 <a:latin typeface="Pretendard Variable"/>
               </a:rPr>
@@ -10116,7 +10118,7 @@
             <a:r>
               <a:rPr sz="1200" b="1">
                 <a:solidFill>
-                  <a:srgbClr val="000000"/>
+                  <a:srgbClr val="FFFFFF"/>
                 </a:solidFill>
                 <a:latin typeface="Pretendard Variable"/>
               </a:rPr>
@@ -10155,7 +10157,7 @@
             <a:r>
               <a:rPr sz="975">
                 <a:solidFill>
-                  <a:srgbClr val="000000"/>
+                  <a:srgbClr val="1E3A8A"/>
                 </a:solidFill>
                 <a:latin typeface="Pretendard Variable"/>
               </a:rPr>
@@ -10194,7 +10196,7 @@
             <a:r>
               <a:rPr sz="1200" b="1">
                 <a:solidFill>
-                  <a:srgbClr val="000000"/>
+                  <a:srgbClr val="FFFFFF"/>
                 </a:solidFill>
                 <a:latin typeface="Pretendard Variable"/>
               </a:rPr>
@@ -10233,7 +10235,7 @@
             <a:r>
               <a:rPr sz="975">
                 <a:solidFill>
-                  <a:srgbClr val="000000"/>
+                  <a:srgbClr val="1E3A8A"/>
                 </a:solidFill>
                 <a:latin typeface="Pretendard Variable"/>
               </a:rPr>
@@ -10272,7 +10274,7 @@
             <a:r>
               <a:rPr sz="1200" b="1">
                 <a:solidFill>
-                  <a:srgbClr val="000000"/>
+                  <a:srgbClr val="FFFFFF"/>
                 </a:solidFill>
                 <a:latin typeface="Pretendard Variable"/>
               </a:rPr>
@@ -10311,7 +10313,7 @@
             <a:r>
               <a:rPr sz="975">
                 <a:solidFill>
-                  <a:srgbClr val="000000"/>
+                  <a:srgbClr val="1E3A8A"/>
                 </a:solidFill>
                 <a:latin typeface="Pretendard Variable"/>
               </a:rPr>
@@ -10350,7 +10352,7 @@
             <a:r>
               <a:rPr sz="900" b="1">
                 <a:solidFill>
-                  <a:srgbClr val="000000"/>
+                  <a:srgbClr val="1E3A8A"/>
                 </a:solidFill>
                 <a:latin typeface="Pretendard Variable"/>
               </a:rPr>
@@ -10389,7 +10391,7 @@
             <a:r>
               <a:rPr sz="1350" b="1">
                 <a:solidFill>
-                  <a:srgbClr val="000000"/>
+                  <a:srgbClr val="FFFFFF"/>
                 </a:solidFill>
                 <a:latin typeface="Pretendard Variable"/>
               </a:rPr>
@@ -10428,7 +10430,7 @@
             <a:r>
               <a:rPr sz="975" b="1">
                 <a:solidFill>
-                  <a:srgbClr val="000000"/>
+                  <a:srgbClr val="FFFFFF"/>
                 </a:solidFill>
                 <a:latin typeface="Pretendard Variable"/>
               </a:rPr>
@@ -10467,7 +10469,7 @@
             <a:r>
               <a:rPr sz="2100" b="1">
                 <a:solidFill>
-                  <a:srgbClr val="000000"/>
+                  <a:srgbClr val="1E3A8A"/>
                 </a:solidFill>
                 <a:latin typeface="Pretendard Variable"/>
               </a:rPr>
@@ -10506,7 +10508,7 @@
             <a:r>
               <a:rPr sz="1125" b="1">
                 <a:solidFill>
-                  <a:srgbClr val="000000"/>
+                  <a:srgbClr val="1E3A8A"/>
                 </a:solidFill>
                 <a:latin typeface="Pretendard Variable"/>
               </a:rPr>
@@ -10545,7 +10547,7 @@
             <a:r>
               <a:rPr sz="825" b="1">
                 <a:solidFill>
-                  <a:srgbClr val="000000"/>
+                  <a:srgbClr val="1E3A8A"/>
                 </a:solidFill>
                 <a:latin typeface="Pretendard Variable"/>
               </a:rPr>
@@ -10584,7 +10586,7 @@
             <a:r>
               <a:rPr sz="1200" b="1">
                 <a:solidFill>
-                  <a:srgbClr val="000000"/>
+                  <a:srgbClr val="1E3A8A"/>
                 </a:solidFill>
                 <a:latin typeface="Pretendard Variable"/>
               </a:rPr>
@@ -10623,7 +10625,7 @@
             <a:r>
               <a:rPr sz="825" b="1">
                 <a:solidFill>
-                  <a:srgbClr val="000000"/>
+                  <a:srgbClr val="1E3A8A"/>
                 </a:solidFill>
                 <a:latin typeface="Pretendard Variable"/>
               </a:rPr>
@@ -10662,7 +10664,7 @@
             <a:r>
               <a:rPr sz="1350" b="1">
                 <a:solidFill>
-                  <a:srgbClr val="000000"/>
+                  <a:srgbClr val="1E3A8A"/>
                 </a:solidFill>
                 <a:latin typeface="Pretendard Variable"/>
               </a:rPr>
@@ -10701,7 +10703,7 @@
             <a:r>
               <a:rPr sz="1050" b="1">
                 <a:solidFill>
-                  <a:srgbClr val="000000"/>
+                  <a:srgbClr val="1E3A8A"/>
                 </a:solidFill>
                 <a:latin typeface="Pretendard Variable"/>
               </a:rPr>
@@ -10740,7 +10742,7 @@
             <a:r>
               <a:rPr sz="1350" b="1">
                 <a:solidFill>
-                  <a:srgbClr val="000000"/>
+                  <a:srgbClr val="1E3A8A"/>
                 </a:solidFill>
                 <a:latin typeface="Pretendard Variable"/>
               </a:rPr>
@@ -10779,7 +10781,7 @@
             <a:r>
               <a:rPr sz="1050" b="1">
                 <a:solidFill>
-                  <a:srgbClr val="000000"/>
+                  <a:srgbClr val="FFFFFF"/>
                 </a:solidFill>
                 <a:latin typeface="Pretendard Variable"/>
               </a:rPr>
@@ -10818,7 +10820,7 @@
             <a:r>
               <a:rPr sz="1050" b="1">
                 <a:solidFill>
-                  <a:srgbClr val="000000"/>
+                  <a:srgbClr val="FFFFFF"/>
                 </a:solidFill>
                 <a:latin typeface="Pretendard Variable"/>
               </a:rPr>
@@ -10857,7 +10859,7 @@
             <a:r>
               <a:rPr sz="975" b="1">
                 <a:solidFill>
-                  <a:srgbClr val="000000"/>
+                  <a:srgbClr val="1E3A8A"/>
                 </a:solidFill>
                 <a:latin typeface="Pretendard Variable"/>
               </a:rPr>
@@ -10896,7 +10898,7 @@
             <a:r>
               <a:rPr sz="975" b="1">
                 <a:solidFill>
-                  <a:srgbClr val="000000"/>
+                  <a:srgbClr val="1E3A8A"/>
                 </a:solidFill>
                 <a:latin typeface="Pretendard Variable"/>
               </a:rPr>
@@ -10935,7 +10937,7 @@
             <a:r>
               <a:rPr sz="1425">
                 <a:solidFill>
-                  <a:srgbClr val="000000"/>
+                  <a:srgbClr val="1E3A8A"/>
                 </a:solidFill>
                 <a:latin typeface="Pretendard Variable"/>
               </a:rPr>
@@ -11016,7 +11018,7 @@
             <a:r>
               <a:rPr sz="1800" b="1">
                 <a:solidFill>
-                  <a:srgbClr val="000000"/>
+                  <a:srgbClr val="1E3A8A"/>
                 </a:solidFill>
                 <a:latin typeface="Pretendard Variable"/>
               </a:rPr>
@@ -11055,7 +11057,7 @@
             <a:r>
               <a:rPr sz="3900" b="1">
                 <a:solidFill>
-                  <a:srgbClr val="000000"/>
+                  <a:srgbClr val="1D1D1F"/>
                 </a:solidFill>
                 <a:latin typeface="Pretendard Variable"/>
               </a:rPr>
@@ -11094,7 +11096,7 @@
             <a:r>
               <a:rPr sz="1050" b="1">
                 <a:solidFill>
-                  <a:srgbClr val="000000"/>
+                  <a:srgbClr val="FFFFFF"/>
                 </a:solidFill>
                 <a:latin typeface="Pretendard Variable"/>
               </a:rPr>
@@ -11133,7 +11135,7 @@
             <a:r>
               <a:rPr sz="900" b="1">
                 <a:solidFill>
-                  <a:srgbClr val="000000"/>
+                  <a:srgbClr val="1E3A8A"/>
                 </a:solidFill>
                 <a:latin typeface="Pretendard Variable"/>
               </a:rPr>
@@ -11172,7 +11174,7 @@
             <a:r>
               <a:rPr sz="1500" b="1">
                 <a:solidFill>
-                  <a:srgbClr val="000000"/>
+                  <a:srgbClr val="1E3A8A"/>
                 </a:solidFill>
                 <a:latin typeface="Pretendard Variable"/>
               </a:rPr>
@@ -11211,7 +11213,7 @@
             <a:r>
               <a:rPr sz="1050" b="1">
                 <a:solidFill>
-                  <a:srgbClr val="000000"/>
+                  <a:srgbClr val="1E3A8A"/>
                 </a:solidFill>
                 <a:latin typeface="Pretendard Variable"/>
               </a:rPr>
@@ -11250,7 +11252,7 @@
             <a:r>
               <a:rPr sz="975" b="1">
                 <a:solidFill>
-                  <a:srgbClr val="000000"/>
+                  <a:srgbClr val="1E3A8A"/>
                 </a:solidFill>
                 <a:latin typeface="Pretendard Variable"/>
               </a:rPr>
@@ -11289,7 +11291,7 @@
             <a:r>
               <a:rPr sz="975" b="1">
                 <a:solidFill>
-                  <a:srgbClr val="000000"/>
+                  <a:srgbClr val="1E3A8A"/>
                 </a:solidFill>
                 <a:latin typeface="Pretendard Variable"/>
               </a:rPr>
@@ -11328,7 +11330,7 @@
             <a:r>
               <a:rPr sz="975" b="1">
                 <a:solidFill>
-                  <a:srgbClr val="000000"/>
+                  <a:srgbClr val="1E3A8A"/>
                 </a:solidFill>
                 <a:latin typeface="Pretendard Variable"/>
               </a:rPr>
@@ -11367,7 +11369,7 @@
             <a:r>
               <a:rPr sz="975" b="1">
                 <a:solidFill>
-                  <a:srgbClr val="000000"/>
+                  <a:srgbClr val="1E3A8A"/>
                 </a:solidFill>
                 <a:latin typeface="Pretendard Variable"/>
               </a:rPr>
@@ -11406,7 +11408,7 @@
             <a:r>
               <a:rPr sz="1050" b="1">
                 <a:solidFill>
-                  <a:srgbClr val="000000"/>
+                  <a:srgbClr val="1E3A8A"/>
                 </a:solidFill>
                 <a:latin typeface="Pretendard Variable"/>
               </a:rPr>
@@ -11445,7 +11447,7 @@
             <a:r>
               <a:rPr sz="900" b="1">
                 <a:solidFill>
-                  <a:srgbClr val="000000"/>
+                  <a:srgbClr val="1E3A8A"/>
                 </a:solidFill>
                 <a:latin typeface="Pretendard Variable"/>
               </a:rPr>
@@ -11484,7 +11486,7 @@
             <a:r>
               <a:rPr sz="1500" b="1">
                 <a:solidFill>
-                  <a:srgbClr val="000000"/>
+                  <a:srgbClr val="FFFFFF"/>
                 </a:solidFill>
                 <a:latin typeface="Pretendard Variable"/>
               </a:rPr>
@@ -11523,7 +11525,7 @@
             <a:r>
               <a:rPr sz="1050" b="1">
                 <a:solidFill>
-                  <a:srgbClr val="000000"/>
+                  <a:srgbClr val="1E3A8A"/>
                 </a:solidFill>
                 <a:latin typeface="Pretendard Variable"/>
               </a:rPr>
@@ -11562,7 +11564,7 @@
             <a:r>
               <a:rPr sz="975">
                 <a:solidFill>
-                  <a:srgbClr val="000000"/>
+                  <a:srgbClr val="1E3A8A"/>
                 </a:solidFill>
                 <a:latin typeface="Pretendard Variable"/>
               </a:rPr>
@@ -11601,7 +11603,7 @@
             <a:r>
               <a:rPr sz="975">
                 <a:solidFill>
-                  <a:srgbClr val="000000"/>
+                  <a:srgbClr val="1E3A8A"/>
                 </a:solidFill>
                 <a:latin typeface="Pretendard Variable"/>
               </a:rPr>
@@ -11640,7 +11642,7 @@
             <a:r>
               <a:rPr sz="975">
                 <a:solidFill>
-                  <a:srgbClr val="000000"/>
+                  <a:srgbClr val="1E3A8A"/>
                 </a:solidFill>
                 <a:latin typeface="Pretendard Variable"/>
               </a:rPr>
@@ -11679,7 +11681,7 @@
             <a:r>
               <a:rPr sz="975" b="1">
                 <a:solidFill>
-                  <a:srgbClr val="000000"/>
+                  <a:srgbClr val="FFFFFF"/>
                 </a:solidFill>
                 <a:latin typeface="Pretendard Variable"/>
               </a:rPr>
@@ -11718,7 +11720,7 @@
             <a:r>
               <a:rPr sz="1050" b="1">
                 <a:solidFill>
-                  <a:srgbClr val="000000"/>
+                  <a:srgbClr val="FFFFFF"/>
                 </a:solidFill>
                 <a:latin typeface="Pretendard Variable"/>
               </a:rPr>
@@ -11757,7 +11759,7 @@
             <a:r>
               <a:rPr sz="900" b="1">
                 <a:solidFill>
-                  <a:srgbClr val="000000"/>
+                  <a:srgbClr val="1E3A8A"/>
                 </a:solidFill>
                 <a:latin typeface="Pretendard Variable"/>
               </a:rPr>
@@ -11796,7 +11798,7 @@
             <a:r>
               <a:rPr sz="1500" b="1">
                 <a:solidFill>
-                  <a:srgbClr val="000000"/>
+                  <a:srgbClr val="1E3A8A"/>
                 </a:solidFill>
                 <a:latin typeface="Pretendard Variable"/>
               </a:rPr>
@@ -11835,7 +11837,7 @@
             <a:r>
               <a:rPr sz="1050" b="1">
                 <a:solidFill>
-                  <a:srgbClr val="000000"/>
+                  <a:srgbClr val="1E3A8A"/>
                 </a:solidFill>
                 <a:latin typeface="Pretendard Variable"/>
               </a:rPr>
@@ -11874,7 +11876,7 @@
             <a:r>
               <a:rPr sz="975" b="1">
                 <a:solidFill>
-                  <a:srgbClr val="000000"/>
+                  <a:srgbClr val="1E3A8A"/>
                 </a:solidFill>
                 <a:latin typeface="Pretendard Variable"/>
               </a:rPr>
@@ -11913,7 +11915,7 @@
             <a:r>
               <a:rPr sz="975" b="1">
                 <a:solidFill>
-                  <a:srgbClr val="000000"/>
+                  <a:srgbClr val="1E3A8A"/>
                 </a:solidFill>
                 <a:latin typeface="Pretendard Variable"/>
               </a:rPr>
@@ -11952,7 +11954,7 @@
             <a:r>
               <a:rPr sz="975" b="1">
                 <a:solidFill>
-                  <a:srgbClr val="000000"/>
+                  <a:srgbClr val="1E3A8A"/>
                 </a:solidFill>
                 <a:latin typeface="Pretendard Variable"/>
               </a:rPr>
@@ -11991,7 +11993,7 @@
             <a:r>
               <a:rPr sz="975" b="1">
                 <a:solidFill>
-                  <a:srgbClr val="000000"/>
+                  <a:srgbClr val="1E3A8A"/>
                 </a:solidFill>
                 <a:latin typeface="Pretendard Variable"/>
               </a:rPr>
@@ -12030,7 +12032,7 @@
             <a:r>
               <a:rPr sz="1425">
                 <a:solidFill>
-                  <a:srgbClr val="000000"/>
+                  <a:srgbClr val="1E3A8A"/>
                 </a:solidFill>
                 <a:latin typeface="Pretendard Variable"/>
               </a:rPr>
@@ -12111,7 +12113,7 @@
             <a:r>
               <a:rPr sz="1800" b="1">
                 <a:solidFill>
-                  <a:srgbClr val="000000"/>
+                  <a:srgbClr val="1E3A8A"/>
                 </a:solidFill>
                 <a:latin typeface="Pretendard Variable"/>
               </a:rPr>
@@ -12150,7 +12152,7 @@
             <a:r>
               <a:rPr sz="3900" b="1">
                 <a:solidFill>
-                  <a:srgbClr val="000000"/>
+                  <a:srgbClr val="1D1D1F"/>
                 </a:solidFill>
                 <a:latin typeface="Pretendard Variable"/>
               </a:rPr>
@@ -12189,7 +12191,7 @@
             <a:r>
               <a:rPr sz="975" b="1">
                 <a:solidFill>
-                  <a:srgbClr val="000000"/>
+                  <a:srgbClr val="FFFFFF"/>
                 </a:solidFill>
                 <a:latin typeface="Pretendard Variable"/>
               </a:rPr>
@@ -12228,7 +12230,7 @@
             <a:r>
               <a:rPr sz="1950" b="1">
                 <a:solidFill>
-                  <a:srgbClr val="000000"/>
+                  <a:srgbClr val="1E3A8A"/>
                 </a:solidFill>
                 <a:latin typeface="Pretendard Variable"/>
               </a:rPr>
@@ -12267,7 +12269,7 @@
             <a:r>
               <a:rPr sz="1125" b="1">
                 <a:solidFill>
-                  <a:srgbClr val="000000"/>
+                  <a:srgbClr val="1E3A8A"/>
                 </a:solidFill>
                 <a:latin typeface="Pretendard Variable"/>
               </a:rPr>
@@ -12306,7 +12308,7 @@
             <a:r>
               <a:rPr sz="1125" b="1">
                 <a:solidFill>
-                  <a:srgbClr val="000000"/>
+                  <a:srgbClr val="1E3A8A"/>
                 </a:solidFill>
                 <a:latin typeface="Pretendard Variable"/>
               </a:rPr>
@@ -12345,7 +12347,7 @@
             <a:r>
               <a:rPr sz="1125" b="1">
                 <a:solidFill>
-                  <a:srgbClr val="000000"/>
+                  <a:srgbClr val="1E3A8A"/>
                 </a:solidFill>
                 <a:latin typeface="Pretendard Variable"/>
               </a:rPr>
@@ -12384,7 +12386,7 @@
             <a:r>
               <a:rPr sz="1125" b="1">
                 <a:solidFill>
-                  <a:srgbClr val="000000"/>
+                  <a:srgbClr val="1E3A8A"/>
                 </a:solidFill>
                 <a:latin typeface="Pretendard Variable"/>
               </a:rPr>
@@ -12423,7 +12425,7 @@
             <a:r>
               <a:rPr sz="1125" b="1">
                 <a:solidFill>
-                  <a:srgbClr val="000000"/>
+                  <a:srgbClr val="1E3A8A"/>
                 </a:solidFill>
                 <a:latin typeface="Pretendard Variable"/>
               </a:rPr>
@@ -12462,7 +12464,7 @@
             <a:r>
               <a:rPr sz="1125" b="1">
                 <a:solidFill>
-                  <a:srgbClr val="000000"/>
+                  <a:srgbClr val="1E3A8A"/>
                 </a:solidFill>
                 <a:latin typeface="Pretendard Variable"/>
               </a:rPr>
@@ -12501,7 +12503,7 @@
             <a:r>
               <a:rPr sz="975" b="1">
                 <a:solidFill>
-                  <a:srgbClr val="000000"/>
+                  <a:srgbClr val="FFFFFF"/>
                 </a:solidFill>
                 <a:latin typeface="Pretendard Variable"/>
               </a:rPr>
@@ -12540,7 +12542,7 @@
             <a:r>
               <a:rPr sz="1950" b="1">
                 <a:solidFill>
-                  <a:srgbClr val="000000"/>
+                  <a:srgbClr val="FFFFFF"/>
                 </a:solidFill>
                 <a:latin typeface="Pretendard Variable"/>
               </a:rPr>
@@ -12579,7 +12581,7 @@
             <a:r>
               <a:rPr sz="1050" b="1">
                 <a:solidFill>
-                  <a:srgbClr val="000000"/>
+                  <a:srgbClr val="1E3A8A"/>
                 </a:solidFill>
                 <a:latin typeface="Pretendard Variable"/>
               </a:rPr>
@@ -12618,7 +12620,7 @@
             <a:r>
               <a:rPr sz="1200" b="1">
                 <a:solidFill>
-                  <a:srgbClr val="000000"/>
+                  <a:srgbClr val="FFFFFF"/>
                 </a:solidFill>
                 <a:latin typeface="Pretendard Variable"/>
               </a:rPr>
@@ -12657,7 +12659,7 @@
             <a:r>
               <a:rPr sz="1125" b="1">
                 <a:solidFill>
-                  <a:srgbClr val="000000"/>
+                  <a:srgbClr val="FFFFFF"/>
                 </a:solidFill>
                 <a:latin typeface="Pretendard Variable"/>
               </a:rPr>
@@ -12696,7 +12698,7 @@
             <a:r>
               <a:rPr sz="825" b="1">
                 <a:solidFill>
-                  <a:srgbClr val="000000"/>
+                  <a:srgbClr val="93C5FD"/>
                 </a:solidFill>
                 <a:latin typeface="Pretendard Variable"/>
               </a:rPr>
@@ -12735,7 +12737,7 @@
             <a:r>
               <a:rPr sz="1200" b="1">
                 <a:solidFill>
-                  <a:srgbClr val="000000"/>
+                  <a:srgbClr val="FFFFFF"/>
                 </a:solidFill>
                 <a:latin typeface="Pretendard Variable"/>
               </a:rPr>
@@ -12774,7 +12776,7 @@
             <a:r>
               <a:rPr sz="1125" b="1">
                 <a:solidFill>
-                  <a:srgbClr val="000000"/>
+                  <a:srgbClr val="60A5FA"/>
                 </a:solidFill>
                 <a:latin typeface="Pretendard Variable"/>
               </a:rPr>
@@ -12813,7 +12815,7 @@
             <a:r>
               <a:rPr sz="975" b="1">
                 <a:solidFill>
-                  <a:srgbClr val="000000"/>
+                  <a:srgbClr val="1E3A8A"/>
                 </a:solidFill>
                 <a:latin typeface="Pretendard Variable"/>
               </a:rPr>
@@ -12852,7 +12854,7 @@
             <a:r>
               <a:rPr sz="1425">
                 <a:solidFill>
-                  <a:srgbClr val="000000"/>
+                  <a:srgbClr val="1E3A8A"/>
                 </a:solidFill>
                 <a:latin typeface="Pretendard Variable"/>
               </a:rPr>
@@ -12933,7 +12935,7 @@
             <a:r>
               <a:rPr sz="1800" b="1">
                 <a:solidFill>
-                  <a:srgbClr val="000000"/>
+                  <a:srgbClr val="1E3A8A"/>
                 </a:solidFill>
                 <a:latin typeface="Pretendard Variable"/>
               </a:rPr>
@@ -12972,7 +12974,7 @@
             <a:r>
               <a:rPr sz="3900" b="1">
                 <a:solidFill>
-                  <a:srgbClr val="000000"/>
+                  <a:srgbClr val="1D1D1F"/>
                 </a:solidFill>
                 <a:latin typeface="Pretendard Variable"/>
               </a:rPr>
@@ -13011,7 +13013,7 @@
             <a:r>
               <a:rPr sz="975" b="1">
                 <a:solidFill>
-                  <a:srgbClr val="000000"/>
+                  <a:srgbClr val="FFFFFF"/>
                 </a:solidFill>
                 <a:latin typeface="Pretendard Variable"/>
               </a:rPr>
@@ -13050,7 +13052,7 @@
             <a:r>
               <a:rPr sz="1950" b="1">
                 <a:solidFill>
-                  <a:srgbClr val="000000"/>
+                  <a:srgbClr val="FFFFFF"/>
                 </a:solidFill>
                 <a:latin typeface="Pretendard Variable"/>
               </a:rPr>
@@ -13089,7 +13091,7 @@
             <a:r>
               <a:rPr sz="1050" b="1">
                 <a:solidFill>
-                  <a:srgbClr val="000000"/>
+                  <a:srgbClr val="1E3A8A"/>
                 </a:solidFill>
                 <a:latin typeface="Pretendard Variable"/>
               </a:rPr>
@@ -13128,7 +13130,7 @@
             <a:r>
               <a:rPr sz="1200" b="1">
                 <a:solidFill>
-                  <a:srgbClr val="000000"/>
+                  <a:srgbClr val="FFFFFF"/>
                 </a:solidFill>
                 <a:latin typeface="Pretendard Variable"/>
               </a:rPr>
@@ -13167,7 +13169,7 @@
             <a:r>
               <a:rPr sz="975">
                 <a:solidFill>
-                  <a:srgbClr val="000000"/>
+                  <a:srgbClr val="1E3A8A"/>
                 </a:solidFill>
                 <a:latin typeface="Pretendard Variable"/>
               </a:rPr>
@@ -13206,7 +13208,7 @@
             <a:r>
               <a:rPr sz="1200" b="1">
                 <a:solidFill>
-                  <a:srgbClr val="000000"/>
+                  <a:srgbClr val="FFFFFF"/>
                 </a:solidFill>
                 <a:latin typeface="Pretendard Variable"/>
               </a:rPr>
@@ -13245,7 +13247,7 @@
             <a:r>
               <a:rPr sz="975">
                 <a:solidFill>
-                  <a:srgbClr val="000000"/>
+                  <a:srgbClr val="1E3A8A"/>
                 </a:solidFill>
                 <a:latin typeface="Pretendard Variable"/>
               </a:rPr>
@@ -13284,7 +13286,7 @@
             <a:r>
               <a:rPr sz="975" b="1">
                 <a:solidFill>
-                  <a:srgbClr val="000000"/>
+                  <a:srgbClr val="1E3A8A"/>
                 </a:solidFill>
                 <a:latin typeface="Pretendard Variable"/>
               </a:rPr>
@@ -13323,7 +13325,7 @@
             <a:r>
               <a:rPr sz="900" b="1">
                 <a:solidFill>
-                  <a:srgbClr val="000000"/>
+                  <a:srgbClr val="1E3A8A"/>
                 </a:solidFill>
                 <a:latin typeface="Pretendard Variable"/>
               </a:rPr>
@@ -13362,7 +13364,7 @@
             <a:r>
               <a:rPr sz="3300" b="1">
                 <a:solidFill>
-                  <a:srgbClr val="000000"/>
+                  <a:srgbClr val="1E3A8A"/>
                 </a:solidFill>
                 <a:latin typeface="Pretendard Variable"/>
               </a:rPr>
@@ -13401,7 +13403,7 @@
             <a:r>
               <a:rPr sz="1125" b="1">
                 <a:solidFill>
-                  <a:srgbClr val="000000"/>
+                  <a:srgbClr val="1E3A8A"/>
                 </a:solidFill>
                 <a:latin typeface="Pretendard Variable"/>
               </a:rPr>
@@ -13440,7 +13442,7 @@
             <a:r>
               <a:rPr sz="900" b="1">
                 <a:solidFill>
-                  <a:srgbClr val="000000"/>
+                  <a:srgbClr val="1E3A8A"/>
                 </a:solidFill>
                 <a:latin typeface="Pretendard Variable"/>
               </a:rPr>
@@ -13479,7 +13481,7 @@
             <a:r>
               <a:rPr sz="900" b="1">
                 <a:solidFill>
-                  <a:srgbClr val="000000"/>
+                  <a:srgbClr val="1E3A8A"/>
                 </a:solidFill>
                 <a:latin typeface="Pretendard Variable"/>
               </a:rPr>
@@ -13518,7 +13520,7 @@
             <a:r>
               <a:rPr sz="3300" b="1">
                 <a:solidFill>
-                  <a:srgbClr val="000000"/>
+                  <a:srgbClr val="1E3A8A"/>
                 </a:solidFill>
                 <a:latin typeface="Pretendard Variable"/>
               </a:rPr>
@@ -13557,7 +13559,7 @@
             <a:r>
               <a:rPr sz="1125" b="1">
                 <a:solidFill>
-                  <a:srgbClr val="000000"/>
+                  <a:srgbClr val="1E3A8A"/>
                 </a:solidFill>
                 <a:latin typeface="Pretendard Variable"/>
               </a:rPr>
@@ -13596,7 +13598,7 @@
             <a:r>
               <a:rPr sz="900" b="1">
                 <a:solidFill>
-                  <a:srgbClr val="000000"/>
+                  <a:srgbClr val="1E3A8A"/>
                 </a:solidFill>
                 <a:latin typeface="Pretendard Variable"/>
               </a:rPr>
@@ -13635,7 +13637,7 @@
             <a:r>
               <a:rPr sz="900" b="1">
                 <a:solidFill>
-                  <a:srgbClr val="000000"/>
+                  <a:srgbClr val="1E3A8A"/>
                 </a:solidFill>
                 <a:latin typeface="Pretendard Variable"/>
               </a:rPr>
@@ -13674,7 +13676,7 @@
             <a:r>
               <a:rPr sz="3300" b="1">
                 <a:solidFill>
-                  <a:srgbClr val="000000"/>
+                  <a:srgbClr val="1E3A8A"/>
                 </a:solidFill>
                 <a:latin typeface="Pretendard Variable"/>
               </a:rPr>
@@ -13713,7 +13715,7 @@
             <a:r>
               <a:rPr sz="1125" b="1">
                 <a:solidFill>
-                  <a:srgbClr val="000000"/>
+                  <a:srgbClr val="1E3A8A"/>
                 </a:solidFill>
                 <a:latin typeface="Pretendard Variable"/>
               </a:rPr>
@@ -13752,7 +13754,7 @@
             <a:r>
               <a:rPr sz="900" b="1">
                 <a:solidFill>
-                  <a:srgbClr val="000000"/>
+                  <a:srgbClr val="1E3A8A"/>
                 </a:solidFill>
                 <a:latin typeface="Pretendard Variable"/>
               </a:rPr>
@@ -13791,7 +13793,7 @@
             <a:r>
               <a:rPr sz="900" b="1">
                 <a:solidFill>
-                  <a:srgbClr val="000000"/>
+                  <a:srgbClr val="1E3A8A"/>
                 </a:solidFill>
                 <a:latin typeface="Pretendard Variable"/>
               </a:rPr>
@@ -13830,7 +13832,7 @@
             <a:r>
               <a:rPr sz="3300" b="1">
                 <a:solidFill>
-                  <a:srgbClr val="000000"/>
+                  <a:srgbClr val="10B981"/>
                 </a:solidFill>
                 <a:latin typeface="Pretendard Variable"/>
               </a:rPr>
@@ -13869,7 +13871,7 @@
             <a:r>
               <a:rPr sz="1125" b="1">
                 <a:solidFill>
-                  <a:srgbClr val="000000"/>
+                  <a:srgbClr val="1E3A8A"/>
                 </a:solidFill>
                 <a:latin typeface="Pretendard Variable"/>
               </a:rPr>
@@ -13908,7 +13910,7 @@
             <a:r>
               <a:rPr sz="900" b="1">
                 <a:solidFill>
-                  <a:srgbClr val="000000"/>
+                  <a:srgbClr val="1E3A8A"/>
                 </a:solidFill>
                 <a:latin typeface="Pretendard Variable"/>
               </a:rPr>
@@ -13947,7 +13949,7 @@
             <a:r>
               <a:rPr sz="1425">
                 <a:solidFill>
-                  <a:srgbClr val="000000"/>
+                  <a:srgbClr val="1E3A8A"/>
                 </a:solidFill>
                 <a:latin typeface="Pretendard Variable"/>
               </a:rPr>
@@ -14028,7 +14030,7 @@
             <a:r>
               <a:rPr sz="1950" b="1">
                 <a:solidFill>
-                  <a:srgbClr val="000000"/>
+                  <a:srgbClr val="0F172A"/>
                 </a:solidFill>
                 <a:latin typeface="Pretendard Variable"/>
               </a:rPr>
@@ -14067,7 +14069,7 @@
             <a:r>
               <a:rPr sz="4950" b="1">
                 <a:solidFill>
-                  <a:srgbClr val="000000"/>
+                  <a:srgbClr val="0F172A"/>
                 </a:solidFill>
                 <a:latin typeface="Pretendard Variable"/>
               </a:rPr>
@@ -14148,7 +14150,7 @@
             <a:r>
               <a:rPr sz="1800" b="1">
                 <a:solidFill>
-                  <a:srgbClr val="000000"/>
+                  <a:srgbClr val="1E3A8A"/>
                 </a:solidFill>
                 <a:latin typeface="Pretendard Variable"/>
               </a:rPr>
@@ -14187,7 +14189,7 @@
             <a:r>
               <a:rPr sz="3900" b="1">
                 <a:solidFill>
-                  <a:srgbClr val="000000"/>
+                  <a:srgbClr val="1D1D1F"/>
                 </a:solidFill>
                 <a:latin typeface="Pretendard Variable"/>
               </a:rPr>
@@ -14226,7 +14228,7 @@
             <a:r>
               <a:rPr sz="900" b="1">
                 <a:solidFill>
-                  <a:srgbClr val="000000"/>
+                  <a:srgbClr val="1E3A8A"/>
                 </a:solidFill>
                 <a:latin typeface="Pretendard Variable"/>
               </a:rPr>
@@ -14265,7 +14267,7 @@
             <a:r>
               <a:rPr sz="1350" b="1">
                 <a:solidFill>
-                  <a:srgbClr val="000000"/>
+                  <a:srgbClr val="1E3A8A"/>
                 </a:solidFill>
                 <a:latin typeface="Pretendard Variable"/>
               </a:rPr>
@@ -14304,7 +14306,7 @@
             <a:r>
               <a:rPr sz="900" b="1">
                 <a:solidFill>
-                  <a:srgbClr val="000000"/>
+                  <a:srgbClr val="1E3A8A"/>
                 </a:solidFill>
                 <a:latin typeface="Pretendard Variable"/>
               </a:rPr>
@@ -14343,7 +14345,7 @@
             <a:r>
               <a:rPr sz="900" b="1">
                 <a:solidFill>
-                  <a:srgbClr val="000000"/>
+                  <a:srgbClr val="E11D48"/>
                 </a:solidFill>
                 <a:latin typeface="Pretendard Variable"/>
               </a:rPr>
@@ -14382,7 +14384,7 @@
             <a:r>
               <a:rPr sz="1350" b="1">
                 <a:solidFill>
-                  <a:srgbClr val="000000"/>
+                  <a:srgbClr val="1E3A8A"/>
                 </a:solidFill>
                 <a:latin typeface="Pretendard Variable"/>
               </a:rPr>
@@ -14421,7 +14423,7 @@
             <a:r>
               <a:rPr sz="900" b="1">
                 <a:solidFill>
-                  <a:srgbClr val="000000"/>
+                  <a:srgbClr val="1E3A8A"/>
                 </a:solidFill>
                 <a:latin typeface="Pretendard Variable"/>
               </a:rPr>
@@ -14460,7 +14462,7 @@
             <a:r>
               <a:rPr sz="900" b="1">
                 <a:solidFill>
-                  <a:srgbClr val="000000"/>
+                  <a:srgbClr val="1E3A8A"/>
                 </a:solidFill>
                 <a:latin typeface="Pretendard Variable"/>
               </a:rPr>
@@ -14499,7 +14501,7 @@
             <a:r>
               <a:rPr sz="1350" b="1">
                 <a:solidFill>
-                  <a:srgbClr val="000000"/>
+                  <a:srgbClr val="FFFFFF"/>
                 </a:solidFill>
                 <a:latin typeface="Pretendard Variable"/>
               </a:rPr>
@@ -14538,7 +14540,7 @@
             <a:r>
               <a:rPr sz="900" b="1">
                 <a:solidFill>
-                  <a:srgbClr val="000000"/>
+                  <a:srgbClr val="1E3A8A"/>
                 </a:solidFill>
                 <a:latin typeface="Pretendard Variable"/>
               </a:rPr>
@@ -14577,7 +14579,7 @@
             <a:r>
               <a:rPr sz="1425">
                 <a:solidFill>
-                  <a:srgbClr val="000000"/>
+                  <a:srgbClr val="1E3A8A"/>
                 </a:solidFill>
                 <a:latin typeface="Pretendard Variable"/>
               </a:rPr>
@@ -14658,7 +14660,7 @@
             <a:r>
               <a:rPr sz="1800" b="1">
                 <a:solidFill>
-                  <a:srgbClr val="000000"/>
+                  <a:srgbClr val="1E3A8A"/>
                 </a:solidFill>
                 <a:latin typeface="Pretendard Variable"/>
               </a:rPr>
@@ -14697,7 +14699,7 @@
             <a:r>
               <a:rPr sz="3900" b="1">
                 <a:solidFill>
-                  <a:srgbClr val="000000"/>
+                  <a:srgbClr val="1D1D1F"/>
                 </a:solidFill>
                 <a:latin typeface="Pretendard Variable"/>
               </a:rPr>
@@ -14736,7 +14738,7 @@
             <a:r>
               <a:rPr sz="975" b="1">
                 <a:solidFill>
-                  <a:srgbClr val="000000"/>
+                  <a:srgbClr val="FFFFFF"/>
                 </a:solidFill>
                 <a:latin typeface="Pretendard Variable"/>
               </a:rPr>
@@ -14775,7 +14777,7 @@
             <a:r>
               <a:rPr sz="1800" b="1">
                 <a:solidFill>
-                  <a:srgbClr val="000000"/>
+                  <a:srgbClr val="1E3A8A"/>
                 </a:solidFill>
                 <a:latin typeface="Pretendard Variable"/>
               </a:rPr>
@@ -14814,7 +14816,7 @@
             <a:r>
               <a:rPr sz="1200" b="1">
                 <a:solidFill>
-                  <a:srgbClr val="000000"/>
+                  <a:srgbClr val="1E3A8A"/>
                 </a:solidFill>
                 <a:latin typeface="Pretendard Variable"/>
               </a:rPr>
@@ -14853,7 +14855,7 @@
             <a:r>
               <a:rPr sz="1500" b="1">
                 <a:solidFill>
-                  <a:srgbClr val="000000"/>
+                  <a:srgbClr val="1E3A8A"/>
                 </a:solidFill>
                 <a:latin typeface="Pretendard Variable"/>
               </a:rPr>
@@ -14892,7 +14894,7 @@
             <a:r>
               <a:rPr sz="1200" b="1">
                 <a:solidFill>
-                  <a:srgbClr val="000000"/>
+                  <a:srgbClr val="1E3A8A"/>
                 </a:solidFill>
                 <a:latin typeface="Pretendard Variable"/>
               </a:rPr>
@@ -14931,7 +14933,7 @@
             <a:r>
               <a:rPr sz="1500" b="1">
                 <a:solidFill>
-                  <a:srgbClr val="000000"/>
+                  <a:srgbClr val="1E3A8A"/>
                 </a:solidFill>
                 <a:latin typeface="Pretendard Variable"/>
               </a:rPr>
@@ -14970,7 +14972,7 @@
             <a:r>
               <a:rPr sz="1200" b="1">
                 <a:solidFill>
-                  <a:srgbClr val="000000"/>
+                  <a:srgbClr val="1E3A8A"/>
                 </a:solidFill>
                 <a:latin typeface="Pretendard Variable"/>
               </a:rPr>
@@ -15009,7 +15011,7 @@
             <a:r>
               <a:rPr sz="1200" b="1">
                 <a:solidFill>
-                  <a:srgbClr val="000000"/>
+                  <a:srgbClr val="1E3A8A"/>
                 </a:solidFill>
                 <a:latin typeface="Pretendard Variable"/>
               </a:rPr>
@@ -15048,7 +15050,7 @@
             <a:r>
               <a:rPr sz="975" b="1">
                 <a:solidFill>
-                  <a:srgbClr val="000000"/>
+                  <a:srgbClr val="1E3A8A"/>
                 </a:solidFill>
                 <a:latin typeface="Pretendard Variable"/>
               </a:rPr>
@@ -15087,7 +15089,7 @@
             <a:r>
               <a:rPr sz="1500" b="1">
                 <a:solidFill>
-                  <a:srgbClr val="000000"/>
+                  <a:srgbClr val="E11D48"/>
                 </a:solidFill>
                 <a:latin typeface="Pretendard Variable"/>
               </a:rPr>
@@ -15126,7 +15128,7 @@
             <a:r>
               <a:rPr sz="975" b="1">
                 <a:solidFill>
-                  <a:srgbClr val="000000"/>
+                  <a:srgbClr val="FFFFFF"/>
                 </a:solidFill>
                 <a:latin typeface="Pretendard Variable"/>
               </a:rPr>
@@ -15165,7 +15167,7 @@
             <a:r>
               <a:rPr sz="1800" b="1">
                 <a:solidFill>
-                  <a:srgbClr val="000000"/>
+                  <a:srgbClr val="1E3A8A"/>
                 </a:solidFill>
                 <a:latin typeface="Pretendard Variable"/>
               </a:rPr>
@@ -15204,7 +15206,7 @@
             <a:r>
               <a:rPr sz="1200" b="1">
                 <a:solidFill>
-                  <a:srgbClr val="000000"/>
+                  <a:srgbClr val="1E3A8A"/>
                 </a:solidFill>
                 <a:latin typeface="Pretendard Variable"/>
               </a:rPr>
@@ -15243,7 +15245,7 @@
             <a:r>
               <a:rPr sz="1500" b="1">
                 <a:solidFill>
-                  <a:srgbClr val="000000"/>
+                  <a:srgbClr val="1E3A8A"/>
                 </a:solidFill>
                 <a:latin typeface="Pretendard Variable"/>
               </a:rPr>
@@ -15282,7 +15284,7 @@
             <a:r>
               <a:rPr sz="1200" b="1">
                 <a:solidFill>
-                  <a:srgbClr val="000000"/>
+                  <a:srgbClr val="1E3A8A"/>
                 </a:solidFill>
                 <a:latin typeface="Pretendard Variable"/>
               </a:rPr>
@@ -15321,7 +15323,7 @@
             <a:r>
               <a:rPr sz="1500" b="1">
                 <a:solidFill>
-                  <a:srgbClr val="000000"/>
+                  <a:srgbClr val="1E3A8A"/>
                 </a:solidFill>
                 <a:latin typeface="Pretendard Variable"/>
               </a:rPr>
@@ -15360,7 +15362,7 @@
             <a:r>
               <a:rPr sz="1200" b="1">
                 <a:solidFill>
-                  <a:srgbClr val="000000"/>
+                  <a:srgbClr val="1E3A8A"/>
                 </a:solidFill>
                 <a:latin typeface="Pretendard Variable"/>
               </a:rPr>
@@ -15399,7 +15401,7 @@
             <a:r>
               <a:rPr sz="1500" b="1">
                 <a:solidFill>
-                  <a:srgbClr val="000000"/>
+                  <a:srgbClr val="E11D48"/>
                 </a:solidFill>
                 <a:latin typeface="Pretendard Variable"/>
               </a:rPr>
@@ -15438,7 +15440,7 @@
             <a:r>
               <a:rPr sz="975" b="1">
                 <a:solidFill>
-                  <a:srgbClr val="000000"/>
+                  <a:srgbClr val="1E3A8A"/>
                 </a:solidFill>
                 <a:latin typeface="Pretendard Variable"/>
               </a:rPr>
@@ -15477,7 +15479,7 @@
             <a:r>
               <a:rPr sz="1425">
                 <a:solidFill>
-                  <a:srgbClr val="000000"/>
+                  <a:srgbClr val="1E3A8A"/>
                 </a:solidFill>
                 <a:latin typeface="Pretendard Variable"/>
               </a:rPr>
@@ -15558,7 +15560,7 @@
             <a:r>
               <a:rPr sz="1800" b="1">
                 <a:solidFill>
-                  <a:srgbClr val="000000"/>
+                  <a:srgbClr val="1E3A8A"/>
                 </a:solidFill>
                 <a:latin typeface="Pretendard Variable"/>
               </a:rPr>
@@ -15597,7 +15599,7 @@
             <a:r>
               <a:rPr sz="3900" b="1">
                 <a:solidFill>
-                  <a:srgbClr val="000000"/>
+                  <a:srgbClr val="1D1D1F"/>
                 </a:solidFill>
                 <a:latin typeface="Pretendard Variable"/>
               </a:rPr>
@@ -15636,7 +15638,7 @@
             <a:r>
               <a:rPr sz="975" b="1">
                 <a:solidFill>
-                  <a:srgbClr val="000000"/>
+                  <a:srgbClr val="FFFFFF"/>
                 </a:solidFill>
                 <a:latin typeface="Pretendard Variable"/>
               </a:rPr>
@@ -15675,7 +15677,7 @@
             <a:r>
               <a:rPr sz="900" b="1">
                 <a:solidFill>
-                  <a:srgbClr val="000000"/>
+                  <a:srgbClr val="1E3A8A"/>
                 </a:solidFill>
                 <a:latin typeface="Pretendard Variable"/>
               </a:rPr>
@@ -15714,7 +15716,7 @@
             <a:r>
               <a:rPr sz="1350" b="1">
                 <a:solidFill>
-                  <a:srgbClr val="000000"/>
+                  <a:srgbClr val="1E3A8A"/>
                 </a:solidFill>
                 <a:latin typeface="Pretendard Variable"/>
               </a:rPr>
@@ -15753,7 +15755,7 @@
             <a:r>
               <a:rPr sz="975" b="1">
                 <a:solidFill>
-                  <a:srgbClr val="000000"/>
+                  <a:srgbClr val="1E3A8A"/>
                 </a:solidFill>
                 <a:latin typeface="Pretendard Variable"/>
               </a:rPr>
@@ -15792,7 +15794,7 @@
             <a:r>
               <a:rPr sz="900" b="1">
                 <a:solidFill>
-                  <a:srgbClr val="000000"/>
+                  <a:srgbClr val="1E3A8A"/>
                 </a:solidFill>
                 <a:latin typeface="Pretendard Variable"/>
               </a:rPr>
@@ -15831,7 +15833,7 @@
             <a:r>
               <a:rPr sz="900" b="1">
                 <a:solidFill>
-                  <a:srgbClr val="000000"/>
+                  <a:srgbClr val="1E3A8A"/>
                 </a:solidFill>
                 <a:latin typeface="Pretendard Variable"/>
               </a:rPr>
@@ -15870,7 +15872,7 @@
             <a:r>
               <a:rPr sz="900" b="1">
                 <a:solidFill>
-                  <a:srgbClr val="000000"/>
+                  <a:srgbClr val="1E3A8A"/>
                 </a:solidFill>
                 <a:latin typeface="Pretendard Variable"/>
               </a:rPr>
@@ -15909,7 +15911,7 @@
             <a:r>
               <a:rPr sz="975" b="1">
                 <a:solidFill>
-                  <a:srgbClr val="000000"/>
+                  <a:srgbClr val="FFFFFF"/>
                 </a:solidFill>
                 <a:latin typeface="Pretendard Variable"/>
               </a:rPr>
@@ -15948,7 +15950,7 @@
             <a:r>
               <a:rPr sz="900" b="1">
                 <a:solidFill>
-                  <a:srgbClr val="000000"/>
+                  <a:srgbClr val="1E3A8A"/>
                 </a:solidFill>
                 <a:latin typeface="Pretendard Variable"/>
               </a:rPr>
@@ -15987,7 +15989,7 @@
             <a:r>
               <a:rPr sz="1350" b="1">
                 <a:solidFill>
-                  <a:srgbClr val="000000"/>
+                  <a:srgbClr val="1E3A8A"/>
                 </a:solidFill>
                 <a:latin typeface="Pretendard Variable"/>
               </a:rPr>
@@ -16026,7 +16028,7 @@
             <a:r>
               <a:rPr sz="975" b="1">
                 <a:solidFill>
-                  <a:srgbClr val="000000"/>
+                  <a:srgbClr val="1E3A8A"/>
                 </a:solidFill>
                 <a:latin typeface="Pretendard Variable"/>
               </a:rPr>
@@ -16065,7 +16067,7 @@
             <a:r>
               <a:rPr sz="900" b="1">
                 <a:solidFill>
-                  <a:srgbClr val="000000"/>
+                  <a:srgbClr val="1E3A8A"/>
                 </a:solidFill>
                 <a:latin typeface="Pretendard Variable"/>
               </a:rPr>
@@ -16104,7 +16106,7 @@
             <a:r>
               <a:rPr sz="900" b="1">
                 <a:solidFill>
-                  <a:srgbClr val="000000"/>
+                  <a:srgbClr val="1E3A8A"/>
                 </a:solidFill>
                 <a:latin typeface="Pretendard Variable"/>
               </a:rPr>
@@ -16143,7 +16145,7 @@
             <a:r>
               <a:rPr sz="900" b="1">
                 <a:solidFill>
-                  <a:srgbClr val="000000"/>
+                  <a:srgbClr val="1E3A8A"/>
                 </a:solidFill>
                 <a:latin typeface="Pretendard Variable"/>
               </a:rPr>
@@ -16182,7 +16184,7 @@
             <a:r>
               <a:rPr sz="975" b="1">
                 <a:solidFill>
-                  <a:srgbClr val="000000"/>
+                  <a:srgbClr val="0F172A"/>
                 </a:solidFill>
                 <a:latin typeface="Pretendard Variable"/>
               </a:rPr>
@@ -16221,7 +16223,7 @@
             <a:r>
               <a:rPr sz="900" b="1">
                 <a:solidFill>
-                  <a:srgbClr val="000000"/>
+                  <a:srgbClr val="1E3A8A"/>
                 </a:solidFill>
                 <a:latin typeface="Pretendard Variable"/>
               </a:rPr>
@@ -16260,7 +16262,7 @@
             <a:r>
               <a:rPr sz="1350" b="1">
                 <a:solidFill>
-                  <a:srgbClr val="000000"/>
+                  <a:srgbClr val="FFFFFF"/>
                 </a:solidFill>
                 <a:latin typeface="Pretendard Variable"/>
               </a:rPr>
@@ -16299,7 +16301,7 @@
             <a:r>
               <a:rPr sz="975" b="1">
                 <a:solidFill>
-                  <a:srgbClr val="000000"/>
+                  <a:srgbClr val="1E3A8A"/>
                 </a:solidFill>
                 <a:latin typeface="Pretendard Variable"/>
               </a:rPr>
@@ -16338,7 +16340,7 @@
             <a:r>
               <a:rPr sz="900" b="1">
                 <a:solidFill>
-                  <a:srgbClr val="000000"/>
+                  <a:srgbClr val="1E3A8A"/>
                 </a:solidFill>
                 <a:latin typeface="Pretendard Variable"/>
               </a:rPr>
@@ -16377,7 +16379,7 @@
             <a:r>
               <a:rPr sz="900" b="1">
                 <a:solidFill>
-                  <a:srgbClr val="000000"/>
+                  <a:srgbClr val="1E3A8A"/>
                 </a:solidFill>
                 <a:latin typeface="Pretendard Variable"/>
               </a:rPr>
@@ -16416,7 +16418,7 @@
             <a:r>
               <a:rPr sz="900" b="1">
                 <a:solidFill>
-                  <a:srgbClr val="000000"/>
+                  <a:srgbClr val="1E3A8A"/>
                 </a:solidFill>
                 <a:latin typeface="Pretendard Variable"/>
               </a:rPr>
@@ -16455,7 +16457,7 @@
             <a:r>
               <a:rPr sz="1425">
                 <a:solidFill>
-                  <a:srgbClr val="000000"/>
+                  <a:srgbClr val="1E3A8A"/>
                 </a:solidFill>
                 <a:latin typeface="Pretendard Variable"/>
               </a:rPr>
@@ -16536,7 +16538,7 @@
             <a:r>
               <a:rPr sz="1800" b="1">
                 <a:solidFill>
-                  <a:srgbClr val="000000"/>
+                  <a:srgbClr val="1E3A8A"/>
                 </a:solidFill>
                 <a:latin typeface="Pretendard Variable"/>
               </a:rPr>
@@ -16575,7 +16577,7 @@
             <a:r>
               <a:rPr sz="3900" b="1">
                 <a:solidFill>
-                  <a:srgbClr val="000000"/>
+                  <a:srgbClr val="1D1D1F"/>
                 </a:solidFill>
                 <a:latin typeface="Pretendard Variable"/>
               </a:rPr>
@@ -16614,7 +16616,7 @@
             <a:r>
               <a:rPr sz="975" b="1">
                 <a:solidFill>
-                  <a:srgbClr val="000000"/>
+                  <a:srgbClr val="FFFFFF"/>
                 </a:solidFill>
                 <a:latin typeface="Pretendard Variable"/>
               </a:rPr>
@@ -16653,7 +16655,7 @@
             <a:r>
               <a:rPr sz="1800" b="1">
                 <a:solidFill>
-                  <a:srgbClr val="000000"/>
+                  <a:srgbClr val="1E3A8A"/>
                 </a:solidFill>
                 <a:latin typeface="Pretendard Variable"/>
               </a:rPr>
@@ -16692,7 +16694,7 @@
             <a:r>
               <a:rPr sz="1500" b="1">
                 <a:solidFill>
-                  <a:srgbClr val="000000"/>
+                  <a:srgbClr val="FFFFFF"/>
                 </a:solidFill>
                 <a:latin typeface="Pretendard Variable"/>
               </a:rPr>
@@ -16731,7 +16733,7 @@
             <a:r>
               <a:rPr sz="1200" b="1">
                 <a:solidFill>
-                  <a:srgbClr val="000000"/>
+                  <a:srgbClr val="1E3A8A"/>
                 </a:solidFill>
                 <a:latin typeface="Pretendard Variable"/>
               </a:rPr>
@@ -16770,7 +16772,7 @@
             <a:r>
               <a:rPr sz="975" b="1">
                 <a:solidFill>
-                  <a:srgbClr val="000000"/>
+                  <a:srgbClr val="1E3A8A"/>
                 </a:solidFill>
                 <a:latin typeface="Pretendard Variable"/>
               </a:rPr>
@@ -16809,7 +16811,7 @@
             <a:r>
               <a:rPr sz="1500" b="1">
                 <a:solidFill>
-                  <a:srgbClr val="000000"/>
+                  <a:srgbClr val="FFFFFF"/>
                 </a:solidFill>
                 <a:latin typeface="Pretendard Variable"/>
               </a:rPr>
@@ -16848,7 +16850,7 @@
             <a:r>
               <a:rPr sz="1200" b="1">
                 <a:solidFill>
-                  <a:srgbClr val="000000"/>
+                  <a:srgbClr val="1E3A8A"/>
                 </a:solidFill>
                 <a:latin typeface="Pretendard Variable"/>
               </a:rPr>
@@ -16887,7 +16889,7 @@
             <a:r>
               <a:rPr sz="975" b="1">
                 <a:solidFill>
-                  <a:srgbClr val="000000"/>
+                  <a:srgbClr val="1E3A8A"/>
                 </a:solidFill>
                 <a:latin typeface="Pretendard Variable"/>
               </a:rPr>
@@ -16926,7 +16928,7 @@
             <a:r>
               <a:rPr sz="1500" b="1">
                 <a:solidFill>
-                  <a:srgbClr val="000000"/>
+                  <a:srgbClr val="FFFFFF"/>
                 </a:solidFill>
                 <a:latin typeface="Pretendard Variable"/>
               </a:rPr>
@@ -16965,7 +16967,7 @@
             <a:r>
               <a:rPr sz="1200" b="1">
                 <a:solidFill>
-                  <a:srgbClr val="000000"/>
+                  <a:srgbClr val="1E3A8A"/>
                 </a:solidFill>
                 <a:latin typeface="Pretendard Variable"/>
               </a:rPr>
@@ -17004,7 +17006,7 @@
             <a:r>
               <a:rPr sz="975" b="1">
                 <a:solidFill>
-                  <a:srgbClr val="000000"/>
+                  <a:srgbClr val="1E3A8A"/>
                 </a:solidFill>
                 <a:latin typeface="Pretendard Variable"/>
               </a:rPr>
@@ -17043,7 +17045,7 @@
             <a:r>
               <a:rPr sz="975" b="1">
                 <a:solidFill>
-                  <a:srgbClr val="000000"/>
+                  <a:srgbClr val="FFFFFF"/>
                 </a:solidFill>
                 <a:latin typeface="Pretendard Variable"/>
               </a:rPr>
@@ -17082,7 +17084,7 @@
             <a:r>
               <a:rPr sz="1800" b="1">
                 <a:solidFill>
-                  <a:srgbClr val="000000"/>
+                  <a:srgbClr val="FFFFFF"/>
                 </a:solidFill>
                 <a:latin typeface="Pretendard Variable"/>
               </a:rPr>
@@ -17121,7 +17123,7 @@
             <a:r>
               <a:rPr sz="1275" b="1">
                 <a:solidFill>
-                  <a:srgbClr val="000000"/>
+                  <a:srgbClr val="93C5FD"/>
                 </a:solidFill>
                 <a:latin typeface="Pretendard Variable"/>
               </a:rPr>
@@ -17160,7 +17162,7 @@
             <a:r>
               <a:rPr sz="975" b="1">
                 <a:solidFill>
-                  <a:srgbClr val="000000"/>
+                  <a:srgbClr val="FFFFFF"/>
                 </a:solidFill>
                 <a:latin typeface="Pretendard Variable"/>
               </a:rPr>
@@ -17199,7 +17201,7 @@
             <a:r>
               <a:rPr sz="1050" b="1">
                 <a:solidFill>
-                  <a:srgbClr val="000000"/>
+                  <a:srgbClr val="1E3A8A"/>
                 </a:solidFill>
                 <a:latin typeface="Pretendard Variable"/>
               </a:rPr>
@@ -17238,7 +17240,7 @@
             <a:r>
               <a:rPr sz="1275" b="1">
                 <a:solidFill>
-                  <a:srgbClr val="000000"/>
+                  <a:srgbClr val="93C5FD"/>
                 </a:solidFill>
                 <a:latin typeface="Pretendard Variable"/>
               </a:rPr>
@@ -17277,7 +17279,7 @@
             <a:r>
               <a:rPr sz="975" b="1">
                 <a:solidFill>
-                  <a:srgbClr val="000000"/>
+                  <a:srgbClr val="FFFFFF"/>
                 </a:solidFill>
                 <a:latin typeface="Pretendard Variable"/>
               </a:rPr>
@@ -17316,7 +17318,7 @@
             <a:r>
               <a:rPr sz="1050" b="1">
                 <a:solidFill>
-                  <a:srgbClr val="000000"/>
+                  <a:srgbClr val="1E3A8A"/>
                 </a:solidFill>
                 <a:latin typeface="Pretendard Variable"/>
               </a:rPr>
@@ -17355,7 +17357,7 @@
             <a:r>
               <a:rPr sz="1275" b="1">
                 <a:solidFill>
-                  <a:srgbClr val="000000"/>
+                  <a:srgbClr val="A7F3D0"/>
                 </a:solidFill>
                 <a:latin typeface="Pretendard Variable"/>
               </a:rPr>
@@ -17394,7 +17396,7 @@
             <a:r>
               <a:rPr sz="975" b="1">
                 <a:solidFill>
-                  <a:srgbClr val="000000"/>
+                  <a:srgbClr val="FFFFFF"/>
                 </a:solidFill>
                 <a:latin typeface="Pretendard Variable"/>
               </a:rPr>
@@ -17433,7 +17435,7 @@
             <a:r>
               <a:rPr sz="1050" b="1">
                 <a:solidFill>
-                  <a:srgbClr val="000000"/>
+                  <a:srgbClr val="1E3A8A"/>
                 </a:solidFill>
                 <a:latin typeface="Pretendard Variable"/>
               </a:rPr>
@@ -17472,7 +17474,7 @@
             <a:r>
               <a:rPr sz="1425">
                 <a:solidFill>
-                  <a:srgbClr val="000000"/>
+                  <a:srgbClr val="1E3A8A"/>
                 </a:solidFill>
                 <a:latin typeface="Pretendard Variable"/>
               </a:rPr>
@@ -17553,7 +17555,7 @@
             <a:r>
               <a:rPr sz="1950">
                 <a:solidFill>
-                  <a:srgbClr val="000000"/>
+                  <a:srgbClr val="FFFFFF"/>
                 </a:solidFill>
                 <a:latin typeface="Pretendard Variable"/>
               </a:rPr>
@@ -17592,7 +17594,7 @@
             <a:r>
               <a:rPr sz="4950" b="1">
                 <a:solidFill>
-                  <a:srgbClr val="000000"/>
+                  <a:srgbClr val="FFFFFF"/>
                 </a:solidFill>
                 <a:latin typeface="Pretendard Variable"/>
               </a:rPr>
@@ -17673,7 +17675,7 @@
             <a:r>
               <a:rPr sz="1800" b="1">
                 <a:solidFill>
-                  <a:srgbClr val="000000"/>
+                  <a:srgbClr val="1E3A8A"/>
                 </a:solidFill>
                 <a:latin typeface="Pretendard Variable"/>
               </a:rPr>
@@ -17712,7 +17714,7 @@
             <a:r>
               <a:rPr sz="3900" b="1">
                 <a:solidFill>
-                  <a:srgbClr val="000000"/>
+                  <a:srgbClr val="1D1D1F"/>
                 </a:solidFill>
                 <a:latin typeface="Pretendard Variable"/>
               </a:rPr>
@@ -17751,7 +17753,7 @@
             <a:r>
               <a:rPr sz="975" b="1">
                 <a:solidFill>
-                  <a:srgbClr val="000000"/>
+                  <a:srgbClr val="FFFFFF"/>
                 </a:solidFill>
                 <a:latin typeface="Pretendard Variable"/>
               </a:rPr>
@@ -17790,7 +17792,7 @@
             <a:r>
               <a:rPr sz="1800" b="1">
                 <a:solidFill>
-                  <a:srgbClr val="000000"/>
+                  <a:srgbClr val="1E3A8A"/>
                 </a:solidFill>
                 <a:latin typeface="Pretendard Variable"/>
               </a:rPr>
@@ -17829,7 +17831,7 @@
             <a:r>
               <a:rPr sz="1125" b="1">
                 <a:solidFill>
-                  <a:srgbClr val="000000"/>
+                  <a:srgbClr val="1E3A8A"/>
                 </a:solidFill>
                 <a:latin typeface="Pretendard Variable"/>
               </a:rPr>
@@ -17868,7 +17870,7 @@
             <a:r>
               <a:rPr sz="1200" b="1">
                 <a:solidFill>
-                  <a:srgbClr val="000000"/>
+                  <a:srgbClr val="1E3A8A"/>
                 </a:solidFill>
                 <a:latin typeface="Pretendard Variable"/>
               </a:rPr>
@@ -17907,7 +17909,7 @@
             <a:r>
               <a:rPr sz="975" b="1">
                 <a:solidFill>
-                  <a:srgbClr val="000000"/>
+                  <a:srgbClr val="1E3A8A"/>
                 </a:solidFill>
                 <a:latin typeface="Pretendard Variable"/>
               </a:rPr>
@@ -17946,7 +17948,7 @@
             <a:r>
               <a:rPr sz="1200" b="1">
                 <a:solidFill>
-                  <a:srgbClr val="000000"/>
+                  <a:srgbClr val="1E3A8A"/>
                 </a:solidFill>
                 <a:latin typeface="Pretendard Variable"/>
               </a:rPr>
@@ -17985,7 +17987,7 @@
             <a:r>
               <a:rPr sz="975" b="1">
                 <a:solidFill>
-                  <a:srgbClr val="000000"/>
+                  <a:srgbClr val="1E3A8A"/>
                 </a:solidFill>
                 <a:latin typeface="Pretendard Variable"/>
               </a:rPr>
@@ -18024,7 +18026,7 @@
             <a:r>
               <a:rPr sz="1200" b="1">
                 <a:solidFill>
-                  <a:srgbClr val="000000"/>
+                  <a:srgbClr val="1E3A8A"/>
                 </a:solidFill>
                 <a:latin typeface="Pretendard Variable"/>
               </a:rPr>
@@ -18063,7 +18065,7 @@
             <a:r>
               <a:rPr sz="975" b="1">
                 <a:solidFill>
-                  <a:srgbClr val="000000"/>
+                  <a:srgbClr val="1E3A8A"/>
                 </a:solidFill>
                 <a:latin typeface="Pretendard Variable"/>
               </a:rPr>
@@ -18102,7 +18104,7 @@
             <a:r>
               <a:rPr sz="1350" b="1">
                 <a:solidFill>
-                  <a:srgbClr val="000000"/>
+                  <a:srgbClr val="FFFFFF"/>
                 </a:solidFill>
                 <a:latin typeface="Pretendard Variable"/>
               </a:rPr>
@@ -18141,7 +18143,7 @@
             <a:r>
               <a:rPr sz="975" b="1">
                 <a:solidFill>
-                  <a:srgbClr val="000000"/>
+                  <a:srgbClr val="FFFFFF"/>
                 </a:solidFill>
                 <a:latin typeface="Pretendard Variable"/>
               </a:rPr>
@@ -18180,7 +18182,7 @@
             <a:r>
               <a:rPr sz="1800" b="1">
                 <a:solidFill>
-                  <a:srgbClr val="000000"/>
+                  <a:srgbClr val="FFFFFF"/>
                 </a:solidFill>
                 <a:latin typeface="Pretendard Variable"/>
               </a:rPr>
@@ -18219,7 +18221,7 @@
             <a:r>
               <a:rPr sz="1125" b="1">
                 <a:solidFill>
-                  <a:srgbClr val="000000"/>
+                  <a:srgbClr val="1E3A8A"/>
                 </a:solidFill>
                 <a:latin typeface="Pretendard Variable"/>
               </a:rPr>
@@ -18258,7 +18260,7 @@
             <a:r>
               <a:rPr sz="1200" b="1">
                 <a:solidFill>
-                  <a:srgbClr val="000000"/>
+                  <a:srgbClr val="FFFFFF"/>
                 </a:solidFill>
                 <a:latin typeface="Pretendard Variable"/>
               </a:rPr>
@@ -18297,7 +18299,7 @@
             <a:r>
               <a:rPr sz="975" b="1">
                 <a:solidFill>
-                  <a:srgbClr val="000000"/>
+                  <a:srgbClr val="1E3A8A"/>
                 </a:solidFill>
                 <a:latin typeface="Pretendard Variable"/>
               </a:rPr>
@@ -18336,7 +18338,7 @@
             <a:r>
               <a:rPr sz="1200" b="1">
                 <a:solidFill>
-                  <a:srgbClr val="000000"/>
+                  <a:srgbClr val="FFFFFF"/>
                 </a:solidFill>
                 <a:latin typeface="Pretendard Variable"/>
               </a:rPr>
@@ -18375,7 +18377,7 @@
             <a:r>
               <a:rPr sz="975" b="1">
                 <a:solidFill>
-                  <a:srgbClr val="000000"/>
+                  <a:srgbClr val="1E3A8A"/>
                 </a:solidFill>
                 <a:latin typeface="Pretendard Variable"/>
               </a:rPr>
@@ -18414,7 +18416,7 @@
             <a:r>
               <a:rPr sz="1200" b="1">
                 <a:solidFill>
-                  <a:srgbClr val="000000"/>
+                  <a:srgbClr val="FFFFFF"/>
                 </a:solidFill>
                 <a:latin typeface="Pretendard Variable"/>
               </a:rPr>
@@ -18453,7 +18455,7 @@
             <a:r>
               <a:rPr sz="975" b="1">
                 <a:solidFill>
-                  <a:srgbClr val="000000"/>
+                  <a:srgbClr val="1E3A8A"/>
                 </a:solidFill>
                 <a:latin typeface="Pretendard Variable"/>
               </a:rPr>
@@ -18492,7 +18494,7 @@
             <a:r>
               <a:rPr sz="1425">
                 <a:solidFill>
-                  <a:srgbClr val="000000"/>
+                  <a:srgbClr val="1E3A8A"/>
                 </a:solidFill>
                 <a:latin typeface="Pretendard Variable"/>
               </a:rPr>
@@ -18573,7 +18575,7 @@
             <a:r>
               <a:rPr sz="1800" b="1">
                 <a:solidFill>
-                  <a:srgbClr val="000000"/>
+                  <a:srgbClr val="1E3A8A"/>
                 </a:solidFill>
                 <a:latin typeface="Pretendard Variable"/>
               </a:rPr>
@@ -18612,7 +18614,7 @@
             <a:r>
               <a:rPr sz="3900" b="1">
                 <a:solidFill>
-                  <a:srgbClr val="000000"/>
+                  <a:srgbClr val="1D1D1F"/>
                 </a:solidFill>
                 <a:latin typeface="Pretendard Variable"/>
               </a:rPr>
@@ -18651,7 +18653,7 @@
             <a:r>
               <a:rPr sz="1425">
                 <a:solidFill>
-                  <a:srgbClr val="000000"/>
+                  <a:srgbClr val="1E3A8A"/>
                 </a:solidFill>
                 <a:latin typeface="Pretendard Variable"/>
               </a:rPr>
@@ -18732,7 +18734,7 @@
             <a:r>
               <a:rPr sz="1800" b="1">
                 <a:solidFill>
-                  <a:srgbClr val="000000"/>
+                  <a:srgbClr val="1E3A8A"/>
                 </a:solidFill>
                 <a:latin typeface="Pretendard Variable"/>
               </a:rPr>
@@ -18771,7 +18773,7 @@
             <a:r>
               <a:rPr sz="3900" b="1">
                 <a:solidFill>
-                  <a:srgbClr val="000000"/>
+                  <a:srgbClr val="1D1D1F"/>
                 </a:solidFill>
                 <a:latin typeface="Pretendard Variable"/>
               </a:rPr>
@@ -18810,7 +18812,7 @@
             <a:r>
               <a:rPr sz="1125" b="1">
                 <a:solidFill>
-                  <a:srgbClr val="000000"/>
+                  <a:srgbClr val="FFFFFF"/>
                 </a:solidFill>
                 <a:latin typeface="Pretendard Variable"/>
               </a:rPr>
@@ -18849,7 +18851,7 @@
             <a:r>
               <a:rPr sz="1350" b="1">
                 <a:solidFill>
-                  <a:srgbClr val="000000"/>
+                  <a:srgbClr val="1E3A8A"/>
                 </a:solidFill>
                 <a:latin typeface="Pretendard Variable"/>
               </a:rPr>
@@ -18888,7 +18890,7 @@
             <a:r>
               <a:rPr sz="900" b="1">
                 <a:solidFill>
-                  <a:srgbClr val="000000"/>
+                  <a:srgbClr val="1E3A8A"/>
                 </a:solidFill>
                 <a:latin typeface="Pretendard Variable"/>
               </a:rPr>
@@ -18927,7 +18929,7 @@
             <a:r>
               <a:rPr sz="1012" b="1">
                 <a:solidFill>
-                  <a:srgbClr val="000000"/>
+                  <a:srgbClr val="1E3A8A"/>
                 </a:solidFill>
                 <a:latin typeface="Pretendard Variable"/>
               </a:rPr>
@@ -18966,7 +18968,7 @@
             <a:r>
               <a:rPr sz="1125" b="1">
                 <a:solidFill>
-                  <a:srgbClr val="000000"/>
+                  <a:srgbClr val="FFFFFF"/>
                 </a:solidFill>
                 <a:latin typeface="Pretendard Variable"/>
               </a:rPr>
@@ -19005,7 +19007,7 @@
             <a:r>
               <a:rPr sz="1350" b="1">
                 <a:solidFill>
-                  <a:srgbClr val="000000"/>
+                  <a:srgbClr val="1E3A8A"/>
                 </a:solidFill>
                 <a:latin typeface="Pretendard Variable"/>
               </a:rPr>
@@ -19044,7 +19046,7 @@
             <a:r>
               <a:rPr sz="900" b="1">
                 <a:solidFill>
-                  <a:srgbClr val="000000"/>
+                  <a:srgbClr val="1E3A8A"/>
                 </a:solidFill>
                 <a:latin typeface="Pretendard Variable"/>
               </a:rPr>
@@ -19083,7 +19085,7 @@
             <a:r>
               <a:rPr sz="1012" b="1">
                 <a:solidFill>
-                  <a:srgbClr val="000000"/>
+                  <a:srgbClr val="1E3A8A"/>
                 </a:solidFill>
                 <a:latin typeface="Pretendard Variable"/>
               </a:rPr>
@@ -19122,7 +19124,7 @@
             <a:r>
               <a:rPr sz="1125" b="1">
                 <a:solidFill>
-                  <a:srgbClr val="000000"/>
+                  <a:srgbClr val="FFFFFF"/>
                 </a:solidFill>
                 <a:latin typeface="Pretendard Variable"/>
               </a:rPr>
@@ -19161,7 +19163,7 @@
             <a:r>
               <a:rPr sz="1350" b="1">
                 <a:solidFill>
-                  <a:srgbClr val="000000"/>
+                  <a:srgbClr val="FFFFFF"/>
                 </a:solidFill>
                 <a:latin typeface="Pretendard Variable"/>
               </a:rPr>
@@ -19200,7 +19202,7 @@
             <a:r>
               <a:rPr sz="900" b="1">
                 <a:solidFill>
-                  <a:srgbClr val="000000"/>
+                  <a:srgbClr val="1E3A8A"/>
                 </a:solidFill>
                 <a:latin typeface="Pretendard Variable"/>
               </a:rPr>
@@ -19239,7 +19241,7 @@
             <a:r>
               <a:rPr sz="1012" b="1">
                 <a:solidFill>
-                  <a:srgbClr val="000000"/>
+                  <a:srgbClr val="1E3A8A"/>
                 </a:solidFill>
                 <a:latin typeface="Pretendard Variable"/>
               </a:rPr>
@@ -19278,7 +19280,7 @@
             <a:r>
               <a:rPr sz="1125" b="1">
                 <a:solidFill>
-                  <a:srgbClr val="000000"/>
+                  <a:srgbClr val="FFFFFF"/>
                 </a:solidFill>
                 <a:latin typeface="Pretendard Variable"/>
               </a:rPr>
@@ -19317,7 +19319,7 @@
             <a:r>
               <a:rPr sz="1350" b="1">
                 <a:solidFill>
-                  <a:srgbClr val="000000"/>
+                  <a:srgbClr val="FFFFFF"/>
                 </a:solidFill>
                 <a:latin typeface="Pretendard Variable"/>
               </a:rPr>
@@ -19356,7 +19358,7 @@
             <a:r>
               <a:rPr sz="900" b="1">
                 <a:solidFill>
-                  <a:srgbClr val="000000"/>
+                  <a:srgbClr val="1E3A8A"/>
                 </a:solidFill>
                 <a:latin typeface="Pretendard Variable"/>
               </a:rPr>
@@ -19395,7 +19397,7 @@
             <a:r>
               <a:rPr sz="1012" b="1">
                 <a:solidFill>
-                  <a:srgbClr val="000000"/>
+                  <a:srgbClr val="1E3A8A"/>
                 </a:solidFill>
                 <a:latin typeface="Pretendard Variable"/>
               </a:rPr>
@@ -19434,7 +19436,7 @@
             <a:r>
               <a:rPr sz="1425">
                 <a:solidFill>
-                  <a:srgbClr val="000000"/>
+                  <a:srgbClr val="1E3A8A"/>
                 </a:solidFill>
                 <a:latin typeface="Pretendard Variable"/>
               </a:rPr>
@@ -19515,7 +19517,7 @@
             <a:r>
               <a:rPr sz="1950" b="1">
                 <a:solidFill>
-                  <a:srgbClr val="000000"/>
+                  <a:srgbClr val="0F172A"/>
                 </a:solidFill>
                 <a:latin typeface="Pretendard Variable"/>
               </a:rPr>
@@ -19554,7 +19556,7 @@
             <a:r>
               <a:rPr sz="4950" b="1">
                 <a:solidFill>
-                  <a:srgbClr val="000000"/>
+                  <a:srgbClr val="0F172A"/>
                 </a:solidFill>
                 <a:latin typeface="Pretendard Variable"/>
               </a:rPr>
@@ -19635,7 +19637,7 @@
             <a:r>
               <a:rPr sz="1800" b="1">
                 <a:solidFill>
-                  <a:srgbClr val="000000"/>
+                  <a:srgbClr val="1E3A8A"/>
                 </a:solidFill>
                 <a:latin typeface="Pretendard Variable"/>
               </a:rPr>
@@ -19674,7 +19676,7 @@
             <a:r>
               <a:rPr sz="3900" b="1">
                 <a:solidFill>
-                  <a:srgbClr val="000000"/>
+                  <a:srgbClr val="1D1D1F"/>
                 </a:solidFill>
                 <a:latin typeface="Pretendard Variable"/>
               </a:rPr>
@@ -19713,7 +19715,7 @@
             <a:r>
               <a:rPr sz="975" b="1">
                 <a:solidFill>
-                  <a:srgbClr val="000000"/>
+                  <a:srgbClr val="FFFFFF"/>
                 </a:solidFill>
                 <a:latin typeface="Pretendard Variable"/>
               </a:rPr>
@@ -19752,7 +19754,7 @@
             <a:r>
               <a:rPr sz="1800" b="1">
                 <a:solidFill>
-                  <a:srgbClr val="000000"/>
+                  <a:srgbClr val="1E3A8A"/>
                 </a:solidFill>
                 <a:latin typeface="Pretendard Variable"/>
               </a:rPr>
@@ -19791,7 +19793,7 @@
             <a:r>
               <a:rPr sz="1125" b="1">
                 <a:solidFill>
-                  <a:srgbClr val="000000"/>
+                  <a:srgbClr val="1E3A8A"/>
                 </a:solidFill>
                 <a:latin typeface="Pretendard Variable"/>
               </a:rPr>
@@ -19830,7 +19832,7 @@
             <a:r>
               <a:rPr sz="1200" b="1">
                 <a:solidFill>
-                  <a:srgbClr val="000000"/>
+                  <a:srgbClr val="1E3A8A"/>
                 </a:solidFill>
                 <a:latin typeface="Pretendard Variable"/>
               </a:rPr>
@@ -19869,7 +19871,7 @@
             <a:r>
               <a:rPr sz="975">
                 <a:solidFill>
-                  <a:srgbClr val="000000"/>
+                  <a:srgbClr val="1E3A8A"/>
                 </a:solidFill>
                 <a:latin typeface="Pretendard Variable"/>
               </a:rPr>
@@ -19908,7 +19910,7 @@
             <a:r>
               <a:rPr sz="1200" b="1">
                 <a:solidFill>
-                  <a:srgbClr val="000000"/>
+                  <a:srgbClr val="1E3A8A"/>
                 </a:solidFill>
                 <a:latin typeface="Pretendard Variable"/>
               </a:rPr>
@@ -19947,7 +19949,7 @@
             <a:r>
               <a:rPr sz="975">
                 <a:solidFill>
-                  <a:srgbClr val="000000"/>
+                  <a:srgbClr val="1E3A8A"/>
                 </a:solidFill>
                 <a:latin typeface="Pretendard Variable"/>
               </a:rPr>
@@ -19986,7 +19988,7 @@
             <a:r>
               <a:rPr sz="975" b="1">
                 <a:solidFill>
-                  <a:srgbClr val="000000"/>
+                  <a:srgbClr val="FFFFFF"/>
                 </a:solidFill>
                 <a:latin typeface="Pretendard Variable"/>
               </a:rPr>
@@ -20025,7 +20027,7 @@
             <a:r>
               <a:rPr sz="1800" b="1">
                 <a:solidFill>
-                  <a:srgbClr val="000000"/>
+                  <a:srgbClr val="FFFFFF"/>
                 </a:solidFill>
                 <a:latin typeface="Pretendard Variable"/>
               </a:rPr>
@@ -20064,7 +20066,7 @@
             <a:r>
               <a:rPr sz="1125" b="1">
                 <a:solidFill>
-                  <a:srgbClr val="000000"/>
+                  <a:srgbClr val="1E3A8A"/>
                 </a:solidFill>
                 <a:latin typeface="Pretendard Variable"/>
               </a:rPr>
@@ -20103,7 +20105,7 @@
             <a:r>
               <a:rPr sz="1200" b="1">
                 <a:solidFill>
-                  <a:srgbClr val="000000"/>
+                  <a:srgbClr val="93C5FD"/>
                 </a:solidFill>
                 <a:latin typeface="Pretendard Variable"/>
               </a:rPr>
@@ -20142,7 +20144,7 @@
             <a:r>
               <a:rPr sz="975">
                 <a:solidFill>
-                  <a:srgbClr val="000000"/>
+                  <a:srgbClr val="1E3A8A"/>
                 </a:solidFill>
                 <a:latin typeface="Pretendard Variable"/>
               </a:rPr>
@@ -20181,7 +20183,7 @@
             <a:r>
               <a:rPr sz="1200" b="1">
                 <a:solidFill>
-                  <a:srgbClr val="000000"/>
+                  <a:srgbClr val="93C5FD"/>
                 </a:solidFill>
                 <a:latin typeface="Pretendard Variable"/>
               </a:rPr>
@@ -20220,7 +20222,7 @@
             <a:r>
               <a:rPr sz="975">
                 <a:solidFill>
-                  <a:srgbClr val="000000"/>
+                  <a:srgbClr val="1E3A8A"/>
                 </a:solidFill>
                 <a:latin typeface="Pretendard Variable"/>
               </a:rPr>
@@ -20259,7 +20261,7 @@
             <a:r>
               <a:rPr sz="1425">
                 <a:solidFill>
-                  <a:srgbClr val="000000"/>
+                  <a:srgbClr val="1E3A8A"/>
                 </a:solidFill>
                 <a:latin typeface="Pretendard Variable"/>
               </a:rPr>
@@ -20340,7 +20342,7 @@
             <a:r>
               <a:rPr sz="1800" b="1">
                 <a:solidFill>
-                  <a:srgbClr val="000000"/>
+                  <a:srgbClr val="1E3A8A"/>
                 </a:solidFill>
                 <a:latin typeface="Pretendard Variable"/>
               </a:rPr>
@@ -20379,7 +20381,7 @@
             <a:r>
               <a:rPr sz="3900" b="1">
                 <a:solidFill>
-                  <a:srgbClr val="000000"/>
+                  <a:srgbClr val="1D1D1F"/>
                 </a:solidFill>
                 <a:latin typeface="Pretendard Variable"/>
               </a:rPr>
@@ -20418,7 +20420,7 @@
             <a:r>
               <a:rPr sz="825" b="1">
                 <a:solidFill>
-                  <a:srgbClr val="000000"/>
+                  <a:srgbClr val="FFFFFF"/>
                 </a:solidFill>
                 <a:latin typeface="Pretendard Variable"/>
               </a:rPr>
@@ -20457,7 +20459,7 @@
             <a:r>
               <a:rPr sz="1500" b="1">
                 <a:solidFill>
-                  <a:srgbClr val="000000"/>
+                  <a:srgbClr val="1E3A8A"/>
                 </a:solidFill>
                 <a:latin typeface="Pretendard Variable"/>
               </a:rPr>
@@ -20496,7 +20498,7 @@
             <a:r>
               <a:rPr sz="1050">
                 <a:solidFill>
-                  <a:srgbClr val="000000"/>
+                  <a:srgbClr val="1E3A8A"/>
                 </a:solidFill>
                 <a:latin typeface="Pretendard Variable"/>
               </a:rPr>
@@ -20535,7 +20537,7 @@
             <a:r>
               <a:rPr sz="825" b="1">
                 <a:solidFill>
-                  <a:srgbClr val="000000"/>
+                  <a:srgbClr val="FFFFFF"/>
                 </a:solidFill>
                 <a:latin typeface="Pretendard Variable"/>
               </a:rPr>
@@ -20574,7 +20576,7 @@
             <a:r>
               <a:rPr sz="1500" b="1">
                 <a:solidFill>
-                  <a:srgbClr val="000000"/>
+                  <a:srgbClr val="1E3A8A"/>
                 </a:solidFill>
                 <a:latin typeface="Pretendard Variable"/>
               </a:rPr>
@@ -20613,7 +20615,7 @@
             <a:r>
               <a:rPr sz="1050">
                 <a:solidFill>
-                  <a:srgbClr val="000000"/>
+                  <a:srgbClr val="1E3A8A"/>
                 </a:solidFill>
                 <a:latin typeface="Pretendard Variable"/>
               </a:rPr>
@@ -20652,7 +20654,7 @@
             <a:r>
               <a:rPr sz="825" b="1">
                 <a:solidFill>
-                  <a:srgbClr val="000000"/>
+                  <a:srgbClr val="FFFFFF"/>
                 </a:solidFill>
                 <a:latin typeface="Pretendard Variable"/>
               </a:rPr>
@@ -20691,7 +20693,7 @@
             <a:r>
               <a:rPr sz="1500" b="1">
                 <a:solidFill>
-                  <a:srgbClr val="000000"/>
+                  <a:srgbClr val="FFFFFF"/>
                 </a:solidFill>
                 <a:latin typeface="Pretendard Variable"/>
               </a:rPr>
@@ -20730,7 +20732,7 @@
             <a:r>
               <a:rPr sz="1050">
                 <a:solidFill>
-                  <a:srgbClr val="000000"/>
+                  <a:srgbClr val="1E3A8A"/>
                 </a:solidFill>
                 <a:latin typeface="Pretendard Variable"/>
               </a:rPr>
@@ -20769,7 +20771,7 @@
             <a:r>
               <a:rPr sz="1425">
                 <a:solidFill>
-                  <a:srgbClr val="000000"/>
+                  <a:srgbClr val="1E3A8A"/>
                 </a:solidFill>
                 <a:latin typeface="Pretendard Variable"/>
               </a:rPr>
@@ -20850,7 +20852,7 @@
             <a:r>
               <a:rPr sz="1800" b="1">
                 <a:solidFill>
-                  <a:srgbClr val="000000"/>
+                  <a:srgbClr val="1E3A8A"/>
                 </a:solidFill>
                 <a:latin typeface="Pretendard Variable"/>
               </a:rPr>
@@ -20889,7 +20891,7 @@
             <a:r>
               <a:rPr sz="3900" b="1">
                 <a:solidFill>
-                  <a:srgbClr val="000000"/>
+                  <a:srgbClr val="1D1D1F"/>
                 </a:solidFill>
                 <a:latin typeface="Pretendard Variable"/>
               </a:rPr>
@@ -20928,7 +20930,7 @@
             <a:r>
               <a:rPr sz="1050" b="1">
                 <a:solidFill>
-                  <a:srgbClr val="000000"/>
+                  <a:srgbClr val="FFFFFF"/>
                 </a:solidFill>
                 <a:latin typeface="Pretendard Variable"/>
               </a:rPr>
@@ -20967,7 +20969,7 @@
             <a:r>
               <a:rPr sz="1350" b="1">
                 <a:solidFill>
-                  <a:srgbClr val="000000"/>
+                  <a:srgbClr val="1E3A8A"/>
                 </a:solidFill>
                 <a:latin typeface="Pretendard Variable"/>
               </a:rPr>
@@ -21006,7 +21008,7 @@
             <a:r>
               <a:rPr sz="1050" b="1">
                 <a:solidFill>
-                  <a:srgbClr val="000000"/>
+                  <a:srgbClr val="1E3A8A"/>
                 </a:solidFill>
                 <a:latin typeface="Pretendard Variable"/>
               </a:rPr>
@@ -21045,7 +21047,7 @@
             <a:r>
               <a:rPr sz="1050" b="1">
                 <a:solidFill>
-                  <a:srgbClr val="000000"/>
+                  <a:srgbClr val="FFFFFF"/>
                 </a:solidFill>
                 <a:latin typeface="Pretendard Variable"/>
               </a:rPr>
@@ -21084,7 +21086,7 @@
             <a:r>
               <a:rPr sz="1350" b="1">
                 <a:solidFill>
-                  <a:srgbClr val="000000"/>
+                  <a:srgbClr val="1E3A8A"/>
                 </a:solidFill>
                 <a:latin typeface="Pretendard Variable"/>
               </a:rPr>
@@ -21123,7 +21125,7 @@
             <a:r>
               <a:rPr sz="1050" b="1">
                 <a:solidFill>
-                  <a:srgbClr val="000000"/>
+                  <a:srgbClr val="1E3A8A"/>
                 </a:solidFill>
                 <a:latin typeface="Pretendard Variable"/>
               </a:rPr>
@@ -21162,7 +21164,7 @@
             <a:r>
               <a:rPr sz="1050" b="1">
                 <a:solidFill>
-                  <a:srgbClr val="000000"/>
+                  <a:srgbClr val="FFFFFF"/>
                 </a:solidFill>
                 <a:latin typeface="Pretendard Variable"/>
               </a:rPr>
@@ -21201,7 +21203,7 @@
             <a:r>
               <a:rPr sz="1350" b="1">
                 <a:solidFill>
-                  <a:srgbClr val="000000"/>
+                  <a:srgbClr val="FFFFFF"/>
                 </a:solidFill>
                 <a:latin typeface="Pretendard Variable"/>
               </a:rPr>
@@ -21240,7 +21242,7 @@
             <a:r>
               <a:rPr sz="1050" b="1">
                 <a:solidFill>
-                  <a:srgbClr val="000000"/>
+                  <a:srgbClr val="1E3A8A"/>
                 </a:solidFill>
                 <a:latin typeface="Pretendard Variable"/>
               </a:rPr>
@@ -21279,7 +21281,7 @@
             <a:r>
               <a:rPr sz="1050" b="1">
                 <a:solidFill>
-                  <a:srgbClr val="000000"/>
+                  <a:srgbClr val="FFFFFF"/>
                 </a:solidFill>
                 <a:latin typeface="Pretendard Variable"/>
               </a:rPr>
@@ -21318,7 +21320,7 @@
             <a:r>
               <a:rPr sz="1350" b="1">
                 <a:solidFill>
-                  <a:srgbClr val="000000"/>
+                  <a:srgbClr val="FFFFFF"/>
                 </a:solidFill>
                 <a:latin typeface="Pretendard Variable"/>
               </a:rPr>
@@ -21357,7 +21359,7 @@
             <a:r>
               <a:rPr sz="1050" b="1">
                 <a:solidFill>
-                  <a:srgbClr val="000000"/>
+                  <a:srgbClr val="1E3A8A"/>
                 </a:solidFill>
                 <a:latin typeface="Pretendard Variable"/>
               </a:rPr>
@@ -21396,7 +21398,7 @@
             <a:r>
               <a:rPr sz="1425">
                 <a:solidFill>
-                  <a:srgbClr val="000000"/>
+                  <a:srgbClr val="1E3A8A"/>
                 </a:solidFill>
                 <a:latin typeface="Pretendard Variable"/>
               </a:rPr>
@@ -21477,7 +21479,7 @@
             <a:r>
               <a:rPr sz="1950">
                 <a:solidFill>
-                  <a:srgbClr val="000000"/>
+                  <a:srgbClr val="FFFFFF"/>
                 </a:solidFill>
                 <a:latin typeface="Pretendard Variable"/>
               </a:rPr>
@@ -21516,7 +21518,7 @@
             <a:r>
               <a:rPr sz="4950" b="1">
                 <a:solidFill>
-                  <a:srgbClr val="000000"/>
+                  <a:srgbClr val="FFFFFF"/>
                 </a:solidFill>
                 <a:latin typeface="Pretendard Variable"/>
               </a:rPr>
@@ -21597,7 +21599,7 @@
             <a:r>
               <a:rPr sz="1950" b="1">
                 <a:solidFill>
-                  <a:srgbClr val="000000"/>
+                  <a:srgbClr val="0F172A"/>
                 </a:solidFill>
                 <a:latin typeface="Pretendard Variable"/>
               </a:rPr>
@@ -21636,7 +21638,7 @@
             <a:r>
               <a:rPr sz="4950" b="1">
                 <a:solidFill>
-                  <a:srgbClr val="000000"/>
+                  <a:srgbClr val="0F172A"/>
                 </a:solidFill>
                 <a:latin typeface="Pretendard Variable"/>
               </a:rPr>
@@ -21717,7 +21719,7 @@
             <a:r>
               <a:rPr sz="1800" b="1">
                 <a:solidFill>
-                  <a:srgbClr val="000000"/>
+                  <a:srgbClr val="1E3A8A"/>
                 </a:solidFill>
                 <a:latin typeface="Pretendard Variable"/>
               </a:rPr>
@@ -21756,7 +21758,7 @@
             <a:r>
               <a:rPr sz="3900" b="1">
                 <a:solidFill>
-                  <a:srgbClr val="000000"/>
+                  <a:srgbClr val="1D1D1F"/>
                 </a:solidFill>
                 <a:latin typeface="Pretendard Variable"/>
               </a:rPr>
@@ -21795,7 +21797,7 @@
             <a:r>
               <a:rPr sz="1425">
                 <a:solidFill>
-                  <a:srgbClr val="000000"/>
+                  <a:srgbClr val="1E3A8A"/>
                 </a:solidFill>
                 <a:latin typeface="Pretendard Variable"/>
               </a:rPr>
@@ -21876,7 +21878,7 @@
             <a:r>
               <a:rPr sz="1950" b="1">
                 <a:solidFill>
-                  <a:srgbClr val="000000"/>
+                  <a:srgbClr val="0F172A"/>
                 </a:solidFill>
                 <a:latin typeface="Pretendard Variable"/>
               </a:rPr>
@@ -21915,7 +21917,7 @@
             <a:r>
               <a:rPr sz="4950" b="1">
                 <a:solidFill>
-                  <a:srgbClr val="000000"/>
+                  <a:srgbClr val="0F172A"/>
                 </a:solidFill>
                 <a:latin typeface="Pretendard Variable"/>
               </a:rPr>
@@ -21996,7 +21998,7 @@
             <a:r>
               <a:rPr sz="1800" b="1">
                 <a:solidFill>
-                  <a:srgbClr val="000000"/>
+                  <a:srgbClr val="1E3A8A"/>
                 </a:solidFill>
                 <a:latin typeface="Pretendard Variable"/>
               </a:rPr>
@@ -22035,7 +22037,7 @@
             <a:r>
               <a:rPr sz="3900" b="1">
                 <a:solidFill>
-                  <a:srgbClr val="000000"/>
+                  <a:srgbClr val="1D1D1F"/>
                 </a:solidFill>
                 <a:latin typeface="Pretendard Variable"/>
               </a:rPr>
@@ -22074,7 +22076,7 @@
             <a:r>
               <a:rPr sz="975" b="1">
                 <a:solidFill>
-                  <a:srgbClr val="000000"/>
+                  <a:srgbClr val="FFFFFF"/>
                 </a:solidFill>
                 <a:latin typeface="Pretendard Variable"/>
               </a:rPr>
@@ -22113,7 +22115,7 @@
             <a:r>
               <a:rPr sz="1275" b="1">
                 <a:solidFill>
-                  <a:srgbClr val="000000"/>
+                  <a:srgbClr val="0F172A"/>
                 </a:solidFill>
                 <a:latin typeface="Pretendard Variable"/>
               </a:rPr>
@@ -22152,7 +22154,7 @@
             <a:r>
               <a:rPr sz="1012" b="1">
                 <a:solidFill>
-                  <a:srgbClr val="000000"/>
+                  <a:srgbClr val="1E3A8A"/>
                 </a:solidFill>
                 <a:latin typeface="Pretendard Variable"/>
               </a:rPr>
@@ -22191,7 +22193,7 @@
             <a:r>
               <a:rPr sz="975" b="1">
                 <a:solidFill>
-                  <a:srgbClr val="000000"/>
+                  <a:srgbClr val="FFFFFF"/>
                 </a:solidFill>
                 <a:latin typeface="Pretendard Variable"/>
               </a:rPr>
@@ -22230,7 +22232,7 @@
             <a:r>
               <a:rPr sz="1275" b="1">
                 <a:solidFill>
-                  <a:srgbClr val="000000"/>
+                  <a:srgbClr val="0F172A"/>
                 </a:solidFill>
                 <a:latin typeface="Pretendard Variable"/>
               </a:rPr>
@@ -22269,7 +22271,7 @@
             <a:r>
               <a:rPr sz="1012" b="1">
                 <a:solidFill>
-                  <a:srgbClr val="000000"/>
+                  <a:srgbClr val="1E3A8A"/>
                 </a:solidFill>
                 <a:latin typeface="Pretendard Variable"/>
               </a:rPr>
@@ -22308,7 +22310,7 @@
             <a:r>
               <a:rPr sz="975" b="1">
                 <a:solidFill>
-                  <a:srgbClr val="000000"/>
+                  <a:srgbClr val="FFFFFF"/>
                 </a:solidFill>
                 <a:latin typeface="Pretendard Variable"/>
               </a:rPr>
@@ -22347,7 +22349,7 @@
             <a:r>
               <a:rPr sz="1275" b="1">
                 <a:solidFill>
-                  <a:srgbClr val="000000"/>
+                  <a:srgbClr val="93C5FD"/>
                 </a:solidFill>
                 <a:latin typeface="Pretendard Variable"/>
               </a:rPr>
@@ -22386,7 +22388,7 @@
             <a:r>
               <a:rPr sz="1012" b="1">
                 <a:solidFill>
-                  <a:srgbClr val="000000"/>
+                  <a:srgbClr val="1E3A8A"/>
                 </a:solidFill>
                 <a:latin typeface="Pretendard Variable"/>
               </a:rPr>
@@ -22425,7 +22427,7 @@
             <a:r>
               <a:rPr sz="975" b="1">
                 <a:solidFill>
-                  <a:srgbClr val="000000"/>
+                  <a:srgbClr val="FFFFFF"/>
                 </a:solidFill>
                 <a:latin typeface="Pretendard Variable"/>
               </a:rPr>
@@ -22464,7 +22466,7 @@
             <a:r>
               <a:rPr sz="1275" b="1">
                 <a:solidFill>
-                  <a:srgbClr val="000000"/>
+                  <a:srgbClr val="1E3A8A"/>
                 </a:solidFill>
                 <a:latin typeface="Pretendard Variable"/>
               </a:rPr>
@@ -22503,7 +22505,7 @@
             <a:r>
               <a:rPr sz="1012" b="1">
                 <a:solidFill>
-                  <a:srgbClr val="000000"/>
+                  <a:srgbClr val="1E3A8A"/>
                 </a:solidFill>
                 <a:latin typeface="Pretendard Variable"/>
               </a:rPr>
@@ -22542,7 +22544,7 @@
             <a:r>
               <a:rPr sz="1425">
                 <a:solidFill>
-                  <a:srgbClr val="000000"/>
+                  <a:srgbClr val="1E3A8A"/>
                 </a:solidFill>
                 <a:latin typeface="Pretendard Variable"/>
               </a:rPr>
@@ -22623,7 +22625,7 @@
             <a:r>
               <a:rPr sz="1800" b="1">
                 <a:solidFill>
-                  <a:srgbClr val="000000"/>
+                  <a:srgbClr val="1E3A8A"/>
                 </a:solidFill>
                 <a:latin typeface="Pretendard Variable"/>
               </a:rPr>
@@ -22662,7 +22664,7 @@
             <a:r>
               <a:rPr sz="3900" b="1">
                 <a:solidFill>
-                  <a:srgbClr val="000000"/>
+                  <a:srgbClr val="1D1D1F"/>
                 </a:solidFill>
                 <a:latin typeface="Pretendard Variable"/>
               </a:rPr>
@@ -22701,7 +22703,7 @@
             <a:r>
               <a:rPr sz="975" b="1">
                 <a:solidFill>
-                  <a:srgbClr val="000000"/>
+                  <a:srgbClr val="FFFFFF"/>
                 </a:solidFill>
                 <a:latin typeface="Pretendard Variable"/>
               </a:rPr>
@@ -22740,7 +22742,7 @@
             <a:r>
               <a:rPr sz="1800" b="1">
                 <a:solidFill>
-                  <a:srgbClr val="000000"/>
+                  <a:srgbClr val="1E3A8A"/>
                 </a:solidFill>
                 <a:latin typeface="Pretendard Variable"/>
               </a:rPr>
@@ -22779,7 +22781,7 @@
             <a:r>
               <a:rPr sz="1125" b="1">
                 <a:solidFill>
-                  <a:srgbClr val="000000"/>
+                  <a:srgbClr val="1E3A8A"/>
                 </a:solidFill>
                 <a:latin typeface="Pretendard Variable"/>
               </a:rPr>
@@ -22818,7 +22820,7 @@
             <a:r>
               <a:rPr sz="1500" b="1">
                 <a:solidFill>
-                  <a:srgbClr val="000000"/>
+                  <a:srgbClr val="1E3A8A"/>
                 </a:solidFill>
                 <a:latin typeface="Pretendard Variable"/>
               </a:rPr>
@@ -22857,7 +22859,7 @@
             <a:r>
               <a:rPr sz="1125" b="1">
                 <a:solidFill>
-                  <a:srgbClr val="000000"/>
+                  <a:srgbClr val="1E3A8A"/>
                 </a:solidFill>
                 <a:latin typeface="Pretendard Variable"/>
               </a:rPr>
@@ -22896,7 +22898,7 @@
             <a:r>
               <a:rPr sz="1200" b="1">
                 <a:solidFill>
-                  <a:srgbClr val="000000"/>
+                  <a:srgbClr val="1E3A8A"/>
                 </a:solidFill>
                 <a:latin typeface="Pretendard Variable"/>
               </a:rPr>
@@ -22935,7 +22937,7 @@
             <a:r>
               <a:rPr sz="1050" b="1">
                 <a:solidFill>
-                  <a:srgbClr val="000000"/>
+                  <a:srgbClr val="93C5FD"/>
                 </a:solidFill>
                 <a:latin typeface="Pretendard Variable"/>
               </a:rPr>
@@ -22974,7 +22976,7 @@
             <a:r>
               <a:rPr sz="975">
                 <a:solidFill>
-                  <a:srgbClr val="000000"/>
+                  <a:srgbClr val="1E3A8A"/>
                 </a:solidFill>
                 <a:latin typeface="Pretendard Variable"/>
               </a:rPr>
@@ -23013,7 +23015,7 @@
             <a:r>
               <a:rPr sz="975" b="1">
                 <a:solidFill>
-                  <a:srgbClr val="000000"/>
+                  <a:srgbClr val="FFFFFF"/>
                 </a:solidFill>
                 <a:latin typeface="Pretendard Variable"/>
               </a:rPr>
@@ -23052,7 +23054,7 @@
             <a:r>
               <a:rPr sz="1800" b="1">
                 <a:solidFill>
-                  <a:srgbClr val="000000"/>
+                  <a:srgbClr val="FFFFFF"/>
                 </a:solidFill>
                 <a:latin typeface="Pretendard Variable"/>
               </a:rPr>
@@ -23091,7 +23093,7 @@
             <a:r>
               <a:rPr sz="1012" b="1">
                 <a:solidFill>
-                  <a:srgbClr val="000000"/>
+                  <a:srgbClr val="1E3A8A"/>
                 </a:solidFill>
                 <a:latin typeface="Pretendard Variable"/>
               </a:rPr>
@@ -23130,7 +23132,7 @@
             <a:r>
               <a:rPr sz="1425">
                 <a:solidFill>
-                  <a:srgbClr val="000000"/>
+                  <a:srgbClr val="1E3A8A"/>
                 </a:solidFill>
                 <a:latin typeface="Pretendard Variable"/>
               </a:rPr>
@@ -23211,7 +23213,7 @@
             <a:r>
               <a:rPr sz="1950" b="1">
                 <a:solidFill>
-                  <a:srgbClr val="000000"/>
+                  <a:srgbClr val="0F172A"/>
                 </a:solidFill>
                 <a:latin typeface="Pretendard Variable"/>
               </a:rPr>
@@ -23250,7 +23252,7 @@
             <a:r>
               <a:rPr sz="4950" b="1">
                 <a:solidFill>
-                  <a:srgbClr val="000000"/>
+                  <a:srgbClr val="0F172A"/>
                 </a:solidFill>
                 <a:latin typeface="Pretendard Variable"/>
               </a:rPr>
@@ -23331,7 +23333,7 @@
             <a:r>
               <a:rPr sz="1800" b="1">
                 <a:solidFill>
-                  <a:srgbClr val="000000"/>
+                  <a:srgbClr val="1E3A8A"/>
                 </a:solidFill>
                 <a:latin typeface="Pretendard Variable"/>
               </a:rPr>
@@ -23370,7 +23372,7 @@
             <a:r>
               <a:rPr sz="3900" b="1">
                 <a:solidFill>
-                  <a:srgbClr val="000000"/>
+                  <a:srgbClr val="1D1D1F"/>
                 </a:solidFill>
                 <a:latin typeface="Pretendard Variable"/>
               </a:rPr>
@@ -23409,7 +23411,7 @@
             <a:r>
               <a:rPr sz="1050" b="1">
                 <a:solidFill>
-                  <a:srgbClr val="000000"/>
+                  <a:srgbClr val="FFFFFF"/>
                 </a:solidFill>
                 <a:latin typeface="Pretendard Variable"/>
               </a:rPr>
@@ -23448,7 +23450,7 @@
             <a:r>
               <a:rPr sz="1350" b="1">
                 <a:solidFill>
-                  <a:srgbClr val="000000"/>
+                  <a:srgbClr val="1E3A8A"/>
                 </a:solidFill>
                 <a:latin typeface="Pretendard Variable"/>
               </a:rPr>
@@ -23487,7 +23489,7 @@
             <a:r>
               <a:rPr sz="1050" b="1">
                 <a:solidFill>
-                  <a:srgbClr val="000000"/>
+                  <a:srgbClr val="1E3A8A"/>
                 </a:solidFill>
                 <a:latin typeface="Pretendard Variable"/>
               </a:rPr>
@@ -23526,7 +23528,7 @@
             <a:r>
               <a:rPr sz="1050" b="1">
                 <a:solidFill>
-                  <a:srgbClr val="000000"/>
+                  <a:srgbClr val="FFFFFF"/>
                 </a:solidFill>
                 <a:latin typeface="Pretendard Variable"/>
               </a:rPr>
@@ -23565,7 +23567,7 @@
             <a:r>
               <a:rPr sz="1350" b="1">
                 <a:solidFill>
-                  <a:srgbClr val="000000"/>
+                  <a:srgbClr val="1E3A8A"/>
                 </a:solidFill>
                 <a:latin typeface="Pretendard Variable"/>
               </a:rPr>
@@ -23604,7 +23606,7 @@
             <a:r>
               <a:rPr sz="1050" b="1">
                 <a:solidFill>
-                  <a:srgbClr val="000000"/>
+                  <a:srgbClr val="1E3A8A"/>
                 </a:solidFill>
                 <a:latin typeface="Pretendard Variable"/>
               </a:rPr>
@@ -23643,7 +23645,7 @@
             <a:r>
               <a:rPr sz="1050" b="1">
                 <a:solidFill>
-                  <a:srgbClr val="000000"/>
+                  <a:srgbClr val="FFFFFF"/>
                 </a:solidFill>
                 <a:latin typeface="Pretendard Variable"/>
               </a:rPr>
@@ -23682,7 +23684,7 @@
             <a:r>
               <a:rPr sz="1350" b="1">
                 <a:solidFill>
-                  <a:srgbClr val="000000"/>
+                  <a:srgbClr val="FFFFFF"/>
                 </a:solidFill>
                 <a:latin typeface="Pretendard Variable"/>
               </a:rPr>
@@ -23721,7 +23723,7 @@
             <a:r>
               <a:rPr sz="1050" b="1">
                 <a:solidFill>
-                  <a:srgbClr val="000000"/>
+                  <a:srgbClr val="1E3A8A"/>
                 </a:solidFill>
                 <a:latin typeface="Pretendard Variable"/>
               </a:rPr>
@@ -23760,7 +23762,7 @@
             <a:r>
               <a:rPr sz="1425">
                 <a:solidFill>
-                  <a:srgbClr val="000000"/>
+                  <a:srgbClr val="1E3A8A"/>
                 </a:solidFill>
                 <a:latin typeface="Pretendard Variable"/>
               </a:rPr>
@@ -23841,7 +23843,7 @@
             <a:r>
               <a:rPr sz="1800" b="1">
                 <a:solidFill>
-                  <a:srgbClr val="000000"/>
+                  <a:srgbClr val="1E3A8A"/>
                 </a:solidFill>
                 <a:latin typeface="Pretendard Variable"/>
               </a:rPr>
@@ -23880,7 +23882,7 @@
             <a:r>
               <a:rPr sz="3900" b="1">
                 <a:solidFill>
-                  <a:srgbClr val="000000"/>
+                  <a:srgbClr val="1D1D1F"/>
                 </a:solidFill>
                 <a:latin typeface="Pretendard Variable"/>
               </a:rPr>
@@ -23919,7 +23921,7 @@
             <a:r>
               <a:rPr sz="1425">
                 <a:solidFill>
-                  <a:srgbClr val="000000"/>
+                  <a:srgbClr val="1E3A8A"/>
                 </a:solidFill>
                 <a:latin typeface="Pretendard Variable"/>
               </a:rPr>
@@ -24000,7 +24002,7 @@
             <a:r>
               <a:rPr sz="1800" b="1">
                 <a:solidFill>
-                  <a:srgbClr val="000000"/>
+                  <a:srgbClr val="1E3A8A"/>
                 </a:solidFill>
                 <a:latin typeface="Pretendard Variable"/>
               </a:rPr>
@@ -24039,7 +24041,7 @@
             <a:r>
               <a:rPr sz="3900" b="1">
                 <a:solidFill>
-                  <a:srgbClr val="000000"/>
+                  <a:srgbClr val="1D1D1F"/>
                 </a:solidFill>
                 <a:latin typeface="Pretendard Variable"/>
               </a:rPr>
@@ -24078,7 +24080,7 @@
             <a:r>
               <a:rPr sz="975" b="1">
                 <a:solidFill>
-                  <a:srgbClr val="000000"/>
+                  <a:srgbClr val="FFFFFF"/>
                 </a:solidFill>
                 <a:latin typeface="Pretendard Variable"/>
               </a:rPr>
@@ -24117,7 +24119,7 @@
             <a:r>
               <a:rPr sz="1800" b="1">
                 <a:solidFill>
-                  <a:srgbClr val="000000"/>
+                  <a:srgbClr val="1E3A8A"/>
                 </a:solidFill>
                 <a:latin typeface="Pretendard Variable"/>
               </a:rPr>
@@ -24156,7 +24158,7 @@
             <a:r>
               <a:rPr sz="1125" b="1">
                 <a:solidFill>
-                  <a:srgbClr val="000000"/>
+                  <a:srgbClr val="1E3A8A"/>
                 </a:solidFill>
                 <a:latin typeface="Pretendard Variable"/>
               </a:rPr>
@@ -24195,7 +24197,7 @@
             <a:r>
               <a:rPr sz="1200" b="1">
                 <a:solidFill>
-                  <a:srgbClr val="000000"/>
+                  <a:srgbClr val="1E3A8A"/>
                 </a:solidFill>
                 <a:latin typeface="Pretendard Variable"/>
               </a:rPr>
@@ -24234,7 +24236,7 @@
             <a:r>
               <a:rPr sz="975">
                 <a:solidFill>
-                  <a:srgbClr val="000000"/>
+                  <a:srgbClr val="1E3A8A"/>
                 </a:solidFill>
                 <a:latin typeface="Pretendard Variable"/>
               </a:rPr>
@@ -24273,7 +24275,7 @@
             <a:r>
               <a:rPr sz="1200" b="1">
                 <a:solidFill>
-                  <a:srgbClr val="000000"/>
+                  <a:srgbClr val="1E3A8A"/>
                 </a:solidFill>
                 <a:latin typeface="Pretendard Variable"/>
               </a:rPr>
@@ -24312,7 +24314,7 @@
             <a:r>
               <a:rPr sz="975">
                 <a:solidFill>
-                  <a:srgbClr val="000000"/>
+                  <a:srgbClr val="1E3A8A"/>
                 </a:solidFill>
                 <a:latin typeface="Pretendard Variable"/>
               </a:rPr>
@@ -24351,7 +24353,7 @@
             <a:r>
               <a:rPr sz="1200" b="1">
                 <a:solidFill>
-                  <a:srgbClr val="000000"/>
+                  <a:srgbClr val="FFFFFF"/>
                 </a:solidFill>
                 <a:latin typeface="Pretendard Variable"/>
               </a:rPr>
@@ -24390,7 +24392,7 @@
             <a:r>
               <a:rPr sz="975" b="1">
                 <a:solidFill>
-                  <a:srgbClr val="000000"/>
+                  <a:srgbClr val="FFFFFF"/>
                 </a:solidFill>
                 <a:latin typeface="Pretendard Variable"/>
               </a:rPr>
@@ -24429,7 +24431,7 @@
             <a:r>
               <a:rPr sz="1800" b="1">
                 <a:solidFill>
-                  <a:srgbClr val="000000"/>
+                  <a:srgbClr val="FFFFFF"/>
                 </a:solidFill>
                 <a:latin typeface="Pretendard Variable"/>
               </a:rPr>
@@ -24468,7 +24470,7 @@
             <a:r>
               <a:rPr sz="1125" b="1">
                 <a:solidFill>
-                  <a:srgbClr val="000000"/>
+                  <a:srgbClr val="93C5FD"/>
                 </a:solidFill>
                 <a:latin typeface="Pretendard Variable"/>
               </a:rPr>
@@ -24507,7 +24509,7 @@
             <a:r>
               <a:rPr sz="1200" b="1">
                 <a:solidFill>
-                  <a:srgbClr val="000000"/>
+                  <a:srgbClr val="93C5FD"/>
                 </a:solidFill>
                 <a:latin typeface="Pretendard Variable"/>
               </a:rPr>
@@ -24546,7 +24548,7 @@
             <a:r>
               <a:rPr sz="975">
                 <a:solidFill>
-                  <a:srgbClr val="000000"/>
+                  <a:srgbClr val="1E3A8A"/>
                 </a:solidFill>
                 <a:latin typeface="Pretendard Variable"/>
               </a:rPr>
@@ -24585,7 +24587,7 @@
             <a:r>
               <a:rPr sz="1200" b="1">
                 <a:solidFill>
-                  <a:srgbClr val="000000"/>
+                  <a:srgbClr val="93C5FD"/>
                 </a:solidFill>
                 <a:latin typeface="Pretendard Variable"/>
               </a:rPr>
@@ -24624,7 +24626,7 @@
             <a:r>
               <a:rPr sz="975">
                 <a:solidFill>
-                  <a:srgbClr val="000000"/>
+                  <a:srgbClr val="1E3A8A"/>
                 </a:solidFill>
                 <a:latin typeface="Pretendard Variable"/>
               </a:rPr>
@@ -24663,7 +24665,7 @@
             <a:r>
               <a:rPr sz="1200" b="1">
                 <a:solidFill>
-                  <a:srgbClr val="000000"/>
+                  <a:srgbClr val="93C5FD"/>
                 </a:solidFill>
                 <a:latin typeface="Pretendard Variable"/>
               </a:rPr>
@@ -24702,7 +24704,7 @@
             <a:r>
               <a:rPr sz="975">
                 <a:solidFill>
-                  <a:srgbClr val="000000"/>
+                  <a:srgbClr val="1E3A8A"/>
                 </a:solidFill>
                 <a:latin typeface="Pretendard Variable"/>
               </a:rPr>
@@ -24741,7 +24743,7 @@
             <a:r>
               <a:rPr sz="1425">
                 <a:solidFill>
-                  <a:srgbClr val="000000"/>
+                  <a:srgbClr val="1E3A8A"/>
                 </a:solidFill>
                 <a:latin typeface="Pretendard Variable"/>
               </a:rPr>
@@ -24822,7 +24824,7 @@
             <a:r>
               <a:rPr sz="1950" b="1">
                 <a:solidFill>
-                  <a:srgbClr val="000000"/>
+                  <a:srgbClr val="0F172A"/>
                 </a:solidFill>
                 <a:latin typeface="Pretendard Variable"/>
               </a:rPr>
@@ -24861,7 +24863,7 @@
             <a:r>
               <a:rPr sz="4950" b="1">
                 <a:solidFill>
-                  <a:srgbClr val="000000"/>
+                  <a:srgbClr val="0F172A"/>
                 </a:solidFill>
                 <a:latin typeface="Pretendard Variable"/>
               </a:rPr>
@@ -24942,7 +24944,7 @@
             <a:r>
               <a:rPr sz="1800" b="1">
                 <a:solidFill>
-                  <a:srgbClr val="000000"/>
+                  <a:srgbClr val="1E3A8A"/>
                 </a:solidFill>
                 <a:latin typeface="Pretendard Variable"/>
               </a:rPr>
@@ -24981,7 +24983,7 @@
             <a:r>
               <a:rPr sz="3900" b="1">
                 <a:solidFill>
-                  <a:srgbClr val="000000"/>
+                  <a:srgbClr val="1D1D1F"/>
                 </a:solidFill>
                 <a:latin typeface="Pretendard Variable"/>
               </a:rPr>
@@ -25020,7 +25022,7 @@
             <a:r>
               <a:rPr sz="975" b="1">
                 <a:solidFill>
-                  <a:srgbClr val="000000"/>
+                  <a:srgbClr val="FFFFFF"/>
                 </a:solidFill>
                 <a:latin typeface="Pretendard Variable"/>
               </a:rPr>
@@ -25059,7 +25061,7 @@
             <a:r>
               <a:rPr sz="1500" b="1">
                 <a:solidFill>
-                  <a:srgbClr val="000000"/>
+                  <a:srgbClr val="1E3A8A"/>
                 </a:solidFill>
                 <a:latin typeface="Pretendard Variable"/>
               </a:rPr>
@@ -25098,7 +25100,7 @@
             <a:r>
               <a:rPr sz="975" b="1">
                 <a:solidFill>
-                  <a:srgbClr val="000000"/>
+                  <a:srgbClr val="FFFFFF"/>
                 </a:solidFill>
                 <a:latin typeface="Pretendard Variable"/>
               </a:rPr>
@@ -25137,7 +25139,7 @@
             <a:r>
               <a:rPr sz="1800" b="1">
                 <a:solidFill>
-                  <a:srgbClr val="000000"/>
+                  <a:srgbClr val="FFFFFF"/>
                 </a:solidFill>
                 <a:latin typeface="Pretendard Variable"/>
               </a:rPr>
@@ -25176,7 +25178,7 @@
             <a:r>
               <a:rPr sz="1200" b="1">
                 <a:solidFill>
-                  <a:srgbClr val="000000"/>
+                  <a:srgbClr val="93C5FD"/>
                 </a:solidFill>
                 <a:latin typeface="Pretendard Variable"/>
               </a:rPr>
@@ -25215,7 +25217,7 @@
             <a:r>
               <a:rPr sz="975">
                 <a:solidFill>
-                  <a:srgbClr val="000000"/>
+                  <a:srgbClr val="1E3A8A"/>
                 </a:solidFill>
                 <a:latin typeface="Pretendard Variable"/>
               </a:rPr>
@@ -25254,7 +25256,7 @@
             <a:r>
               <a:rPr sz="1200" b="1">
                 <a:solidFill>
-                  <a:srgbClr val="000000"/>
+                  <a:srgbClr val="93C5FD"/>
                 </a:solidFill>
                 <a:latin typeface="Pretendard Variable"/>
               </a:rPr>
@@ -25293,7 +25295,7 @@
             <a:r>
               <a:rPr sz="975">
                 <a:solidFill>
-                  <a:srgbClr val="000000"/>
+                  <a:srgbClr val="1E3A8A"/>
                 </a:solidFill>
                 <a:latin typeface="Pretendard Variable"/>
               </a:rPr>
@@ -25332,7 +25334,7 @@
             <a:r>
               <a:rPr sz="1425">
                 <a:solidFill>
-                  <a:srgbClr val="000000"/>
+                  <a:srgbClr val="1E3A8A"/>
                 </a:solidFill>
                 <a:latin typeface="Pretendard Variable"/>
               </a:rPr>
@@ -25413,7 +25415,7 @@
             <a:r>
               <a:rPr sz="1800" b="1">
                 <a:solidFill>
-                  <a:srgbClr val="000000"/>
+                  <a:srgbClr val="1E3A8A"/>
                 </a:solidFill>
                 <a:latin typeface="Pretendard Variable"/>
               </a:rPr>
@@ -25452,7 +25454,7 @@
             <a:r>
               <a:rPr sz="3900" b="1">
                 <a:solidFill>
-                  <a:srgbClr val="000000"/>
+                  <a:srgbClr val="1D1D1F"/>
                 </a:solidFill>
                 <a:latin typeface="Pretendard Variable"/>
               </a:rPr>
@@ -25491,7 +25493,7 @@
             <a:r>
               <a:rPr sz="975" b="1">
                 <a:solidFill>
-                  <a:srgbClr val="000000"/>
+                  <a:srgbClr val="FFFFFF"/>
                 </a:solidFill>
                 <a:latin typeface="Pretendard Variable"/>
               </a:rPr>
@@ -25530,7 +25532,7 @@
             <a:r>
               <a:rPr sz="1800" b="1">
                 <a:solidFill>
-                  <a:srgbClr val="000000"/>
+                  <a:srgbClr val="FFFFFF"/>
                 </a:solidFill>
                 <a:latin typeface="Pretendard Variable"/>
               </a:rPr>
@@ -25569,7 +25571,7 @@
             <a:r>
               <a:rPr sz="825" b="1">
                 <a:solidFill>
-                  <a:srgbClr val="000000"/>
+                  <a:srgbClr val="1E3A8A"/>
                 </a:solidFill>
                 <a:latin typeface="Pretendard Variable"/>
               </a:rPr>
@@ -25608,7 +25610,7 @@
             <a:r>
               <a:rPr sz="1350" b="1">
                 <a:solidFill>
-                  <a:srgbClr val="000000"/>
+                  <a:srgbClr val="93C5FD"/>
                 </a:solidFill>
                 <a:latin typeface="Pretendard Variable"/>
               </a:rPr>
@@ -25647,7 +25649,7 @@
             <a:r>
               <a:rPr sz="825" b="1">
                 <a:solidFill>
-                  <a:srgbClr val="000000"/>
+                  <a:srgbClr val="1E3A8A"/>
                 </a:solidFill>
                 <a:latin typeface="Pretendard Variable"/>
               </a:rPr>
@@ -25686,7 +25688,7 @@
             <a:r>
               <a:rPr sz="1350" b="1">
                 <a:solidFill>
-                  <a:srgbClr val="000000"/>
+                  <a:srgbClr val="93C5FD"/>
                 </a:solidFill>
                 <a:latin typeface="Pretendard Variable"/>
               </a:rPr>
@@ -25725,7 +25727,7 @@
             <a:r>
               <a:rPr sz="825" b="1">
                 <a:solidFill>
-                  <a:srgbClr val="000000"/>
+                  <a:srgbClr val="1E3A8A"/>
                 </a:solidFill>
                 <a:latin typeface="Pretendard Variable"/>
               </a:rPr>
@@ -25764,7 +25766,7 @@
             <a:r>
               <a:rPr sz="1125" b="1">
                 <a:solidFill>
-                  <a:srgbClr val="000000"/>
+                  <a:srgbClr val="FFFFFF"/>
                 </a:solidFill>
                 <a:latin typeface="Pretendard Variable"/>
               </a:rPr>
@@ -25803,7 +25805,7 @@
             <a:r>
               <a:rPr sz="975" b="1">
                 <a:solidFill>
-                  <a:srgbClr val="000000"/>
+                  <a:srgbClr val="FFFFFF"/>
                 </a:solidFill>
                 <a:latin typeface="Pretendard Variable"/>
               </a:rPr>
@@ -25842,7 +25844,7 @@
             <a:r>
               <a:rPr sz="1800" b="1">
                 <a:solidFill>
-                  <a:srgbClr val="000000"/>
+                  <a:srgbClr val="1E3A8A"/>
                 </a:solidFill>
                 <a:latin typeface="Pretendard Variable"/>
               </a:rPr>
@@ -25881,7 +25883,7 @@
             <a:r>
               <a:rPr sz="1125" b="1">
                 <a:solidFill>
-                  <a:srgbClr val="000000"/>
+                  <a:srgbClr val="1E3A8A"/>
                 </a:solidFill>
                 <a:latin typeface="Pretendard Variable"/>
               </a:rPr>
@@ -25920,7 +25922,7 @@
             <a:r>
               <a:rPr sz="1500" b="1">
                 <a:solidFill>
-                  <a:srgbClr val="000000"/>
+                  <a:srgbClr val="1E3A8A"/>
                 </a:solidFill>
                 <a:latin typeface="Pretendard Variable"/>
               </a:rPr>
@@ -25959,7 +25961,7 @@
             <a:r>
               <a:rPr sz="1125" b="1">
                 <a:solidFill>
-                  <a:srgbClr val="000000"/>
+                  <a:srgbClr val="1E3A8A"/>
                 </a:solidFill>
                 <a:latin typeface="Pretendard Variable"/>
               </a:rPr>
@@ -25998,7 +26000,7 @@
             <a:r>
               <a:rPr sz="1500" b="1">
                 <a:solidFill>
-                  <a:srgbClr val="000000"/>
+                  <a:srgbClr val="EF4444"/>
                 </a:solidFill>
                 <a:latin typeface="Pretendard Variable"/>
               </a:rPr>
@@ -26037,7 +26039,7 @@
             <a:r>
               <a:rPr sz="1050" b="1">
                 <a:solidFill>
-                  <a:srgbClr val="000000"/>
+                  <a:srgbClr val="93C5FD"/>
                 </a:solidFill>
                 <a:latin typeface="Pretendard Variable"/>
               </a:rPr>
@@ -26076,7 +26078,7 @@
             <a:r>
               <a:rPr sz="975" b="1">
                 <a:solidFill>
-                  <a:srgbClr val="000000"/>
+                  <a:srgbClr val="1E3A8A"/>
                 </a:solidFill>
                 <a:latin typeface="Pretendard Variable"/>
               </a:rPr>
@@ -26115,7 +26117,7 @@
             <a:r>
               <a:rPr sz="1425">
                 <a:solidFill>
-                  <a:srgbClr val="000000"/>
+                  <a:srgbClr val="1E3A8A"/>
                 </a:solidFill>
                 <a:latin typeface="Pretendard Variable"/>
               </a:rPr>
@@ -26196,7 +26198,7 @@
             <a:r>
               <a:rPr sz="1800" b="1">
                 <a:solidFill>
-                  <a:srgbClr val="000000"/>
+                  <a:srgbClr val="1E3A8A"/>
                 </a:solidFill>
                 <a:latin typeface="Pretendard Variable"/>
               </a:rPr>
@@ -26235,7 +26237,7 @@
             <a:r>
               <a:rPr sz="3900" b="1">
                 <a:solidFill>
-                  <a:srgbClr val="000000"/>
+                  <a:srgbClr val="1D1D1F"/>
                 </a:solidFill>
                 <a:latin typeface="Pretendard Variable"/>
               </a:rPr>
@@ -26274,7 +26276,7 @@
             <a:r>
               <a:rPr sz="1125" b="1">
                 <a:solidFill>
-                  <a:srgbClr val="000000"/>
+                  <a:srgbClr val="FFFFFF"/>
                 </a:solidFill>
                 <a:latin typeface="Pretendard Variable"/>
               </a:rPr>
@@ -26313,7 +26315,7 @@
             <a:r>
               <a:rPr sz="1275" b="1">
                 <a:solidFill>
-                  <a:srgbClr val="000000"/>
+                  <a:srgbClr val="1E3A8A"/>
                 </a:solidFill>
                 <a:latin typeface="Pretendard Variable"/>
               </a:rPr>
@@ -26352,7 +26354,7 @@
             <a:r>
               <a:rPr sz="825" b="1">
                 <a:solidFill>
-                  <a:srgbClr val="000000"/>
+                  <a:srgbClr val="1E3A8A"/>
                 </a:solidFill>
                 <a:latin typeface="Pretendard Variable"/>
               </a:rPr>
@@ -26391,7 +26393,7 @@
             <a:r>
               <a:rPr sz="1012" b="1">
                 <a:solidFill>
-                  <a:srgbClr val="000000"/>
+                  <a:srgbClr val="1E3A8A"/>
                 </a:solidFill>
                 <a:latin typeface="Pretendard Variable"/>
               </a:rPr>
@@ -26430,7 +26432,7 @@
             <a:r>
               <a:rPr sz="1125" b="1">
                 <a:solidFill>
-                  <a:srgbClr val="000000"/>
+                  <a:srgbClr val="FFFFFF"/>
                 </a:solidFill>
                 <a:latin typeface="Pretendard Variable"/>
               </a:rPr>
@@ -26469,7 +26471,7 @@
             <a:r>
               <a:rPr sz="1275" b="1">
                 <a:solidFill>
-                  <a:srgbClr val="000000"/>
+                  <a:srgbClr val="1E3A8A"/>
                 </a:solidFill>
                 <a:latin typeface="Pretendard Variable"/>
               </a:rPr>
@@ -26508,7 +26510,7 @@
             <a:r>
               <a:rPr sz="825" b="1">
                 <a:solidFill>
-                  <a:srgbClr val="000000"/>
+                  <a:srgbClr val="1E3A8A"/>
                 </a:solidFill>
                 <a:latin typeface="Pretendard Variable"/>
               </a:rPr>
@@ -26547,7 +26549,7 @@
             <a:r>
               <a:rPr sz="1012" b="1">
                 <a:solidFill>
-                  <a:srgbClr val="000000"/>
+                  <a:srgbClr val="1E3A8A"/>
                 </a:solidFill>
                 <a:latin typeface="Pretendard Variable"/>
               </a:rPr>
@@ -26586,7 +26588,7 @@
             <a:r>
               <a:rPr sz="1125" b="1">
                 <a:solidFill>
-                  <a:srgbClr val="000000"/>
+                  <a:srgbClr val="FFFFFF"/>
                 </a:solidFill>
                 <a:latin typeface="Pretendard Variable"/>
               </a:rPr>
@@ -26625,7 +26627,7 @@
             <a:r>
               <a:rPr sz="1275" b="1">
                 <a:solidFill>
-                  <a:srgbClr val="000000"/>
+                  <a:srgbClr val="1E3A8A"/>
                 </a:solidFill>
                 <a:latin typeface="Pretendard Variable"/>
               </a:rPr>
@@ -26664,7 +26666,7 @@
             <a:r>
               <a:rPr sz="825" b="1">
                 <a:solidFill>
-                  <a:srgbClr val="000000"/>
+                  <a:srgbClr val="1E3A8A"/>
                 </a:solidFill>
                 <a:latin typeface="Pretendard Variable"/>
               </a:rPr>
@@ -26703,7 +26705,7 @@
             <a:r>
               <a:rPr sz="1012" b="1">
                 <a:solidFill>
-                  <a:srgbClr val="000000"/>
+                  <a:srgbClr val="1E3A8A"/>
                 </a:solidFill>
                 <a:latin typeface="Pretendard Variable"/>
               </a:rPr>
@@ -26742,7 +26744,7 @@
             <a:r>
               <a:rPr sz="1125" b="1">
                 <a:solidFill>
-                  <a:srgbClr val="000000"/>
+                  <a:srgbClr val="FFFFFF"/>
                 </a:solidFill>
                 <a:latin typeface="Pretendard Variable"/>
               </a:rPr>
@@ -26781,7 +26783,7 @@
             <a:r>
               <a:rPr sz="1275" b="1">
                 <a:solidFill>
-                  <a:srgbClr val="000000"/>
+                  <a:srgbClr val="1E3A8A"/>
                 </a:solidFill>
                 <a:latin typeface="Pretendard Variable"/>
               </a:rPr>
@@ -26820,7 +26822,7 @@
             <a:r>
               <a:rPr sz="825" b="1">
                 <a:solidFill>
-                  <a:srgbClr val="000000"/>
+                  <a:srgbClr val="1E3A8A"/>
                 </a:solidFill>
                 <a:latin typeface="Pretendard Variable"/>
               </a:rPr>
@@ -26859,7 +26861,7 @@
             <a:r>
               <a:rPr sz="1012" b="1">
                 <a:solidFill>
-                  <a:srgbClr val="000000"/>
+                  <a:srgbClr val="1E3A8A"/>
                 </a:solidFill>
                 <a:latin typeface="Pretendard Variable"/>
               </a:rPr>
@@ -26898,7 +26900,7 @@
             <a:r>
               <a:rPr sz="1425">
                 <a:solidFill>
-                  <a:srgbClr val="000000"/>
+                  <a:srgbClr val="1E3A8A"/>
                 </a:solidFill>
                 <a:latin typeface="Pretendard Variable"/>
               </a:rPr>
@@ -26979,7 +26981,7 @@
             <a:r>
               <a:rPr sz="1800" b="1">
                 <a:solidFill>
-                  <a:srgbClr val="000000"/>
+                  <a:srgbClr val="E11D48"/>
                 </a:solidFill>
                 <a:latin typeface="Pretendard Variable"/>
               </a:rPr>
@@ -27018,7 +27020,7 @@
             <a:r>
               <a:rPr sz="3900" b="1">
                 <a:solidFill>
-                  <a:srgbClr val="000000"/>
+                  <a:srgbClr val="1D1D1F"/>
                 </a:solidFill>
                 <a:latin typeface="Pretendard Variable"/>
               </a:rPr>
@@ -27057,7 +27059,7 @@
             <a:r>
               <a:rPr sz="975" b="1">
                 <a:solidFill>
-                  <a:srgbClr val="000000"/>
+                  <a:srgbClr val="FFFFFF"/>
                 </a:solidFill>
                 <a:latin typeface="Pretendard Variable"/>
               </a:rPr>
@@ -27096,7 +27098,7 @@
             <a:r>
               <a:rPr sz="1950" b="1">
                 <a:solidFill>
-                  <a:srgbClr val="000000"/>
+                  <a:srgbClr val="1E3A8A"/>
                 </a:solidFill>
                 <a:latin typeface="Pretendard Variable"/>
               </a:rPr>
@@ -27135,7 +27137,7 @@
             <a:r>
               <a:rPr sz="750" b="1">
                 <a:solidFill>
-                  <a:srgbClr val="000000"/>
+                  <a:srgbClr val="FFFFFF"/>
                 </a:solidFill>
                 <a:latin typeface="Pretendard Variable"/>
               </a:rPr>
@@ -27174,7 +27176,7 @@
             <a:r>
               <a:rPr sz="750" b="1">
                 <a:solidFill>
-                  <a:srgbClr val="000000"/>
+                  <a:srgbClr val="FFFFFF"/>
                 </a:solidFill>
                 <a:latin typeface="Pretendard Variable"/>
               </a:rPr>
@@ -27213,7 +27215,7 @@
             <a:r>
               <a:rPr sz="1050" b="1">
                 <a:solidFill>
-                  <a:srgbClr val="000000"/>
+                  <a:srgbClr val="1E3A8A"/>
                 </a:solidFill>
                 <a:latin typeface="Pretendard Variable"/>
               </a:rPr>
@@ -27252,7 +27254,7 @@
             <a:r>
               <a:rPr sz="975" b="1">
                 <a:solidFill>
-                  <a:srgbClr val="000000"/>
+                  <a:srgbClr val="FFFFFF"/>
                 </a:solidFill>
                 <a:latin typeface="Pretendard Variable"/>
               </a:rPr>
@@ -27291,7 +27293,7 @@
             <a:r>
               <a:rPr sz="1950" b="1">
                 <a:solidFill>
-                  <a:srgbClr val="000000"/>
+                  <a:srgbClr val="FFFFFF"/>
                 </a:solidFill>
                 <a:latin typeface="Pretendard Variable"/>
               </a:rPr>
@@ -27330,7 +27332,7 @@
             <a:r>
               <a:rPr sz="1350" b="1">
                 <a:solidFill>
-                  <a:srgbClr val="000000"/>
+                  <a:srgbClr val="FFFFFF"/>
                 </a:solidFill>
                 <a:latin typeface="Pretendard Variable"/>
               </a:rPr>
@@ -27369,7 +27371,7 @@
             <a:r>
               <a:rPr sz="975">
                 <a:solidFill>
-                  <a:srgbClr val="000000"/>
+                  <a:srgbClr val="1E3A8A"/>
                 </a:solidFill>
                 <a:latin typeface="Pretendard Variable"/>
               </a:rPr>
@@ -27408,7 +27410,7 @@
             <a:r>
               <a:rPr sz="1350" b="1">
                 <a:solidFill>
-                  <a:srgbClr val="000000"/>
+                  <a:srgbClr val="FFFFFF"/>
                 </a:solidFill>
                 <a:latin typeface="Pretendard Variable"/>
               </a:rPr>
@@ -27447,7 +27449,7 @@
             <a:r>
               <a:rPr sz="975">
                 <a:solidFill>
-                  <a:srgbClr val="000000"/>
+                  <a:srgbClr val="1E3A8A"/>
                 </a:solidFill>
                 <a:latin typeface="Pretendard Variable"/>
               </a:rPr>
@@ -27486,7 +27488,7 @@
             <a:r>
               <a:rPr sz="975" b="1">
                 <a:solidFill>
-                  <a:srgbClr val="000000"/>
+                  <a:srgbClr val="1E3A8A"/>
                 </a:solidFill>
                 <a:latin typeface="Pretendard Variable"/>
               </a:rPr>
@@ -27525,7 +27527,7 @@
             <a:r>
               <a:rPr sz="1425">
                 <a:solidFill>
-                  <a:srgbClr val="000000"/>
+                  <a:srgbClr val="1E3A8A"/>
                 </a:solidFill>
                 <a:latin typeface="Pretendard Variable"/>
               </a:rPr>
@@ -27606,7 +27608,7 @@
             <a:r>
               <a:rPr sz="1800" b="1">
                 <a:solidFill>
-                  <a:srgbClr val="000000"/>
+                  <a:srgbClr val="1E3A8A"/>
                 </a:solidFill>
                 <a:latin typeface="Pretendard Variable"/>
               </a:rPr>
@@ -27645,7 +27647,7 @@
             <a:r>
               <a:rPr sz="3900" b="1">
                 <a:solidFill>
-                  <a:srgbClr val="000000"/>
+                  <a:srgbClr val="1D1D1F"/>
                 </a:solidFill>
                 <a:latin typeface="Pretendard Variable"/>
               </a:rPr>
@@ -27684,7 +27686,7 @@
             <a:r>
               <a:rPr sz="975" b="1">
                 <a:solidFill>
-                  <a:srgbClr val="000000"/>
+                  <a:srgbClr val="FFFFFF"/>
                 </a:solidFill>
                 <a:latin typeface="Pretendard Variable"/>
               </a:rPr>
@@ -27723,7 +27725,7 @@
             <a:r>
               <a:rPr sz="1500" b="1">
                 <a:solidFill>
-                  <a:srgbClr val="000000"/>
+                  <a:srgbClr val="1E3A8A"/>
                 </a:solidFill>
                 <a:latin typeface="Pretendard Variable"/>
               </a:rPr>
@@ -27762,7 +27764,7 @@
             <a:r>
               <a:rPr sz="975" b="1">
                 <a:solidFill>
-                  <a:srgbClr val="000000"/>
+                  <a:srgbClr val="FFFFFF"/>
                 </a:solidFill>
                 <a:latin typeface="Pretendard Variable"/>
               </a:rPr>
@@ -27801,7 +27803,7 @@
             <a:r>
               <a:rPr sz="1800" b="1">
                 <a:solidFill>
-                  <a:srgbClr val="000000"/>
+                  <a:srgbClr val="FFFFFF"/>
                 </a:solidFill>
                 <a:latin typeface="Pretendard Variable"/>
               </a:rPr>
@@ -27840,7 +27842,7 @@
             <a:r>
               <a:rPr sz="1200" b="1">
                 <a:solidFill>
-                  <a:srgbClr val="000000"/>
+                  <a:srgbClr val="1E3A8A"/>
                 </a:solidFill>
                 <a:latin typeface="Pretendard Variable"/>
               </a:rPr>
@@ -27879,7 +27881,7 @@
             <a:r>
               <a:rPr sz="975">
                 <a:solidFill>
-                  <a:srgbClr val="000000"/>
+                  <a:srgbClr val="1E3A8A"/>
                 </a:solidFill>
                 <a:latin typeface="Pretendard Variable"/>
               </a:rPr>
@@ -27918,7 +27920,7 @@
             <a:r>
               <a:rPr sz="1200" b="1">
                 <a:solidFill>
-                  <a:srgbClr val="000000"/>
+                  <a:srgbClr val="93C5FD"/>
                 </a:solidFill>
                 <a:latin typeface="Pretendard Variable"/>
               </a:rPr>
@@ -27957,7 +27959,7 @@
             <a:r>
               <a:rPr sz="975">
                 <a:solidFill>
-                  <a:srgbClr val="000000"/>
+                  <a:srgbClr val="1E3A8A"/>
                 </a:solidFill>
                 <a:latin typeface="Pretendard Variable"/>
               </a:rPr>
@@ -27996,7 +27998,7 @@
             <a:r>
               <a:rPr sz="1425">
                 <a:solidFill>
-                  <a:srgbClr val="000000"/>
+                  <a:srgbClr val="1E3A8A"/>
                 </a:solidFill>
                 <a:latin typeface="Pretendard Variable"/>
               </a:rPr>
@@ -28077,7 +28079,7 @@
             <a:r>
               <a:rPr sz="1950">
                 <a:solidFill>
-                  <a:srgbClr val="000000"/>
+                  <a:srgbClr val="FFFFFF"/>
                 </a:solidFill>
                 <a:latin typeface="Pretendard Variable"/>
               </a:rPr>
@@ -28116,7 +28118,7 @@
             <a:r>
               <a:rPr sz="4950" b="1">
                 <a:solidFill>
-                  <a:srgbClr val="000000"/>
+                  <a:srgbClr val="FFFFFF"/>
                 </a:solidFill>
                 <a:latin typeface="Pretendard Variable"/>
               </a:rPr>
@@ -28197,7 +28199,7 @@
             <a:r>
               <a:rPr sz="1950" b="1">
                 <a:solidFill>
-                  <a:srgbClr val="000000"/>
+                  <a:srgbClr val="0F172A"/>
                 </a:solidFill>
                 <a:latin typeface="Pretendard Variable"/>
               </a:rPr>
@@ -28236,7 +28238,7 @@
             <a:r>
               <a:rPr sz="4950" b="1">
                 <a:solidFill>
-                  <a:srgbClr val="000000"/>
+                  <a:srgbClr val="0F172A"/>
                 </a:solidFill>
                 <a:latin typeface="Pretendard Variable"/>
               </a:rPr>
@@ -28317,7 +28319,7 @@
             <a:r>
               <a:rPr sz="1800" b="1">
                 <a:solidFill>
-                  <a:srgbClr val="000000"/>
+                  <a:srgbClr val="1E3A8A"/>
                 </a:solidFill>
                 <a:latin typeface="Pretendard Variable"/>
               </a:rPr>
@@ -28356,7 +28358,7 @@
             <a:r>
               <a:rPr sz="3750" b="1">
                 <a:solidFill>
-                  <a:srgbClr val="000000"/>
+                  <a:srgbClr val="1D1D1F"/>
                 </a:solidFill>
                 <a:latin typeface="Pretendard Variable"/>
               </a:rPr>
@@ -28395,7 +28397,7 @@
             <a:r>
               <a:rPr sz="900" b="1">
                 <a:solidFill>
-                  <a:srgbClr val="000000"/>
+                  <a:srgbClr val="FFFFFF"/>
                 </a:solidFill>
                 <a:latin typeface="Pretendard Variable"/>
               </a:rPr>
@@ -28434,7 +28436,7 @@
             <a:r>
               <a:rPr sz="1650" b="1">
                 <a:solidFill>
-                  <a:srgbClr val="000000"/>
+                  <a:srgbClr val="1E3A8A"/>
                 </a:solidFill>
                 <a:latin typeface="Pretendard Variable"/>
               </a:rPr>
@@ -28473,7 +28475,7 @@
             <a:r>
               <a:rPr sz="1087">
                 <a:solidFill>
-                  <a:srgbClr val="000000"/>
+                  <a:srgbClr val="1E3A8A"/>
                 </a:solidFill>
                 <a:latin typeface="Pretendard Variable"/>
               </a:rPr>
@@ -28512,7 +28514,7 @@
             <a:r>
               <a:rPr sz="1087">
                 <a:solidFill>
-                  <a:srgbClr val="000000"/>
+                  <a:srgbClr val="1E3A8A"/>
                 </a:solidFill>
                 <a:latin typeface="Pretendard Variable"/>
               </a:rPr>
@@ -28551,7 +28553,7 @@
             <a:r>
               <a:rPr sz="900" b="1">
                 <a:solidFill>
-                  <a:srgbClr val="000000"/>
+                  <a:srgbClr val="FFFFFF"/>
                 </a:solidFill>
                 <a:latin typeface="Pretendard Variable"/>
               </a:rPr>
@@ -28590,7 +28592,7 @@
             <a:r>
               <a:rPr sz="1650" b="1">
                 <a:solidFill>
-                  <a:srgbClr val="000000"/>
+                  <a:srgbClr val="93C5FD"/>
                 </a:solidFill>
                 <a:latin typeface="Pretendard Variable"/>
               </a:rPr>
@@ -28629,7 +28631,7 @@
             <a:r>
               <a:rPr sz="1087">
                 <a:solidFill>
-                  <a:srgbClr val="000000"/>
+                  <a:srgbClr val="1E3A8A"/>
                 </a:solidFill>
                 <a:latin typeface="Pretendard Variable"/>
               </a:rPr>
@@ -28668,7 +28670,7 @@
             <a:r>
               <a:rPr sz="1087">
                 <a:solidFill>
-                  <a:srgbClr val="000000"/>
+                  <a:srgbClr val="1E3A8A"/>
                 </a:solidFill>
                 <a:latin typeface="Pretendard Variable"/>
               </a:rPr>
@@ -28707,7 +28709,7 @@
             <a:r>
               <a:rPr sz="1425" b="1">
                 <a:solidFill>
-                  <a:srgbClr val="000000"/>
+                  <a:srgbClr val="1E3A8A"/>
                 </a:solidFill>
                 <a:latin typeface="Pretendard Variable"/>
               </a:rPr>
@@ -28788,7 +28790,7 @@
             <a:r>
               <a:rPr sz="1800" b="1">
                 <a:solidFill>
-                  <a:srgbClr val="000000"/>
+                  <a:srgbClr val="1E3A8A"/>
                 </a:solidFill>
                 <a:latin typeface="Pretendard Variable"/>
               </a:rPr>
@@ -28827,7 +28829,7 @@
             <a:r>
               <a:rPr sz="3750" b="1">
                 <a:solidFill>
-                  <a:srgbClr val="000000"/>
+                  <a:srgbClr val="1D1D1F"/>
                 </a:solidFill>
                 <a:latin typeface="Pretendard Variable"/>
               </a:rPr>
@@ -28866,7 +28868,7 @@
             <a:r>
               <a:rPr sz="825" b="1">
                 <a:solidFill>
-                  <a:srgbClr val="000000"/>
+                  <a:srgbClr val="FFFFFF"/>
                 </a:solidFill>
                 <a:latin typeface="Pretendard Variable"/>
               </a:rPr>
@@ -28905,7 +28907,7 @@
             <a:r>
               <a:rPr sz="1425" b="1">
                 <a:solidFill>
-                  <a:srgbClr val="000000"/>
+                  <a:srgbClr val="1E3A8A"/>
                 </a:solidFill>
                 <a:latin typeface="Pretendard Variable"/>
               </a:rPr>
@@ -28944,7 +28946,7 @@
             <a:r>
               <a:rPr sz="1012" b="1">
                 <a:solidFill>
-                  <a:srgbClr val="000000"/>
+                  <a:srgbClr val="1E3A8A"/>
                 </a:solidFill>
                 <a:latin typeface="Pretendard Variable"/>
               </a:rPr>
@@ -28983,7 +28985,7 @@
             <a:r>
               <a:rPr sz="825" b="1">
                 <a:solidFill>
-                  <a:srgbClr val="000000"/>
+                  <a:srgbClr val="FFFFFF"/>
                 </a:solidFill>
                 <a:latin typeface="Pretendard Variable"/>
               </a:rPr>
@@ -29022,7 +29024,7 @@
             <a:r>
               <a:rPr sz="1425" b="1">
                 <a:solidFill>
-                  <a:srgbClr val="000000"/>
+                  <a:srgbClr val="93C5FD"/>
                 </a:solidFill>
                 <a:latin typeface="Pretendard Variable"/>
               </a:rPr>
@@ -29061,7 +29063,7 @@
             <a:r>
               <a:rPr sz="1012" b="1">
                 <a:solidFill>
-                  <a:srgbClr val="000000"/>
+                  <a:srgbClr val="1E3A8A"/>
                 </a:solidFill>
                 <a:latin typeface="Pretendard Variable"/>
               </a:rPr>
@@ -29100,7 +29102,7 @@
             <a:r>
               <a:rPr sz="825" b="1">
                 <a:solidFill>
-                  <a:srgbClr val="000000"/>
+                  <a:srgbClr val="FFFFFF"/>
                 </a:solidFill>
                 <a:latin typeface="Pretendard Variable"/>
               </a:rPr>
@@ -29139,7 +29141,7 @@
             <a:r>
               <a:rPr sz="1425" b="1">
                 <a:solidFill>
-                  <a:srgbClr val="000000"/>
+                  <a:srgbClr val="1E3A8A"/>
                 </a:solidFill>
                 <a:latin typeface="Pretendard Variable"/>
               </a:rPr>
@@ -29178,7 +29180,7 @@
             <a:r>
               <a:rPr sz="1012" b="1">
                 <a:solidFill>
-                  <a:srgbClr val="000000"/>
+                  <a:srgbClr val="1E3A8A"/>
                 </a:solidFill>
                 <a:latin typeface="Pretendard Variable"/>
               </a:rPr>
@@ -29217,7 +29219,7 @@
             <a:r>
               <a:rPr sz="1425" b="1">
                 <a:solidFill>
-                  <a:srgbClr val="000000"/>
+                  <a:srgbClr val="1E3A8A"/>
                 </a:solidFill>
                 <a:latin typeface="Pretendard Variable"/>
               </a:rPr>
@@ -29298,7 +29300,7 @@
             <a:r>
               <a:rPr sz="1950" b="1">
                 <a:solidFill>
-                  <a:srgbClr val="000000"/>
+                  <a:srgbClr val="0F172A"/>
                 </a:solidFill>
                 <a:latin typeface="Pretendard Variable"/>
               </a:rPr>
@@ -29337,7 +29339,7 @@
             <a:r>
               <a:rPr sz="4950" b="1">
                 <a:solidFill>
-                  <a:srgbClr val="000000"/>
+                  <a:srgbClr val="0F172A"/>
                 </a:solidFill>
                 <a:latin typeface="Pretendard Variable"/>
               </a:rPr>
@@ -29418,7 +29420,7 @@
             <a:r>
               <a:rPr sz="1800" b="1">
                 <a:solidFill>
-                  <a:srgbClr val="000000"/>
+                  <a:srgbClr val="1E3A8A"/>
                 </a:solidFill>
                 <a:latin typeface="Pretendard Variable"/>
               </a:rPr>
@@ -29457,7 +29459,7 @@
             <a:r>
               <a:rPr sz="3750" b="1">
                 <a:solidFill>
-                  <a:srgbClr val="000000"/>
+                  <a:srgbClr val="1D1D1F"/>
                 </a:solidFill>
                 <a:latin typeface="Pretendard Variable"/>
               </a:rPr>
@@ -29496,7 +29498,7 @@
             <a:r>
               <a:rPr sz="975" b="1">
                 <a:solidFill>
-                  <a:srgbClr val="000000"/>
+                  <a:srgbClr val="FFFFFF"/>
                 </a:solidFill>
                 <a:latin typeface="Pretendard Variable"/>
               </a:rPr>
@@ -29535,7 +29537,7 @@
             <a:r>
               <a:rPr sz="1275" b="1">
                 <a:solidFill>
-                  <a:srgbClr val="000000"/>
+                  <a:srgbClr val="1E3A8A"/>
                 </a:solidFill>
                 <a:latin typeface="Pretendard Variable"/>
               </a:rPr>
@@ -29574,7 +29576,7 @@
             <a:r>
               <a:rPr sz="750" b="1">
                 <a:solidFill>
-                  <a:srgbClr val="000000"/>
+                  <a:srgbClr val="1E3A8A"/>
                 </a:solidFill>
                 <a:latin typeface="Pretendard Variable"/>
               </a:rPr>
@@ -29613,7 +29615,7 @@
             <a:r>
               <a:rPr sz="975" b="1">
                 <a:solidFill>
-                  <a:srgbClr val="000000"/>
+                  <a:srgbClr val="1E3A8A"/>
                 </a:solidFill>
                 <a:latin typeface="Pretendard Variable"/>
               </a:rPr>
@@ -29652,7 +29654,7 @@
             <a:r>
               <a:rPr sz="975" b="1">
                 <a:solidFill>
-                  <a:srgbClr val="000000"/>
+                  <a:srgbClr val="FFFFFF"/>
                 </a:solidFill>
                 <a:latin typeface="Pretendard Variable"/>
               </a:rPr>
@@ -29691,7 +29693,7 @@
             <a:r>
               <a:rPr sz="1275" b="1">
                 <a:solidFill>
-                  <a:srgbClr val="000000"/>
+                  <a:srgbClr val="1E3A8A"/>
                 </a:solidFill>
                 <a:latin typeface="Pretendard Variable"/>
               </a:rPr>
@@ -29730,7 +29732,7 @@
             <a:r>
               <a:rPr sz="750" b="1">
                 <a:solidFill>
-                  <a:srgbClr val="000000"/>
+                  <a:srgbClr val="1E3A8A"/>
                 </a:solidFill>
                 <a:latin typeface="Pretendard Variable"/>
               </a:rPr>
@@ -29769,7 +29771,7 @@
             <a:r>
               <a:rPr sz="975" b="1">
                 <a:solidFill>
-                  <a:srgbClr val="000000"/>
+                  <a:srgbClr val="1E3A8A"/>
                 </a:solidFill>
                 <a:latin typeface="Pretendard Variable"/>
               </a:rPr>
@@ -29808,7 +29810,7 @@
             <a:r>
               <a:rPr sz="975" b="1">
                 <a:solidFill>
-                  <a:srgbClr val="000000"/>
+                  <a:srgbClr val="FFFFFF"/>
                 </a:solidFill>
                 <a:latin typeface="Pretendard Variable"/>
               </a:rPr>
@@ -29847,7 +29849,7 @@
             <a:r>
               <a:rPr sz="1275" b="1">
                 <a:solidFill>
-                  <a:srgbClr val="000000"/>
+                  <a:srgbClr val="1E3A8A"/>
                 </a:solidFill>
                 <a:latin typeface="Pretendard Variable"/>
               </a:rPr>
@@ -29886,7 +29888,7 @@
             <a:r>
               <a:rPr sz="750" b="1">
                 <a:solidFill>
-                  <a:srgbClr val="000000"/>
+                  <a:srgbClr val="1E3A8A"/>
                 </a:solidFill>
                 <a:latin typeface="Pretendard Variable"/>
               </a:rPr>
@@ -29925,7 +29927,7 @@
             <a:r>
               <a:rPr sz="975" b="1">
                 <a:solidFill>
-                  <a:srgbClr val="000000"/>
+                  <a:srgbClr val="1E3A8A"/>
                 </a:solidFill>
                 <a:latin typeface="Pretendard Variable"/>
               </a:rPr>
@@ -29964,7 +29966,7 @@
             <a:r>
               <a:rPr sz="975" b="1">
                 <a:solidFill>
-                  <a:srgbClr val="000000"/>
+                  <a:srgbClr val="FFFFFF"/>
                 </a:solidFill>
                 <a:latin typeface="Pretendard Variable"/>
               </a:rPr>
@@ -30003,7 +30005,7 @@
             <a:r>
               <a:rPr sz="1275" b="1">
                 <a:solidFill>
-                  <a:srgbClr val="000000"/>
+                  <a:srgbClr val="1E3A8A"/>
                 </a:solidFill>
                 <a:latin typeface="Pretendard Variable"/>
               </a:rPr>
@@ -30042,7 +30044,7 @@
             <a:r>
               <a:rPr sz="750" b="1">
                 <a:solidFill>
-                  <a:srgbClr val="000000"/>
+                  <a:srgbClr val="1E3A8A"/>
                 </a:solidFill>
                 <a:latin typeface="Pretendard Variable"/>
               </a:rPr>
@@ -30081,7 +30083,7 @@
             <a:r>
               <a:rPr sz="975" b="1">
                 <a:solidFill>
-                  <a:srgbClr val="000000"/>
+                  <a:srgbClr val="1E3A8A"/>
                 </a:solidFill>
                 <a:latin typeface="Pretendard Variable"/>
               </a:rPr>
@@ -30120,7 +30122,7 @@
             <a:r>
               <a:rPr sz="1425" b="1">
                 <a:solidFill>
-                  <a:srgbClr val="000000"/>
+                  <a:srgbClr val="1E3A8A"/>
                 </a:solidFill>
                 <a:latin typeface="Pretendard Variable"/>
               </a:rPr>
@@ -30201,7 +30203,7 @@
             <a:r>
               <a:rPr sz="1950" b="1">
                 <a:solidFill>
-                  <a:srgbClr val="000000"/>
+                  <a:srgbClr val="0F172A"/>
                 </a:solidFill>
                 <a:latin typeface="Pretendard Variable"/>
               </a:rPr>
@@ -30240,7 +30242,7 @@
             <a:r>
               <a:rPr sz="4950" b="1">
                 <a:solidFill>
-                  <a:srgbClr val="000000"/>
+                  <a:srgbClr val="0F172A"/>
                 </a:solidFill>
                 <a:latin typeface="Pretendard Variable"/>
               </a:rPr>
@@ -30321,7 +30323,7 @@
             <a:r>
               <a:rPr sz="1800" b="1">
                 <a:solidFill>
-                  <a:srgbClr val="000000"/>
+                  <a:srgbClr val="1E3A8A"/>
                 </a:solidFill>
                 <a:latin typeface="Pretendard Variable"/>
               </a:rPr>
@@ -30360,7 +30362,7 @@
             <a:r>
               <a:rPr sz="3750" b="1">
                 <a:solidFill>
-                  <a:srgbClr val="000000"/>
+                  <a:srgbClr val="1D1D1F"/>
                 </a:solidFill>
                 <a:latin typeface="Pretendard Variable"/>
               </a:rPr>
@@ -30399,7 +30401,7 @@
             <a:r>
               <a:rPr sz="900" b="1">
                 <a:solidFill>
-                  <a:srgbClr val="000000"/>
+                  <a:srgbClr val="FFFFFF"/>
                 </a:solidFill>
                 <a:latin typeface="Pretendard Variable"/>
               </a:rPr>
@@ -30438,7 +30440,7 @@
             <a:r>
               <a:rPr sz="1650" b="1">
                 <a:solidFill>
-                  <a:srgbClr val="000000"/>
+                  <a:srgbClr val="1E3A8A"/>
                 </a:solidFill>
                 <a:latin typeface="Pretendard Variable"/>
               </a:rPr>
@@ -30477,7 +30479,7 @@
             <a:r>
               <a:rPr sz="1087" b="1">
                 <a:solidFill>
-                  <a:srgbClr val="000000"/>
+                  <a:srgbClr val="1E3A8A"/>
                 </a:solidFill>
                 <a:latin typeface="Pretendard Variable"/>
               </a:rPr>
@@ -30516,7 +30518,7 @@
             <a:r>
               <a:rPr sz="1087" b="1">
                 <a:solidFill>
-                  <a:srgbClr val="000000"/>
+                  <a:srgbClr val="1E3A8A"/>
                 </a:solidFill>
                 <a:latin typeface="Pretendard Variable"/>
               </a:rPr>
@@ -30555,7 +30557,7 @@
             <a:r>
               <a:rPr sz="900" b="1">
                 <a:solidFill>
-                  <a:srgbClr val="000000"/>
+                  <a:srgbClr val="FFFFFF"/>
                 </a:solidFill>
                 <a:latin typeface="Pretendard Variable"/>
               </a:rPr>
@@ -30594,7 +30596,7 @@
             <a:r>
               <a:rPr sz="1650" b="1">
                 <a:solidFill>
-                  <a:srgbClr val="000000"/>
+                  <a:srgbClr val="93C5FD"/>
                 </a:solidFill>
                 <a:latin typeface="Pretendard Variable"/>
               </a:rPr>
@@ -30633,7 +30635,7 @@
             <a:r>
               <a:rPr sz="1087" b="1">
                 <a:solidFill>
-                  <a:srgbClr val="000000"/>
+                  <a:srgbClr val="1E3A8A"/>
                 </a:solidFill>
                 <a:latin typeface="Pretendard Variable"/>
               </a:rPr>
@@ -30672,7 +30674,7 @@
             <a:r>
               <a:rPr sz="1087" b="1">
                 <a:solidFill>
-                  <a:srgbClr val="000000"/>
+                  <a:srgbClr val="1E3A8A"/>
                 </a:solidFill>
                 <a:latin typeface="Pretendard Variable"/>
               </a:rPr>
@@ -30711,7 +30713,7 @@
             <a:r>
               <a:rPr sz="1425" b="1">
                 <a:solidFill>
-                  <a:srgbClr val="000000"/>
+                  <a:srgbClr val="1E3A8A"/>
                 </a:solidFill>
                 <a:latin typeface="Pretendard Variable"/>
               </a:rPr>
@@ -30792,7 +30794,7 @@
             <a:r>
               <a:rPr sz="1800" b="1">
                 <a:solidFill>
-                  <a:srgbClr val="000000"/>
+                  <a:srgbClr val="1E3A8A"/>
                 </a:solidFill>
                 <a:latin typeface="Pretendard Variable"/>
               </a:rPr>
@@ -30831,7 +30833,7 @@
             <a:r>
               <a:rPr sz="3750" b="1">
                 <a:solidFill>
-                  <a:srgbClr val="000000"/>
+                  <a:srgbClr val="1D1D1F"/>
                 </a:solidFill>
                 <a:latin typeface="Pretendard Variable"/>
               </a:rPr>
@@ -30870,7 +30872,7 @@
             <a:r>
               <a:rPr sz="1425" b="1">
                 <a:solidFill>
-                  <a:srgbClr val="000000"/>
+                  <a:srgbClr val="1E3A8A"/>
                 </a:solidFill>
                 <a:latin typeface="Pretendard Variable"/>
               </a:rPr>
@@ -30951,7 +30953,7 @@
             <a:r>
               <a:rPr sz="1800" b="1">
                 <a:solidFill>
-                  <a:srgbClr val="000000"/>
+                  <a:srgbClr val="10B981"/>
                 </a:solidFill>
                 <a:latin typeface="Pretendard Variable"/>
               </a:rPr>
@@ -30990,7 +30992,7 @@
             <a:r>
               <a:rPr sz="3900" b="1">
                 <a:solidFill>
-                  <a:srgbClr val="000000"/>
+                  <a:srgbClr val="1D1D1F"/>
                 </a:solidFill>
                 <a:latin typeface="Pretendard Variable"/>
               </a:rPr>
@@ -31029,7 +31031,7 @@
             <a:r>
               <a:rPr sz="975" b="1">
                 <a:solidFill>
-                  <a:srgbClr val="000000"/>
+                  <a:srgbClr val="FFFFFF"/>
                 </a:solidFill>
                 <a:latin typeface="Pretendard Variable"/>
               </a:rPr>
@@ -31068,7 +31070,7 @@
             <a:r>
               <a:rPr sz="1950" b="1">
                 <a:solidFill>
-                  <a:srgbClr val="000000"/>
+                  <a:srgbClr val="FFFFFF"/>
                 </a:solidFill>
                 <a:latin typeface="Pretendard Variable"/>
               </a:rPr>
@@ -31107,7 +31109,7 @@
             <a:r>
               <a:rPr sz="1050" b="1">
                 <a:solidFill>
-                  <a:srgbClr val="000000"/>
+                  <a:srgbClr val="1E3A8A"/>
                 </a:solidFill>
                 <a:latin typeface="Pretendard Variable"/>
               </a:rPr>
@@ -31146,7 +31148,7 @@
             <a:r>
               <a:rPr sz="1050" b="1">
                 <a:solidFill>
-                  <a:srgbClr val="000000"/>
+                  <a:srgbClr val="1E3A8A"/>
                 </a:solidFill>
                 <a:latin typeface="Pretendard Variable"/>
               </a:rPr>
@@ -31185,7 +31187,7 @@
             <a:r>
               <a:rPr sz="1050" b="1">
                 <a:solidFill>
-                  <a:srgbClr val="000000"/>
+                  <a:srgbClr val="1E3A8A"/>
                 </a:solidFill>
                 <a:latin typeface="Pretendard Variable"/>
               </a:rPr>
@@ -31224,7 +31226,7 @@
             <a:r>
               <a:rPr sz="1050" b="1">
                 <a:solidFill>
-                  <a:srgbClr val="000000"/>
+                  <a:srgbClr val="1E3A8A"/>
                 </a:solidFill>
                 <a:latin typeface="Pretendard Variable"/>
               </a:rPr>
@@ -31263,7 +31265,7 @@
             <a:r>
               <a:rPr sz="1050" b="1">
                 <a:solidFill>
-                  <a:srgbClr val="000000"/>
+                  <a:srgbClr val="10B981"/>
                 </a:solidFill>
                 <a:latin typeface="Pretendard Variable"/>
               </a:rPr>
@@ -31302,7 +31304,7 @@
             <a:r>
               <a:rPr sz="975" b="1">
                 <a:solidFill>
-                  <a:srgbClr val="000000"/>
+                  <a:srgbClr val="1E3A8A"/>
                 </a:solidFill>
                 <a:latin typeface="Pretendard Variable"/>
               </a:rPr>
@@ -31341,7 +31343,7 @@
             <a:r>
               <a:rPr sz="975" b="1">
                 <a:solidFill>
-                  <a:srgbClr val="000000"/>
+                  <a:srgbClr val="FFFFFF"/>
                 </a:solidFill>
                 <a:latin typeface="Pretendard Variable"/>
               </a:rPr>
@@ -31380,7 +31382,7 @@
             <a:r>
               <a:rPr sz="1950" b="1">
                 <a:solidFill>
-                  <a:srgbClr val="000000"/>
+                  <a:srgbClr val="1E3A8A"/>
                 </a:solidFill>
                 <a:latin typeface="Pretendard Variable"/>
               </a:rPr>
@@ -31419,7 +31421,7 @@
             <a:r>
               <a:rPr sz="900" b="1">
                 <a:solidFill>
-                  <a:srgbClr val="000000"/>
+                  <a:srgbClr val="1E3A8A"/>
                 </a:solidFill>
                 <a:latin typeface="Pretendard Variable"/>
               </a:rPr>
@@ -31458,7 +31460,7 @@
             <a:r>
               <a:rPr sz="2700" b="1">
                 <a:solidFill>
-                  <a:srgbClr val="000000"/>
+                  <a:srgbClr val="10B981"/>
                 </a:solidFill>
                 <a:latin typeface="Pretendard Variable"/>
               </a:rPr>
@@ -31497,7 +31499,7 @@
             <a:r>
               <a:rPr sz="900" b="1">
                 <a:solidFill>
-                  <a:srgbClr val="000000"/>
+                  <a:srgbClr val="1E3A8A"/>
                 </a:solidFill>
                 <a:latin typeface="Pretendard Variable"/>
               </a:rPr>
@@ -31536,7 +31538,7 @@
             <a:r>
               <a:rPr sz="900" b="1">
                 <a:solidFill>
-                  <a:srgbClr val="000000"/>
+                  <a:srgbClr val="1E3A8A"/>
                 </a:solidFill>
                 <a:latin typeface="Pretendard Variable"/>
               </a:rPr>
@@ -31575,7 +31577,7 @@
             <a:r>
               <a:rPr sz="2700" b="1">
                 <a:solidFill>
-                  <a:srgbClr val="000000"/>
+                  <a:srgbClr val="10B981"/>
                 </a:solidFill>
                 <a:latin typeface="Pretendard Variable"/>
               </a:rPr>
@@ -31614,7 +31616,7 @@
             <a:r>
               <a:rPr sz="900" b="1">
                 <a:solidFill>
-                  <a:srgbClr val="000000"/>
+                  <a:srgbClr val="1E3A8A"/>
                 </a:solidFill>
                 <a:latin typeface="Pretendard Variable"/>
               </a:rPr>
@@ -31653,7 +31655,7 @@
             <a:r>
               <a:rPr sz="975" b="1">
                 <a:solidFill>
-                  <a:srgbClr val="000000"/>
+                  <a:srgbClr val="1E3A8A"/>
                 </a:solidFill>
                 <a:latin typeface="Pretendard Variable"/>
               </a:rPr>
@@ -31692,7 +31694,7 @@
             <a:r>
               <a:rPr sz="1425">
                 <a:solidFill>
-                  <a:srgbClr val="000000"/>
+                  <a:srgbClr val="1E3A8A"/>
                 </a:solidFill>
                 <a:latin typeface="Pretendard Variable"/>
               </a:rPr>
@@ -31773,7 +31775,7 @@
             <a:r>
               <a:rPr sz="1950">
                 <a:solidFill>
-                  <a:srgbClr val="000000"/>
+                  <a:srgbClr val="FFFFFF"/>
                 </a:solidFill>
                 <a:latin typeface="Pretendard Variable"/>
               </a:rPr>
@@ -31812,7 +31814,7 @@
             <a:r>
               <a:rPr sz="4950" b="1">
                 <a:solidFill>
-                  <a:srgbClr val="000000"/>
+                  <a:srgbClr val="FFFFFF"/>
                 </a:solidFill>
                 <a:latin typeface="Pretendard Variable"/>
               </a:rPr>
@@ -31893,7 +31895,7 @@
             <a:r>
               <a:rPr sz="1950" b="1">
                 <a:solidFill>
-                  <a:srgbClr val="000000"/>
+                  <a:srgbClr val="0F172A"/>
                 </a:solidFill>
                 <a:latin typeface="Pretendard Variable"/>
               </a:rPr>
@@ -31932,7 +31934,7 @@
             <a:r>
               <a:rPr sz="4950" b="1">
                 <a:solidFill>
-                  <a:srgbClr val="000000"/>
+                  <a:srgbClr val="0F172A"/>
                 </a:solidFill>
                 <a:latin typeface="Pretendard Variable"/>
               </a:rPr>
@@ -32013,7 +32015,7 @@
             <a:r>
               <a:rPr sz="1800" b="1">
                 <a:solidFill>
-                  <a:srgbClr val="000000"/>
+                  <a:srgbClr val="1E3A8A"/>
                 </a:solidFill>
                 <a:latin typeface="Pretendard Variable"/>
               </a:rPr>
@@ -32052,7 +32054,7 @@
             <a:r>
               <a:rPr sz="3900" b="1">
                 <a:solidFill>
-                  <a:srgbClr val="000000"/>
+                  <a:srgbClr val="1D1D1F"/>
                 </a:solidFill>
                 <a:latin typeface="Pretendard Variable"/>
               </a:rPr>
@@ -32091,7 +32093,7 @@
             <a:r>
               <a:rPr sz="975" b="1">
                 <a:solidFill>
-                  <a:srgbClr val="000000"/>
+                  <a:srgbClr val="FFFFFF"/>
                 </a:solidFill>
                 <a:latin typeface="Pretendard Variable"/>
               </a:rPr>
@@ -32130,7 +32132,7 @@
             <a:r>
               <a:rPr sz="1500" b="1">
                 <a:solidFill>
-                  <a:srgbClr val="000000"/>
+                  <a:srgbClr val="1E3A8A"/>
                 </a:solidFill>
                 <a:latin typeface="Pretendard Variable"/>
               </a:rPr>
@@ -32169,7 +32171,7 @@
             <a:r>
               <a:rPr sz="975" b="1">
                 <a:solidFill>
-                  <a:srgbClr val="000000"/>
+                  <a:srgbClr val="FFFFFF"/>
                 </a:solidFill>
                 <a:latin typeface="Pretendard Variable"/>
               </a:rPr>
@@ -32208,7 +32210,7 @@
             <a:r>
               <a:rPr sz="1800" b="1">
                 <a:solidFill>
-                  <a:srgbClr val="000000"/>
+                  <a:srgbClr val="FFFFFF"/>
                 </a:solidFill>
                 <a:latin typeface="Pretendard Variable"/>
               </a:rPr>
@@ -32247,7 +32249,7 @@
             <a:r>
               <a:rPr sz="1200" b="1">
                 <a:solidFill>
-                  <a:srgbClr val="000000"/>
+                  <a:srgbClr val="93C5FD"/>
                 </a:solidFill>
                 <a:latin typeface="Pretendard Variable"/>
               </a:rPr>
@@ -32286,7 +32288,7 @@
             <a:r>
               <a:rPr sz="975">
                 <a:solidFill>
-                  <a:srgbClr val="000000"/>
+                  <a:srgbClr val="1E3A8A"/>
                 </a:solidFill>
                 <a:latin typeface="Pretendard Variable"/>
               </a:rPr>
@@ -32325,7 +32327,7 @@
             <a:r>
               <a:rPr sz="1200" b="1">
                 <a:solidFill>
-                  <a:srgbClr val="000000"/>
+                  <a:srgbClr val="93C5FD"/>
                 </a:solidFill>
                 <a:latin typeface="Pretendard Variable"/>
               </a:rPr>
@@ -32364,7 +32366,7 @@
             <a:r>
               <a:rPr sz="975">
                 <a:solidFill>
-                  <a:srgbClr val="000000"/>
+                  <a:srgbClr val="1E3A8A"/>
                 </a:solidFill>
                 <a:latin typeface="Pretendard Variable"/>
               </a:rPr>
@@ -32403,7 +32405,7 @@
             <a:r>
               <a:rPr sz="1425">
                 <a:solidFill>
-                  <a:srgbClr val="000000"/>
+                  <a:srgbClr val="1E3A8A"/>
                 </a:solidFill>
                 <a:latin typeface="Pretendard Variable"/>
               </a:rPr>
@@ -32484,7 +32486,7 @@
             <a:r>
               <a:rPr sz="1800" b="1">
                 <a:solidFill>
-                  <a:srgbClr val="000000"/>
+                  <a:srgbClr val="1E3A8A"/>
                 </a:solidFill>
                 <a:latin typeface="Pretendard Variable"/>
               </a:rPr>
@@ -32523,7 +32525,7 @@
             <a:r>
               <a:rPr sz="3900" b="1">
                 <a:solidFill>
-                  <a:srgbClr val="000000"/>
+                  <a:srgbClr val="1D1D1F"/>
                 </a:solidFill>
                 <a:latin typeface="Pretendard Variable"/>
               </a:rPr>
@@ -32562,7 +32564,7 @@
             <a:r>
               <a:rPr sz="975" b="1">
                 <a:solidFill>
-                  <a:srgbClr val="000000"/>
+                  <a:srgbClr val="FFFFFF"/>
                 </a:solidFill>
                 <a:latin typeface="Pretendard Variable"/>
               </a:rPr>
@@ -32601,7 +32603,7 @@
             <a:r>
               <a:rPr sz="900" b="1">
                 <a:solidFill>
-                  <a:srgbClr val="000000"/>
+                  <a:srgbClr val="10B981"/>
                 </a:solidFill>
                 <a:latin typeface="Pretendard Variable"/>
               </a:rPr>
@@ -32640,7 +32642,7 @@
             <a:r>
               <a:rPr sz="1200" b="1">
                 <a:solidFill>
-                  <a:srgbClr val="000000"/>
+                  <a:srgbClr val="1E3A8A"/>
                 </a:solidFill>
                 <a:latin typeface="Pretendard Variable"/>
               </a:rPr>
@@ -32679,7 +32681,7 @@
             <a:r>
               <a:rPr sz="975" b="1">
                 <a:solidFill>
-                  <a:srgbClr val="000000"/>
+                  <a:srgbClr val="1E3A8A"/>
                 </a:solidFill>
                 <a:latin typeface="Pretendard Variable"/>
               </a:rPr>
@@ -32718,7 +32720,7 @@
             <a:r>
               <a:rPr sz="900" b="1">
                 <a:solidFill>
-                  <a:srgbClr val="000000"/>
+                  <a:srgbClr val="3B82F6"/>
                 </a:solidFill>
                 <a:latin typeface="Pretendard Variable"/>
               </a:rPr>
@@ -32757,7 +32759,7 @@
             <a:r>
               <a:rPr sz="1200" b="1">
                 <a:solidFill>
-                  <a:srgbClr val="000000"/>
+                  <a:srgbClr val="1E3A8A"/>
                 </a:solidFill>
                 <a:latin typeface="Pretendard Variable"/>
               </a:rPr>
@@ -32796,7 +32798,7 @@
             <a:r>
               <a:rPr sz="975" b="1">
                 <a:solidFill>
-                  <a:srgbClr val="000000"/>
+                  <a:srgbClr val="1E3A8A"/>
                 </a:solidFill>
                 <a:latin typeface="Pretendard Variable"/>
               </a:rPr>
@@ -32835,7 +32837,7 @@
             <a:r>
               <a:rPr sz="900" b="1">
                 <a:solidFill>
-                  <a:srgbClr val="000000"/>
+                  <a:srgbClr val="EF4444"/>
                 </a:solidFill>
                 <a:latin typeface="Pretendard Variable"/>
               </a:rPr>
@@ -32874,7 +32876,7 @@
             <a:r>
               <a:rPr sz="1200" b="1">
                 <a:solidFill>
-                  <a:srgbClr val="000000"/>
+                  <a:srgbClr val="1E3A8A"/>
                 </a:solidFill>
                 <a:latin typeface="Pretendard Variable"/>
               </a:rPr>
@@ -32913,7 +32915,7 @@
             <a:r>
               <a:rPr sz="975" b="1">
                 <a:solidFill>
-                  <a:srgbClr val="000000"/>
+                  <a:srgbClr val="1E3A8A"/>
                 </a:solidFill>
                 <a:latin typeface="Pretendard Variable"/>
               </a:rPr>
@@ -32952,7 +32954,7 @@
             <a:r>
               <a:rPr sz="975" b="1">
                 <a:solidFill>
-                  <a:srgbClr val="000000"/>
+                  <a:srgbClr val="FFFFFF"/>
                 </a:solidFill>
                 <a:latin typeface="Pretendard Variable"/>
               </a:rPr>
@@ -32991,7 +32993,7 @@
             <a:r>
               <a:rPr sz="1800" b="1">
                 <a:solidFill>
-                  <a:srgbClr val="000000"/>
+                  <a:srgbClr val="FFFFFF"/>
                 </a:solidFill>
                 <a:latin typeface="Pretendard Variable"/>
               </a:rPr>
@@ -33030,7 +33032,7 @@
             <a:r>
               <a:rPr sz="1200" b="1">
                 <a:solidFill>
-                  <a:srgbClr val="000000"/>
+                  <a:srgbClr val="93C5FD"/>
                 </a:solidFill>
                 <a:latin typeface="Pretendard Variable"/>
               </a:rPr>
@@ -33069,7 +33071,7 @@
             <a:r>
               <a:rPr sz="975">
                 <a:solidFill>
-                  <a:srgbClr val="000000"/>
+                  <a:srgbClr val="1E3A8A"/>
                 </a:solidFill>
                 <a:latin typeface="Pretendard Variable"/>
               </a:rPr>
@@ -33108,7 +33110,7 @@
             <a:r>
               <a:rPr sz="1200" b="1">
                 <a:solidFill>
-                  <a:srgbClr val="000000"/>
+                  <a:srgbClr val="93C5FD"/>
                 </a:solidFill>
                 <a:latin typeface="Pretendard Variable"/>
               </a:rPr>
@@ -33147,7 +33149,7 @@
             <a:r>
               <a:rPr sz="975">
                 <a:solidFill>
-                  <a:srgbClr val="000000"/>
+                  <a:srgbClr val="1E3A8A"/>
                 </a:solidFill>
                 <a:latin typeface="Pretendard Variable"/>
               </a:rPr>
@@ -33186,7 +33188,7 @@
             <a:r>
               <a:rPr sz="1200" b="1">
                 <a:solidFill>
-                  <a:srgbClr val="000000"/>
+                  <a:srgbClr val="1E3A8A"/>
                 </a:solidFill>
                 <a:latin typeface="Pretendard Variable"/>
               </a:rPr>
@@ -33225,7 +33227,7 @@
             <a:r>
               <a:rPr sz="975">
                 <a:solidFill>
-                  <a:srgbClr val="000000"/>
+                  <a:srgbClr val="1E3A8A"/>
                 </a:solidFill>
                 <a:latin typeface="Pretendard Variable"/>
               </a:rPr>
@@ -33264,7 +33266,7 @@
             <a:r>
               <a:rPr sz="1425">
                 <a:solidFill>
-                  <a:srgbClr val="000000"/>
+                  <a:srgbClr val="1E3A8A"/>
                 </a:solidFill>
                 <a:latin typeface="Pretendard Variable"/>
               </a:rPr>
@@ -33345,7 +33347,7 @@
             <a:r>
               <a:rPr sz="1800" b="1">
                 <a:solidFill>
-                  <a:srgbClr val="000000"/>
+                  <a:srgbClr val="0F172A"/>
                 </a:solidFill>
                 <a:latin typeface="Pretendard Variable"/>
               </a:rPr>
@@ -33384,7 +33386,7 @@
             <a:r>
               <a:rPr sz="3900" b="1">
                 <a:solidFill>
-                  <a:srgbClr val="000000"/>
+                  <a:srgbClr val="1D1D1F"/>
                 </a:solidFill>
                 <a:latin typeface="Pretendard Variable"/>
               </a:rPr>
@@ -33423,7 +33425,7 @@
             <a:r>
               <a:rPr sz="975" b="1">
                 <a:solidFill>
-                  <a:srgbClr val="000000"/>
+                  <a:srgbClr val="FFFFFF"/>
                 </a:solidFill>
                 <a:latin typeface="Pretendard Variable"/>
               </a:rPr>
@@ -33462,7 +33464,7 @@
             <a:r>
               <a:rPr sz="1800" b="1">
                 <a:solidFill>
-                  <a:srgbClr val="000000"/>
+                  <a:srgbClr val="1E3A8A"/>
                 </a:solidFill>
                 <a:latin typeface="Pretendard Variable"/>
               </a:rPr>
@@ -33501,7 +33503,7 @@
             <a:r>
               <a:rPr sz="675" b="1">
                 <a:solidFill>
-                  <a:srgbClr val="000000"/>
+                  <a:srgbClr val="FFFFFF"/>
                 </a:solidFill>
                 <a:latin typeface="Pretendard Variable"/>
               </a:rPr>
@@ -33540,7 +33542,7 @@
             <a:r>
               <a:rPr sz="675" b="1">
                 <a:solidFill>
-                  <a:srgbClr val="000000"/>
+                  <a:srgbClr val="FFFFFF"/>
                 </a:solidFill>
                 <a:latin typeface="Pretendard Variable"/>
               </a:rPr>
@@ -33579,7 +33581,7 @@
             <a:r>
               <a:rPr sz="675" b="1">
                 <a:solidFill>
-                  <a:srgbClr val="000000"/>
+                  <a:srgbClr val="FFFFFF"/>
                 </a:solidFill>
                 <a:latin typeface="Pretendard Variable"/>
               </a:rPr>
@@ -33618,7 +33620,7 @@
             <a:r>
               <a:rPr sz="975" b="1">
                 <a:solidFill>
-                  <a:srgbClr val="000000"/>
+                  <a:srgbClr val="1E3A8A"/>
                 </a:solidFill>
                 <a:latin typeface="Pretendard Variable"/>
               </a:rPr>
@@ -33657,7 +33659,7 @@
             <a:r>
               <a:rPr sz="975" b="1">
                 <a:solidFill>
-                  <a:srgbClr val="000000"/>
+                  <a:srgbClr val="FFFFFF"/>
                 </a:solidFill>
                 <a:latin typeface="Pretendard Variable"/>
               </a:rPr>
@@ -33696,7 +33698,7 @@
             <a:r>
               <a:rPr sz="1800" b="1">
                 <a:solidFill>
-                  <a:srgbClr val="000000"/>
+                  <a:srgbClr val="1E3A8A"/>
                 </a:solidFill>
                 <a:latin typeface="Pretendard Variable"/>
               </a:rPr>
@@ -33735,7 +33737,7 @@
             <a:r>
               <a:rPr sz="1200" b="1">
                 <a:solidFill>
-                  <a:srgbClr val="000000"/>
+                  <a:srgbClr val="0F172A"/>
                 </a:solidFill>
                 <a:latin typeface="Pretendard Variable"/>
               </a:rPr>
@@ -33774,7 +33776,7 @@
             <a:r>
               <a:rPr sz="975">
                 <a:solidFill>
-                  <a:srgbClr val="000000"/>
+                  <a:srgbClr val="1E3A8A"/>
                 </a:solidFill>
                 <a:latin typeface="Pretendard Variable"/>
               </a:rPr>
@@ -33813,7 +33815,7 @@
             <a:r>
               <a:rPr sz="1200" b="1">
                 <a:solidFill>
-                  <a:srgbClr val="000000"/>
+                  <a:srgbClr val="0F172A"/>
                 </a:solidFill>
                 <a:latin typeface="Pretendard Variable"/>
               </a:rPr>
@@ -33852,7 +33854,7 @@
             <a:r>
               <a:rPr sz="975">
                 <a:solidFill>
-                  <a:srgbClr val="000000"/>
+                  <a:srgbClr val="1E3A8A"/>
                 </a:solidFill>
                 <a:latin typeface="Pretendard Variable"/>
               </a:rPr>
@@ -33891,7 +33893,7 @@
             <a:r>
               <a:rPr sz="1200" b="1">
                 <a:solidFill>
-                  <a:srgbClr val="000000"/>
+                  <a:srgbClr val="0F172A"/>
                 </a:solidFill>
                 <a:latin typeface="Pretendard Variable"/>
               </a:rPr>
@@ -33930,7 +33932,7 @@
             <a:r>
               <a:rPr sz="975">
                 <a:solidFill>
-                  <a:srgbClr val="000000"/>
+                  <a:srgbClr val="1E3A8A"/>
                 </a:solidFill>
                 <a:latin typeface="Pretendard Variable"/>
               </a:rPr>
@@ -33969,7 +33971,7 @@
             <a:r>
               <a:rPr sz="1425">
                 <a:solidFill>
-                  <a:srgbClr val="000000"/>
+                  <a:srgbClr val="1E3A8A"/>
                 </a:solidFill>
                 <a:latin typeface="Pretendard Variable"/>
               </a:rPr>
@@ -34050,7 +34052,7 @@
             <a:r>
               <a:rPr sz="1800" b="1">
                 <a:solidFill>
-                  <a:srgbClr val="000000"/>
+                  <a:srgbClr val="0F172A"/>
                 </a:solidFill>
                 <a:latin typeface="Pretendard Variable"/>
               </a:rPr>
@@ -34089,7 +34091,7 @@
             <a:r>
               <a:rPr sz="3900" b="1">
                 <a:solidFill>
-                  <a:srgbClr val="000000"/>
+                  <a:srgbClr val="1D1D1F"/>
                 </a:solidFill>
                 <a:latin typeface="Pretendard Variable"/>
               </a:rPr>
@@ -34128,7 +34130,7 @@
             <a:r>
               <a:rPr sz="975" b="1">
                 <a:solidFill>
-                  <a:srgbClr val="000000"/>
+                  <a:srgbClr val="FFFFFF"/>
                 </a:solidFill>
                 <a:latin typeface="Pretendard Variable"/>
               </a:rPr>
@@ -34167,7 +34169,7 @@
             <a:r>
               <a:rPr sz="1800" b="1">
                 <a:solidFill>
-                  <a:srgbClr val="000000"/>
+                  <a:srgbClr val="FFFFFF"/>
                 </a:solidFill>
                 <a:latin typeface="Pretendard Variable"/>
               </a:rPr>
@@ -34206,7 +34208,7 @@
             <a:r>
               <a:rPr sz="975" b="1">
                 <a:solidFill>
-                  <a:srgbClr val="000000"/>
+                  <a:srgbClr val="1E3A8A"/>
                 </a:solidFill>
                 <a:latin typeface="Pretendard Variable"/>
               </a:rPr>
@@ -34245,7 +34247,7 @@
             <a:r>
               <a:rPr sz="900" b="1">
                 <a:solidFill>
-                  <a:srgbClr val="000000"/>
+                  <a:srgbClr val="1E3A8A"/>
                 </a:solidFill>
                 <a:latin typeface="Pretendard Variable"/>
               </a:rPr>
@@ -34284,7 +34286,7 @@
             <a:r>
               <a:rPr sz="975" b="1">
                 <a:solidFill>
-                  <a:srgbClr val="000000"/>
+                  <a:srgbClr val="FFFFFF"/>
                 </a:solidFill>
                 <a:latin typeface="Pretendard Variable"/>
               </a:rPr>
@@ -34323,7 +34325,7 @@
             <a:r>
               <a:rPr sz="1800" b="1">
                 <a:solidFill>
-                  <a:srgbClr val="000000"/>
+                  <a:srgbClr val="1E3A8A"/>
                 </a:solidFill>
                 <a:latin typeface="Pretendard Variable"/>
               </a:rPr>
@@ -34362,7 +34364,7 @@
             <a:r>
               <a:rPr sz="975" b="1">
                 <a:solidFill>
-                  <a:srgbClr val="000000"/>
+                  <a:srgbClr val="1E3A8A"/>
                 </a:solidFill>
                 <a:latin typeface="Pretendard Variable"/>
               </a:rPr>
@@ -34401,7 +34403,7 @@
             <a:r>
               <a:rPr sz="900" b="1">
                 <a:solidFill>
-                  <a:srgbClr val="000000"/>
+                  <a:srgbClr val="1E3A8A"/>
                 </a:solidFill>
                 <a:latin typeface="Pretendard Variable"/>
               </a:rPr>
@@ -34440,7 +34442,7 @@
             <a:r>
               <a:rPr sz="1425">
                 <a:solidFill>
-                  <a:srgbClr val="000000"/>
+                  <a:srgbClr val="1E3A8A"/>
                 </a:solidFill>
                 <a:latin typeface="Pretendard Variable"/>
               </a:rPr>
@@ -34521,7 +34523,7 @@
             <a:r>
               <a:rPr sz="1950" b="1">
                 <a:solidFill>
-                  <a:srgbClr val="000000"/>
+                  <a:srgbClr val="0F172A"/>
                 </a:solidFill>
                 <a:latin typeface="Pretendard Variable"/>
               </a:rPr>
@@ -34560,7 +34562,7 @@
             <a:r>
               <a:rPr sz="4950" b="1">
                 <a:solidFill>
-                  <a:srgbClr val="000000"/>
+                  <a:srgbClr val="0F172A"/>
                 </a:solidFill>
                 <a:latin typeface="Pretendard Variable"/>
               </a:rPr>
@@ -34641,7 +34643,7 @@
             <a:r>
               <a:rPr sz="1800" b="1">
                 <a:solidFill>
-                  <a:srgbClr val="000000"/>
+                  <a:srgbClr val="0F172A"/>
                 </a:solidFill>
                 <a:latin typeface="Pretendard Variable"/>
               </a:rPr>
@@ -34680,7 +34682,7 @@
             <a:r>
               <a:rPr sz="3900" b="1">
                 <a:solidFill>
-                  <a:srgbClr val="000000"/>
+                  <a:srgbClr val="1D1D1F"/>
                 </a:solidFill>
                 <a:latin typeface="Pretendard Variable"/>
               </a:rPr>
@@ -34719,7 +34721,7 @@
             <a:r>
               <a:rPr sz="975" b="1">
                 <a:solidFill>
-                  <a:srgbClr val="000000"/>
+                  <a:srgbClr val="FFFFFF"/>
                 </a:solidFill>
                 <a:latin typeface="Pretendard Variable"/>
               </a:rPr>
@@ -34758,7 +34760,7 @@
             <a:r>
               <a:rPr sz="1800" b="1">
                 <a:solidFill>
-                  <a:srgbClr val="000000"/>
+                  <a:srgbClr val="1E3A8A"/>
                 </a:solidFill>
                 <a:latin typeface="Pretendard Variable"/>
               </a:rPr>
@@ -34797,7 +34799,7 @@
             <a:r>
               <a:rPr sz="975" b="1">
                 <a:solidFill>
-                  <a:srgbClr val="000000"/>
+                  <a:srgbClr val="FFFFFF"/>
                 </a:solidFill>
                 <a:latin typeface="Pretendard Variable"/>
               </a:rPr>
@@ -34836,7 +34838,7 @@
             <a:r>
               <a:rPr sz="1800" b="1">
                 <a:solidFill>
-                  <a:srgbClr val="000000"/>
+                  <a:srgbClr val="1E3A8A"/>
                 </a:solidFill>
                 <a:latin typeface="Pretendard Variable"/>
               </a:rPr>
@@ -34875,7 +34877,7 @@
             <a:r>
               <a:rPr sz="900" b="1">
                 <a:solidFill>
-                  <a:srgbClr val="000000"/>
+                  <a:srgbClr val="1E3A8A"/>
                 </a:solidFill>
                 <a:latin typeface="Pretendard Variable"/>
               </a:rPr>
@@ -34914,7 +34916,7 @@
             <a:r>
               <a:rPr sz="1425">
                 <a:solidFill>
-                  <a:srgbClr val="000000"/>
+                  <a:srgbClr val="1E3A8A"/>
                 </a:solidFill>
                 <a:latin typeface="Pretendard Variable"/>
               </a:rPr>
@@ -34995,7 +34997,7 @@
             <a:r>
               <a:rPr sz="1800" b="1">
                 <a:solidFill>
-                  <a:srgbClr val="000000"/>
+                  <a:srgbClr val="0F172A"/>
                 </a:solidFill>
                 <a:latin typeface="Pretendard Variable"/>
               </a:rPr>
@@ -35034,7 +35036,7 @@
             <a:r>
               <a:rPr sz="3900" b="1">
                 <a:solidFill>
-                  <a:srgbClr val="000000"/>
+                  <a:srgbClr val="1D1D1F"/>
                 </a:solidFill>
                 <a:latin typeface="Pretendard Variable"/>
               </a:rPr>
@@ -35073,7 +35075,7 @@
             <a:r>
               <a:rPr sz="825" b="1">
                 <a:solidFill>
-                  <a:srgbClr val="000000"/>
+                  <a:srgbClr val="0F172A"/>
                 </a:solidFill>
                 <a:latin typeface="Pretendard Variable"/>
               </a:rPr>
@@ -35112,7 +35114,7 @@
             <a:r>
               <a:rPr sz="1500" b="1">
                 <a:solidFill>
-                  <a:srgbClr val="000000"/>
+                  <a:srgbClr val="1E3A8A"/>
                 </a:solidFill>
                 <a:latin typeface="Pretendard Variable"/>
               </a:rPr>
@@ -35151,7 +35153,7 @@
             <a:r>
               <a:rPr sz="1350" b="1">
                 <a:solidFill>
-                  <a:srgbClr val="000000"/>
+                  <a:srgbClr val="1E3A8A"/>
                 </a:solidFill>
                 <a:latin typeface="Pretendard Variable"/>
               </a:rPr>
@@ -35190,7 +35192,7 @@
             <a:r>
               <a:rPr sz="2700" b="1">
                 <a:solidFill>
-                  <a:srgbClr val="000000"/>
+                  <a:srgbClr val="1E3A8A"/>
                 </a:solidFill>
                 <a:latin typeface="Pretendard Variable"/>
               </a:rPr>
@@ -35229,7 +35231,7 @@
             <a:r>
               <a:rPr sz="900" b="1">
                 <a:solidFill>
-                  <a:srgbClr val="000000"/>
+                  <a:srgbClr val="1E3A8A"/>
                 </a:solidFill>
                 <a:latin typeface="Pretendard Variable"/>
               </a:rPr>
@@ -35268,7 +35270,7 @@
             <a:r>
               <a:rPr sz="900" b="1">
                 <a:solidFill>
-                  <a:srgbClr val="000000"/>
+                  <a:srgbClr val="1E3A8A"/>
                 </a:solidFill>
                 <a:latin typeface="Pretendard Variable"/>
               </a:rPr>
@@ -35307,7 +35309,7 @@
             <a:r>
               <a:rPr sz="825" b="1">
                 <a:solidFill>
-                  <a:srgbClr val="000000"/>
+                  <a:srgbClr val="0F172A"/>
                 </a:solidFill>
                 <a:latin typeface="Pretendard Variable"/>
               </a:rPr>
@@ -35346,7 +35348,7 @@
             <a:r>
               <a:rPr sz="1500" b="1">
                 <a:solidFill>
-                  <a:srgbClr val="000000"/>
+                  <a:srgbClr val="1E3A8A"/>
                 </a:solidFill>
                 <a:latin typeface="Pretendard Variable"/>
               </a:rPr>
@@ -35385,7 +35387,7 @@
             <a:r>
               <a:rPr sz="1350" b="1">
                 <a:solidFill>
-                  <a:srgbClr val="000000"/>
+                  <a:srgbClr val="1E3A8A"/>
                 </a:solidFill>
                 <a:latin typeface="Pretendard Variable"/>
               </a:rPr>
@@ -35424,7 +35426,7 @@
             <a:r>
               <a:rPr sz="2700" b="1">
                 <a:solidFill>
-                  <a:srgbClr val="000000"/>
+                  <a:srgbClr val="10B981"/>
                 </a:solidFill>
                 <a:latin typeface="Pretendard Variable"/>
               </a:rPr>
@@ -35463,7 +35465,7 @@
             <a:r>
               <a:rPr sz="900" b="1">
                 <a:solidFill>
-                  <a:srgbClr val="000000"/>
+                  <a:srgbClr val="10B981"/>
                 </a:solidFill>
                 <a:latin typeface="Pretendard Variable"/>
               </a:rPr>
@@ -35502,7 +35504,7 @@
             <a:r>
               <a:rPr sz="900" b="1">
                 <a:solidFill>
-                  <a:srgbClr val="000000"/>
+                  <a:srgbClr val="1E3A8A"/>
                 </a:solidFill>
                 <a:latin typeface="Pretendard Variable"/>
               </a:rPr>
@@ -35541,7 +35543,7 @@
             <a:r>
               <a:rPr sz="825" b="1">
                 <a:solidFill>
-                  <a:srgbClr val="000000"/>
+                  <a:srgbClr val="0F172A"/>
                 </a:solidFill>
                 <a:latin typeface="Pretendard Variable"/>
               </a:rPr>
@@ -35580,7 +35582,7 @@
             <a:r>
               <a:rPr sz="1500" b="1">
                 <a:solidFill>
-                  <a:srgbClr val="000000"/>
+                  <a:srgbClr val="1E3A8A"/>
                 </a:solidFill>
                 <a:latin typeface="Pretendard Variable"/>
               </a:rPr>
@@ -35619,7 +35621,7 @@
             <a:r>
               <a:rPr sz="1350" b="1">
                 <a:solidFill>
-                  <a:srgbClr val="000000"/>
+                  <a:srgbClr val="1E3A8A"/>
                 </a:solidFill>
                 <a:latin typeface="Pretendard Variable"/>
               </a:rPr>
@@ -35658,7 +35660,7 @@
             <a:r>
               <a:rPr sz="2700" b="1">
                 <a:solidFill>
-                  <a:srgbClr val="000000"/>
+                  <a:srgbClr val="1E3A8A"/>
                 </a:solidFill>
                 <a:latin typeface="Pretendard Variable"/>
               </a:rPr>
@@ -35697,7 +35699,7 @@
             <a:r>
               <a:rPr sz="900" b="1">
                 <a:solidFill>
-                  <a:srgbClr val="000000"/>
+                  <a:srgbClr val="1E3A8A"/>
                 </a:solidFill>
                 <a:latin typeface="Pretendard Variable"/>
               </a:rPr>
@@ -35736,7 +35738,7 @@
             <a:r>
               <a:rPr sz="900" b="1">
                 <a:solidFill>
-                  <a:srgbClr val="000000"/>
+                  <a:srgbClr val="1E3A8A"/>
                 </a:solidFill>
                 <a:latin typeface="Pretendard Variable"/>
               </a:rPr>
@@ -35775,7 +35777,7 @@
             <a:r>
               <a:rPr sz="825" b="1">
                 <a:solidFill>
-                  <a:srgbClr val="000000"/>
+                  <a:srgbClr val="1E3A8A"/>
                 </a:solidFill>
                 <a:latin typeface="Pretendard Variable"/>
               </a:rPr>
@@ -35814,7 +35816,7 @@
             <a:r>
               <a:rPr sz="1500" b="1">
                 <a:solidFill>
-                  <a:srgbClr val="000000"/>
+                  <a:srgbClr val="FFFFFF"/>
                 </a:solidFill>
                 <a:latin typeface="Pretendard Variable"/>
               </a:rPr>
@@ -35853,7 +35855,7 @@
             <a:r>
               <a:rPr sz="1350" b="1">
                 <a:solidFill>
-                  <a:srgbClr val="000000"/>
+                  <a:srgbClr val="1E3A8A"/>
                 </a:solidFill>
                 <a:latin typeface="Pretendard Variable"/>
               </a:rPr>
@@ -35892,7 +35894,7 @@
             <a:r>
               <a:rPr sz="2700" b="1">
                 <a:solidFill>
-                  <a:srgbClr val="000000"/>
+                  <a:srgbClr val="1E3A8A"/>
                 </a:solidFill>
                 <a:latin typeface="Pretendard Variable"/>
               </a:rPr>
@@ -35931,7 +35933,7 @@
             <a:r>
               <a:rPr sz="900" b="1">
                 <a:solidFill>
-                  <a:srgbClr val="000000"/>
+                  <a:srgbClr val="1E3A8A"/>
                 </a:solidFill>
                 <a:latin typeface="Pretendard Variable"/>
               </a:rPr>
@@ -35970,7 +35972,7 @@
             <a:r>
               <a:rPr sz="900" b="1">
                 <a:solidFill>
-                  <a:srgbClr val="000000"/>
+                  <a:srgbClr val="1E3A8A"/>
                 </a:solidFill>
                 <a:latin typeface="Pretendard Variable"/>
               </a:rPr>
@@ -36009,7 +36011,7 @@
             <a:r>
               <a:rPr sz="1425">
                 <a:solidFill>
-                  <a:srgbClr val="000000"/>
+                  <a:srgbClr val="1E3A8A"/>
                 </a:solidFill>
                 <a:latin typeface="Pretendard Variable"/>
               </a:rPr>
@@ -36090,7 +36092,7 @@
             <a:r>
               <a:rPr sz="1950" b="1">
                 <a:solidFill>
-                  <a:srgbClr val="000000"/>
+                  <a:srgbClr val="0F172A"/>
                 </a:solidFill>
                 <a:latin typeface="Pretendard Variable"/>
               </a:rPr>
@@ -36129,7 +36131,7 @@
             <a:r>
               <a:rPr sz="4950" b="1">
                 <a:solidFill>
-                  <a:srgbClr val="000000"/>
+                  <a:srgbClr val="0F172A"/>
                 </a:solidFill>
                 <a:latin typeface="Pretendard Variable"/>
               </a:rPr>
@@ -36210,7 +36212,7 @@
             <a:r>
               <a:rPr sz="1800" b="1">
                 <a:solidFill>
-                  <a:srgbClr val="000000"/>
+                  <a:srgbClr val="1E3A8A"/>
                 </a:solidFill>
                 <a:latin typeface="Pretendard Variable"/>
               </a:rPr>
@@ -36249,7 +36251,7 @@
             <a:r>
               <a:rPr sz="3900" b="1">
                 <a:solidFill>
-                  <a:srgbClr val="000000"/>
+                  <a:srgbClr val="1D1D1F"/>
                 </a:solidFill>
                 <a:latin typeface="Pretendard Variable"/>
               </a:rPr>
@@ -36288,7 +36290,7 @@
             <a:r>
               <a:rPr sz="900" b="1">
                 <a:solidFill>
-                  <a:srgbClr val="000000"/>
+                  <a:srgbClr val="FFFFFF"/>
                 </a:solidFill>
                 <a:latin typeface="Pretendard Variable"/>
               </a:rPr>
@@ -36327,7 +36329,7 @@
             <a:r>
               <a:rPr sz="1350" b="1">
                 <a:solidFill>
-                  <a:srgbClr val="000000"/>
+                  <a:srgbClr val="FFFFFF"/>
                 </a:solidFill>
                 <a:latin typeface="Pretendard Variable"/>
               </a:rPr>
@@ -36366,7 +36368,7 @@
             <a:r>
               <a:rPr sz="825" b="1">
                 <a:solidFill>
-                  <a:srgbClr val="000000"/>
+                  <a:srgbClr val="1E3A8A"/>
                 </a:solidFill>
                 <a:latin typeface="Pretendard Variable"/>
               </a:rPr>
@@ -36405,7 +36407,7 @@
             <a:r>
               <a:rPr sz="825" b="1">
                 <a:solidFill>
-                  <a:srgbClr val="000000"/>
+                  <a:srgbClr val="1E3A8A"/>
                 </a:solidFill>
                 <a:latin typeface="Pretendard Variable"/>
               </a:rPr>
@@ -36444,7 +36446,7 @@
             <a:r>
               <a:rPr sz="1200" b="1">
                 <a:solidFill>
-                  <a:srgbClr val="000000"/>
+                  <a:srgbClr val="1E3A8A"/>
                 </a:solidFill>
                 <a:latin typeface="Pretendard Variable"/>
               </a:rPr>
@@ -36483,7 +36485,7 @@
             <a:r>
               <a:rPr sz="900" b="1">
                 <a:solidFill>
-                  <a:srgbClr val="000000"/>
+                  <a:srgbClr val="1E3A8A"/>
                 </a:solidFill>
                 <a:latin typeface="Pretendard Variable"/>
               </a:rPr>
@@ -36522,7 +36524,7 @@
             <a:r>
               <a:rPr sz="825" b="1">
                 <a:solidFill>
-                  <a:srgbClr val="000000"/>
+                  <a:srgbClr val="1E3A8A"/>
                 </a:solidFill>
                 <a:latin typeface="Pretendard Variable"/>
               </a:rPr>
@@ -36561,7 +36563,7 @@
             <a:r>
               <a:rPr sz="1200" b="1">
                 <a:solidFill>
-                  <a:srgbClr val="000000"/>
+                  <a:srgbClr val="1E3A8A"/>
                 </a:solidFill>
                 <a:latin typeface="Pretendard Variable"/>
               </a:rPr>
@@ -36600,7 +36602,7 @@
             <a:r>
               <a:rPr sz="900" b="1">
                 <a:solidFill>
-                  <a:srgbClr val="000000"/>
+                  <a:srgbClr val="1E3A8A"/>
                 </a:solidFill>
                 <a:latin typeface="Pretendard Variable"/>
               </a:rPr>
@@ -36639,7 +36641,7 @@
             <a:r>
               <a:rPr sz="825" b="1">
                 <a:solidFill>
-                  <a:srgbClr val="000000"/>
+                  <a:srgbClr val="1E3A8A"/>
                 </a:solidFill>
                 <a:latin typeface="Pretendard Variable"/>
               </a:rPr>
@@ -36678,7 +36680,7 @@
             <a:r>
               <a:rPr sz="1200" b="1">
                 <a:solidFill>
-                  <a:srgbClr val="000000"/>
+                  <a:srgbClr val="FFFFFF"/>
                 </a:solidFill>
                 <a:latin typeface="Pretendard Variable"/>
               </a:rPr>
@@ -36717,7 +36719,7 @@
             <a:r>
               <a:rPr sz="900" b="1">
                 <a:solidFill>
-                  <a:srgbClr val="000000"/>
+                  <a:srgbClr val="1E3A8A"/>
                 </a:solidFill>
                 <a:latin typeface="Pretendard Variable"/>
               </a:rPr>
@@ -36756,7 +36758,7 @@
             <a:r>
               <a:rPr sz="1425">
                 <a:solidFill>
-                  <a:srgbClr val="000000"/>
+                  <a:srgbClr val="1E3A8A"/>
                 </a:solidFill>
                 <a:latin typeface="Pretendard Variable"/>
               </a:rPr>
@@ -36837,7 +36839,7 @@
             <a:r>
               <a:rPr sz="1800" b="1">
                 <a:solidFill>
-                  <a:srgbClr val="000000"/>
+                  <a:srgbClr val="0F172A"/>
                 </a:solidFill>
                 <a:latin typeface="Pretendard Variable"/>
               </a:rPr>
@@ -36876,7 +36878,7 @@
             <a:r>
               <a:rPr sz="3900" b="1">
                 <a:solidFill>
-                  <a:srgbClr val="000000"/>
+                  <a:srgbClr val="1D1D1F"/>
                 </a:solidFill>
                 <a:latin typeface="Pretendard Variable"/>
               </a:rPr>
@@ -36915,7 +36917,7 @@
             <a:r>
               <a:rPr sz="975" b="1">
                 <a:solidFill>
-                  <a:srgbClr val="000000"/>
+                  <a:srgbClr val="FFFFFF"/>
                 </a:solidFill>
                 <a:latin typeface="Pretendard Variable"/>
               </a:rPr>
@@ -36954,7 +36956,7 @@
             <a:r>
               <a:rPr sz="1800" b="1">
                 <a:solidFill>
-                  <a:srgbClr val="000000"/>
+                  <a:srgbClr val="1E3A8A"/>
                 </a:solidFill>
                 <a:latin typeface="Pretendard Variable"/>
               </a:rPr>
@@ -36993,7 +36995,7 @@
             <a:r>
               <a:rPr sz="900" b="1">
                 <a:solidFill>
-                  <a:srgbClr val="000000"/>
+                  <a:srgbClr val="1E3A8A"/>
                 </a:solidFill>
                 <a:latin typeface="Pretendard Variable"/>
               </a:rPr>
@@ -37071,7 +37073,7 @@
             <a:r>
               <a:rPr sz="1800" b="1">
                 <a:solidFill>
-                  <a:srgbClr val="000000"/>
+                  <a:srgbClr val="FFFFFF"/>
                 </a:solidFill>
                 <a:latin typeface="Pretendard Variable"/>
               </a:rPr>
@@ -37110,7 +37112,7 @@
             <a:r>
               <a:rPr sz="1125" b="1">
                 <a:solidFill>
-                  <a:srgbClr val="000000"/>
+                  <a:srgbClr val="FFFFFF"/>
                 </a:solidFill>
                 <a:latin typeface="Pretendard Variable"/>
               </a:rPr>
@@ -37149,7 +37151,7 @@
             <a:r>
               <a:rPr sz="900">
                 <a:solidFill>
-                  <a:srgbClr val="000000"/>
+                  <a:srgbClr val="1E3A8A"/>
                 </a:solidFill>
                 <a:latin typeface="Pretendard Variable"/>
               </a:rPr>
@@ -37188,7 +37190,7 @@
             <a:r>
               <a:rPr sz="1125" b="1">
                 <a:solidFill>
-                  <a:srgbClr val="000000"/>
+                  <a:srgbClr val="FFFFFF"/>
                 </a:solidFill>
                 <a:latin typeface="Pretendard Variable"/>
               </a:rPr>
@@ -37227,7 +37229,7 @@
             <a:r>
               <a:rPr sz="900">
                 <a:solidFill>
-                  <a:srgbClr val="000000"/>
+                  <a:srgbClr val="1E3A8A"/>
                 </a:solidFill>
                 <a:latin typeface="Pretendard Variable"/>
               </a:rPr>
@@ -37266,7 +37268,7 @@
             <a:r>
               <a:rPr sz="1125" b="1">
                 <a:solidFill>
-                  <a:srgbClr val="000000"/>
+                  <a:srgbClr val="FFFFFF"/>
                 </a:solidFill>
                 <a:latin typeface="Pretendard Variable"/>
               </a:rPr>
@@ -37305,7 +37307,7 @@
             <a:r>
               <a:rPr sz="900">
                 <a:solidFill>
-                  <a:srgbClr val="000000"/>
+                  <a:srgbClr val="1E3A8A"/>
                 </a:solidFill>
                 <a:latin typeface="Pretendard Variable"/>
               </a:rPr>
@@ -37344,7 +37346,7 @@
             <a:r>
               <a:rPr sz="1425">
                 <a:solidFill>
-                  <a:srgbClr val="000000"/>
+                  <a:srgbClr val="1E3A8A"/>
                 </a:solidFill>
                 <a:latin typeface="Pretendard Variable"/>
               </a:rPr>
@@ -37425,7 +37427,7 @@
             <a:r>
               <a:rPr sz="1800" b="1">
                 <a:solidFill>
-                  <a:srgbClr val="000000"/>
+                  <a:srgbClr val="0F172A"/>
                 </a:solidFill>
                 <a:latin typeface="Pretendard Variable"/>
               </a:rPr>
@@ -37464,7 +37466,7 @@
             <a:r>
               <a:rPr sz="3900" b="1">
                 <a:solidFill>
-                  <a:srgbClr val="000000"/>
+                  <a:srgbClr val="1D1D1F"/>
                 </a:solidFill>
                 <a:latin typeface="Pretendard Variable"/>
               </a:rPr>
@@ -37503,7 +37505,7 @@
             <a:r>
               <a:rPr sz="975" b="1">
                 <a:solidFill>
-                  <a:srgbClr val="000000"/>
+                  <a:srgbClr val="FFFFFF"/>
                 </a:solidFill>
                 <a:latin typeface="Pretendard Variable"/>
               </a:rPr>
@@ -37542,7 +37544,7 @@
             <a:r>
               <a:rPr sz="1800" b="1">
                 <a:solidFill>
-                  <a:srgbClr val="000000"/>
+                  <a:srgbClr val="1E3A8A"/>
                 </a:solidFill>
                 <a:latin typeface="Pretendard Variable"/>
               </a:rPr>
@@ -37581,7 +37583,7 @@
             <a:r>
               <a:rPr sz="900" b="1">
                 <a:solidFill>
-                  <a:srgbClr val="000000"/>
+                  <a:srgbClr val="1E3A8A"/>
                 </a:solidFill>
                 <a:latin typeface="Pretendard Variable"/>
               </a:rPr>
@@ -37620,7 +37622,7 @@
             <a:r>
               <a:rPr sz="900" b="1">
                 <a:solidFill>
-                  <a:srgbClr val="000000"/>
+                  <a:srgbClr val="1E3A8A"/>
                 </a:solidFill>
                 <a:latin typeface="Pretendard Variable"/>
               </a:rPr>
@@ -37659,7 +37661,7 @@
             <a:r>
               <a:rPr sz="975" b="1">
                 <a:solidFill>
-                  <a:srgbClr val="000000"/>
+                  <a:srgbClr val="FFFFFF"/>
                 </a:solidFill>
                 <a:latin typeface="Pretendard Variable"/>
               </a:rPr>
@@ -37698,7 +37700,7 @@
             <a:r>
               <a:rPr sz="1800" b="1">
                 <a:solidFill>
-                  <a:srgbClr val="000000"/>
+                  <a:srgbClr val="1E3A8A"/>
                 </a:solidFill>
                 <a:latin typeface="Pretendard Variable"/>
               </a:rPr>
@@ -37737,7 +37739,7 @@
             <a:r>
               <a:rPr sz="1125" b="1">
                 <a:solidFill>
-                  <a:srgbClr val="000000"/>
+                  <a:srgbClr val="0F172A"/>
                 </a:solidFill>
                 <a:latin typeface="Pretendard Variable"/>
               </a:rPr>
@@ -37776,7 +37778,7 @@
             <a:r>
               <a:rPr sz="900">
                 <a:solidFill>
-                  <a:srgbClr val="000000"/>
+                  <a:srgbClr val="1E3A8A"/>
                 </a:solidFill>
                 <a:latin typeface="Pretendard Variable"/>
               </a:rPr>
@@ -37815,7 +37817,7 @@
             <a:r>
               <a:rPr sz="1125" b="1">
                 <a:solidFill>
-                  <a:srgbClr val="000000"/>
+                  <a:srgbClr val="0F172A"/>
                 </a:solidFill>
                 <a:latin typeface="Pretendard Variable"/>
               </a:rPr>
@@ -37854,7 +37856,7 @@
             <a:r>
               <a:rPr sz="900">
                 <a:solidFill>
-                  <a:srgbClr val="000000"/>
+                  <a:srgbClr val="1E3A8A"/>
                 </a:solidFill>
                 <a:latin typeface="Pretendard Variable"/>
               </a:rPr>
@@ -37893,7 +37895,7 @@
             <a:r>
               <a:rPr sz="1125" b="1">
                 <a:solidFill>
-                  <a:srgbClr val="000000"/>
+                  <a:srgbClr val="0F172A"/>
                 </a:solidFill>
                 <a:latin typeface="Pretendard Variable"/>
               </a:rPr>
@@ -37932,7 +37934,7 @@
             <a:r>
               <a:rPr sz="900">
                 <a:solidFill>
-                  <a:srgbClr val="000000"/>
+                  <a:srgbClr val="1E3A8A"/>
                 </a:solidFill>
                 <a:latin typeface="Pretendard Variable"/>
               </a:rPr>
@@ -37971,7 +37973,7 @@
             <a:r>
               <a:rPr sz="1425">
                 <a:solidFill>
-                  <a:srgbClr val="000000"/>
+                  <a:srgbClr val="1E3A8A"/>
                 </a:solidFill>
                 <a:latin typeface="Pretendard Variable"/>
               </a:rPr>
@@ -38052,7 +38054,7 @@
             <a:r>
               <a:rPr sz="1800" b="1">
                 <a:solidFill>
-                  <a:srgbClr val="000000"/>
+                  <a:srgbClr val="0F172A"/>
                 </a:solidFill>
                 <a:latin typeface="Pretendard Variable"/>
               </a:rPr>
@@ -38091,7 +38093,7 @@
             <a:r>
               <a:rPr sz="3900" b="1">
                 <a:solidFill>
-                  <a:srgbClr val="000000"/>
+                  <a:srgbClr val="1D1D1F"/>
                 </a:solidFill>
                 <a:latin typeface="Pretendard Variable"/>
               </a:rPr>
@@ -38130,7 +38132,7 @@
             <a:r>
               <a:rPr sz="975" b="1">
                 <a:solidFill>
-                  <a:srgbClr val="000000"/>
+                  <a:srgbClr val="FFFFFF"/>
                 </a:solidFill>
                 <a:latin typeface="Pretendard Variable"/>
               </a:rPr>
@@ -38169,7 +38171,7 @@
             <a:r>
               <a:rPr sz="1800" b="1">
                 <a:solidFill>
-                  <a:srgbClr val="000000"/>
+                  <a:srgbClr val="1E3A8A"/>
                 </a:solidFill>
                 <a:latin typeface="Pretendard Variable"/>
               </a:rPr>
@@ -38247,7 +38249,7 @@
             <a:r>
               <a:rPr sz="1800" b="1">
                 <a:solidFill>
-                  <a:srgbClr val="000000"/>
+                  <a:srgbClr val="FFFFFF"/>
                 </a:solidFill>
                 <a:latin typeface="Pretendard Variable"/>
               </a:rPr>
@@ -38286,7 +38288,7 @@
             <a:r>
               <a:rPr sz="1125" b="1">
                 <a:solidFill>
-                  <a:srgbClr val="000000"/>
+                  <a:srgbClr val="FFFFFF"/>
                 </a:solidFill>
                 <a:latin typeface="Pretendard Variable"/>
               </a:rPr>
@@ -38325,7 +38327,7 @@
             <a:r>
               <a:rPr sz="900">
                 <a:solidFill>
-                  <a:srgbClr val="000000"/>
+                  <a:srgbClr val="1E3A8A"/>
                 </a:solidFill>
                 <a:latin typeface="Pretendard Variable"/>
               </a:rPr>
@@ -38364,7 +38366,7 @@
             <a:r>
               <a:rPr sz="1125" b="1">
                 <a:solidFill>
-                  <a:srgbClr val="000000"/>
+                  <a:srgbClr val="FFFFFF"/>
                 </a:solidFill>
                 <a:latin typeface="Pretendard Variable"/>
               </a:rPr>
@@ -38403,7 +38405,7 @@
             <a:r>
               <a:rPr sz="900">
                 <a:solidFill>
-                  <a:srgbClr val="000000"/>
+                  <a:srgbClr val="1E3A8A"/>
                 </a:solidFill>
                 <a:latin typeface="Pretendard Variable"/>
               </a:rPr>
@@ -38442,7 +38444,7 @@
             <a:r>
               <a:rPr sz="1125" b="1">
                 <a:solidFill>
-                  <a:srgbClr val="000000"/>
+                  <a:srgbClr val="FFFFFF"/>
                 </a:solidFill>
                 <a:latin typeface="Pretendard Variable"/>
               </a:rPr>
@@ -38481,7 +38483,7 @@
             <a:r>
               <a:rPr sz="900">
                 <a:solidFill>
-                  <a:srgbClr val="000000"/>
+                  <a:srgbClr val="1E3A8A"/>
                 </a:solidFill>
                 <a:latin typeface="Pretendard Variable"/>
               </a:rPr>
@@ -38520,7 +38522,7 @@
             <a:r>
               <a:rPr sz="1425">
                 <a:solidFill>
-                  <a:srgbClr val="000000"/>
+                  <a:srgbClr val="1E3A8A"/>
                 </a:solidFill>
                 <a:latin typeface="Pretendard Variable"/>
               </a:rPr>
@@ -38529,6 +38531,90 @@
           </a:p>
         </p:txBody>
       </p:sp>
+    </p:spTree>
+  </p:cSld>
+  <p:clrMapOvr>
+    <a:masterClrMapping/>
+  </p:clrMapOvr>
+</p:sld>
+</file>
+
+<file path=ppt/slides/slide73.xml><?xml version="1.0" encoding="utf-8"?>
+<p:sld xmlns:a="http://schemas.openxmlformats.org/drawingml/2006/main" xmlns:p="http://schemas.openxmlformats.org/presentationml/2006/main" xmlns:r="http://schemas.openxmlformats.org/officeDocument/2006/relationships">
+  <p:cSld>
+    <p:spTree>
+      <p:nvGrpSpPr>
+        <p:cNvPr id="1" name=""/>
+        <p:cNvGrpSpPr/>
+        <p:nvPr/>
+      </p:nvGrpSpPr>
+      <p:grpSpPr/>
+      <p:pic>
+        <p:nvPicPr>
+          <p:cNvPr id="2" name="Picture 1" descr="slide_bg_73.png"/>
+          <p:cNvPicPr>
+            <a:picLocks noChangeAspect="1"/>
+          </p:cNvPicPr>
+          <p:nvPr/>
+        </p:nvPicPr>
+        <p:blipFill>
+          <a:blip r:embed="rId2"/>
+          <a:stretch>
+            <a:fillRect/>
+          </a:stretch>
+        </p:blipFill>
+        <p:spPr>
+          <a:xfrm>
+            <a:off x="0" y="0"/>
+            <a:ext cx="12191695" cy="6858000"/>
+          </a:xfrm>
+          <a:prstGeom prst="rect">
+            <a:avLst/>
+          </a:prstGeom>
+        </p:spPr>
+      </p:pic>
+    </p:spTree>
+  </p:cSld>
+  <p:clrMapOvr>
+    <a:masterClrMapping/>
+  </p:clrMapOvr>
+</p:sld>
+</file>
+
+<file path=ppt/slides/slide74.xml><?xml version="1.0" encoding="utf-8"?>
+<p:sld xmlns:a="http://schemas.openxmlformats.org/drawingml/2006/main" xmlns:p="http://schemas.openxmlformats.org/presentationml/2006/main" xmlns:r="http://schemas.openxmlformats.org/officeDocument/2006/relationships">
+  <p:cSld>
+    <p:spTree>
+      <p:nvGrpSpPr>
+        <p:cNvPr id="1" name=""/>
+        <p:cNvGrpSpPr/>
+        <p:nvPr/>
+      </p:nvGrpSpPr>
+      <p:grpSpPr/>
+      <p:pic>
+        <p:nvPicPr>
+          <p:cNvPr id="2" name="Picture 1" descr="slide_bg_73.png"/>
+          <p:cNvPicPr>
+            <a:picLocks noChangeAspect="1"/>
+          </p:cNvPicPr>
+          <p:nvPr/>
+        </p:nvPicPr>
+        <p:blipFill>
+          <a:blip r:embed="rId2"/>
+          <a:stretch>
+            <a:fillRect/>
+          </a:stretch>
+        </p:blipFill>
+        <p:spPr>
+          <a:xfrm>
+            <a:off x="0" y="0"/>
+            <a:ext cx="12191695" cy="6858000"/>
+          </a:xfrm>
+          <a:prstGeom prst="rect">
+            <a:avLst/>
+          </a:prstGeom>
+        </p:spPr>
+      </p:pic>
     </p:spTree>
   </p:cSld>
   <p:clrMapOvr>
@@ -38601,7 +38687,7 @@
             <a:r>
               <a:rPr sz="1950" b="1">
                 <a:solidFill>
-                  <a:srgbClr val="000000"/>
+                  <a:srgbClr val="0F172A"/>
                 </a:solidFill>
                 <a:latin typeface="Pretendard Variable"/>
               </a:rPr>
@@ -38640,7 +38726,7 @@
             <a:r>
               <a:rPr sz="4950" b="1">
                 <a:solidFill>
-                  <a:srgbClr val="000000"/>
+                  <a:srgbClr val="0F172A"/>
                 </a:solidFill>
                 <a:latin typeface="Pretendard Variable"/>
               </a:rPr>
@@ -38721,7 +38807,7 @@
             <a:r>
               <a:rPr sz="1800" b="1">
                 <a:solidFill>
-                  <a:srgbClr val="000000"/>
+                  <a:srgbClr val="E11D48"/>
                 </a:solidFill>
                 <a:latin typeface="Pretendard Variable"/>
               </a:rPr>
@@ -38760,7 +38846,7 @@
             <a:r>
               <a:rPr sz="3900" b="1">
                 <a:solidFill>
-                  <a:srgbClr val="000000"/>
+                  <a:srgbClr val="1D1D1F"/>
                 </a:solidFill>
                 <a:latin typeface="Pretendard Variable"/>
               </a:rPr>
@@ -38799,7 +38885,7 @@
             <a:r>
               <a:rPr sz="975" b="1">
                 <a:solidFill>
-                  <a:srgbClr val="000000"/>
+                  <a:srgbClr val="FFFFFF"/>
                 </a:solidFill>
                 <a:latin typeface="Pretendard Variable"/>
               </a:rPr>
@@ -38838,7 +38924,7 @@
             <a:r>
               <a:rPr sz="1950" b="1">
                 <a:solidFill>
-                  <a:srgbClr val="000000"/>
+                  <a:srgbClr val="1E3A8A"/>
                 </a:solidFill>
                 <a:latin typeface="Pretendard Variable"/>
               </a:rPr>
@@ -38877,7 +38963,7 @@
             <a:r>
               <a:rPr sz="1200" b="1">
                 <a:solidFill>
-                  <a:srgbClr val="000000"/>
+                  <a:srgbClr val="1E3A8A"/>
                 </a:solidFill>
                 <a:latin typeface="Pretendard Variable"/>
               </a:rPr>
@@ -38916,7 +39002,7 @@
             <a:r>
               <a:rPr sz="975">
                 <a:solidFill>
-                  <a:srgbClr val="000000"/>
+                  <a:srgbClr val="1E3A8A"/>
                 </a:solidFill>
                 <a:latin typeface="Pretendard Variable"/>
               </a:rPr>
@@ -38955,7 +39041,7 @@
             <a:r>
               <a:rPr sz="1200" b="1">
                 <a:solidFill>
-                  <a:srgbClr val="000000"/>
+                  <a:srgbClr val="1E3A8A"/>
                 </a:solidFill>
                 <a:latin typeface="Pretendard Variable"/>
               </a:rPr>
@@ -38994,7 +39080,7 @@
             <a:r>
               <a:rPr sz="975">
                 <a:solidFill>
-                  <a:srgbClr val="000000"/>
+                  <a:srgbClr val="1E3A8A"/>
                 </a:solidFill>
                 <a:latin typeface="Pretendard Variable"/>
               </a:rPr>
@@ -39033,7 +39119,7 @@
             <a:r>
               <a:rPr sz="975" b="1">
                 <a:solidFill>
-                  <a:srgbClr val="000000"/>
+                  <a:srgbClr val="1E3A8A"/>
                 </a:solidFill>
                 <a:latin typeface="Pretendard Variable"/>
               </a:rPr>
@@ -39072,7 +39158,7 @@
             <a:r>
               <a:rPr sz="975" b="1">
                 <a:solidFill>
-                  <a:srgbClr val="000000"/>
+                  <a:srgbClr val="FFFFFF"/>
                 </a:solidFill>
                 <a:latin typeface="Pretendard Variable"/>
               </a:rPr>
@@ -39111,7 +39197,7 @@
             <a:r>
               <a:rPr sz="1950" b="1">
                 <a:solidFill>
-                  <a:srgbClr val="000000"/>
+                  <a:srgbClr val="FFFFFF"/>
                 </a:solidFill>
                 <a:latin typeface="Pretendard Variable"/>
               </a:rPr>
@@ -39150,7 +39236,7 @@
             <a:r>
               <a:rPr sz="900" b="1">
                 <a:solidFill>
-                  <a:srgbClr val="000000"/>
+                  <a:srgbClr val="1E3A8A"/>
                 </a:solidFill>
                 <a:latin typeface="Pretendard Variable"/>
               </a:rPr>
@@ -39189,7 +39275,7 @@
             <a:r>
               <a:rPr sz="2850" b="1">
                 <a:solidFill>
-                  <a:srgbClr val="000000"/>
+                  <a:srgbClr val="FFFFFF"/>
                 </a:solidFill>
                 <a:latin typeface="Pretendard Variable"/>
               </a:rPr>
@@ -39228,7 +39314,7 @@
             <a:r>
               <a:rPr sz="900" b="1">
                 <a:solidFill>
-                  <a:srgbClr val="000000"/>
+                  <a:srgbClr val="1E3A8A"/>
                 </a:solidFill>
                 <a:latin typeface="Pretendard Variable"/>
               </a:rPr>
@@ -39267,7 +39353,7 @@
             <a:r>
               <a:rPr sz="900" b="1">
                 <a:solidFill>
-                  <a:srgbClr val="000000"/>
+                  <a:srgbClr val="1E3A8A"/>
                 </a:solidFill>
                 <a:latin typeface="Pretendard Variable"/>
               </a:rPr>
@@ -39306,7 +39392,7 @@
             <a:r>
               <a:rPr sz="2850" b="1">
                 <a:solidFill>
-                  <a:srgbClr val="000000"/>
+                  <a:srgbClr val="FFFFFF"/>
                 </a:solidFill>
                 <a:latin typeface="Pretendard Variable"/>
               </a:rPr>
@@ -39345,7 +39431,7 @@
             <a:r>
               <a:rPr sz="900" b="1">
                 <a:solidFill>
-                  <a:srgbClr val="000000"/>
+                  <a:srgbClr val="1E3A8A"/>
                 </a:solidFill>
                 <a:latin typeface="Pretendard Variable"/>
               </a:rPr>
@@ -39384,7 +39470,7 @@
             <a:r>
               <a:rPr sz="975" b="1">
                 <a:solidFill>
-                  <a:srgbClr val="000000"/>
+                  <a:srgbClr val="1E3A8A"/>
                 </a:solidFill>
                 <a:latin typeface="Pretendard Variable"/>
               </a:rPr>
@@ -39423,7 +39509,7 @@
             <a:r>
               <a:rPr sz="1425">
                 <a:solidFill>
-                  <a:srgbClr val="000000"/>
+                  <a:srgbClr val="1E3A8A"/>
                 </a:solidFill>
                 <a:latin typeface="Pretendard Variable"/>
               </a:rPr>
